--- a/slides/week14/hardening-web-apps.pptx
+++ b/slides/week14/hardening-web-apps.pptx
@@ -1,11 +1,14 @@
 
 <file path=ppt/presentation.xml><?xml version="1.0" encoding="utf-8"?>
-<p:presentation xmlns:a="http://schemas.openxmlformats.org/drawingml/2006/main" xmlns:p="http://schemas.openxmlformats.org/presentationml/2006/main" xmlns:r="http://schemas.openxmlformats.org/officeDocument/2006/relationships" autoCompressPictures="0" saveSubsetFonts="1">
+<p:presentation xmlns:a="http://schemas.openxmlformats.org/drawingml/2006/main" xmlns:r="http://schemas.openxmlformats.org/officeDocument/2006/relationships" xmlns:p="http://schemas.openxmlformats.org/presentationml/2006/main" saveSubsetFonts="1" autoCompressPictures="0">
   <p:sldMasterIdLst>
     <p:sldMasterId id="2147483648" r:id="rId1"/>
   </p:sldMasterIdLst>
+  <p:notesMasterIdLst>
+    <p:notesMasterId r:id="rId56"/>
+  </p:notesMasterIdLst>
   <p:sldIdLst>
-    <p:sldId id="256" r:id="rId2"/>
+    <p:sldId id="310" r:id="rId2"/>
     <p:sldId id="257" r:id="rId3"/>
     <p:sldId id="258" r:id="rId4"/>
     <p:sldId id="259" r:id="rId5"/>
@@ -66,8 +69,8 @@
     <a:defPPr>
       <a:defRPr lang="en-US"/>
     </a:defPPr>
-    <a:lvl1pPr algn="l" defTabSz="457200" eaLnBrk="1" hangingPunct="1" latinLnBrk="0" marL="0" rtl="0">
-      <a:defRPr kern="1200" sz="1800">
+    <a:lvl1pPr marL="0" algn="l" defTabSz="457200" rtl="0" eaLnBrk="1" latinLnBrk="0" hangingPunct="1">
+      <a:defRPr sz="1800" kern="1200">
         <a:solidFill>
           <a:schemeClr val="tx1"/>
         </a:solidFill>
@@ -76,8 +79,8 @@
         <a:cs typeface="+mn-cs"/>
       </a:defRPr>
     </a:lvl1pPr>
-    <a:lvl2pPr algn="l" defTabSz="457200" eaLnBrk="1" hangingPunct="1" latinLnBrk="0" marL="457200" rtl="0">
-      <a:defRPr kern="1200" sz="1800">
+    <a:lvl2pPr marL="457200" algn="l" defTabSz="457200" rtl="0" eaLnBrk="1" latinLnBrk="0" hangingPunct="1">
+      <a:defRPr sz="1800" kern="1200">
         <a:solidFill>
           <a:schemeClr val="tx1"/>
         </a:solidFill>
@@ -86,8 +89,8 @@
         <a:cs typeface="+mn-cs"/>
       </a:defRPr>
     </a:lvl2pPr>
-    <a:lvl3pPr algn="l" defTabSz="457200" eaLnBrk="1" hangingPunct="1" latinLnBrk="0" marL="914400" rtl="0">
-      <a:defRPr kern="1200" sz="1800">
+    <a:lvl3pPr marL="914400" algn="l" defTabSz="457200" rtl="0" eaLnBrk="1" latinLnBrk="0" hangingPunct="1">
+      <a:defRPr sz="1800" kern="1200">
         <a:solidFill>
           <a:schemeClr val="tx1"/>
         </a:solidFill>
@@ -96,8 +99,8 @@
         <a:cs typeface="+mn-cs"/>
       </a:defRPr>
     </a:lvl3pPr>
-    <a:lvl4pPr algn="l" defTabSz="457200" eaLnBrk="1" hangingPunct="1" latinLnBrk="0" marL="1371600" rtl="0">
-      <a:defRPr kern="1200" sz="1800">
+    <a:lvl4pPr marL="1371600" algn="l" defTabSz="457200" rtl="0" eaLnBrk="1" latinLnBrk="0" hangingPunct="1">
+      <a:defRPr sz="1800" kern="1200">
         <a:solidFill>
           <a:schemeClr val="tx1"/>
         </a:solidFill>
@@ -106,8 +109,8 @@
         <a:cs typeface="+mn-cs"/>
       </a:defRPr>
     </a:lvl4pPr>
-    <a:lvl5pPr algn="l" defTabSz="457200" eaLnBrk="1" hangingPunct="1" latinLnBrk="0" marL="1828800" rtl="0">
-      <a:defRPr kern="1200" sz="1800">
+    <a:lvl5pPr marL="1828800" algn="l" defTabSz="457200" rtl="0" eaLnBrk="1" latinLnBrk="0" hangingPunct="1">
+      <a:defRPr sz="1800" kern="1200">
         <a:solidFill>
           <a:schemeClr val="tx1"/>
         </a:solidFill>
@@ -116,8 +119,8 @@
         <a:cs typeface="+mn-cs"/>
       </a:defRPr>
     </a:lvl5pPr>
-    <a:lvl6pPr algn="l" defTabSz="457200" eaLnBrk="1" hangingPunct="1" latinLnBrk="0" marL="2286000" rtl="0">
-      <a:defRPr kern="1200" sz="1800">
+    <a:lvl6pPr marL="2286000" algn="l" defTabSz="457200" rtl="0" eaLnBrk="1" latinLnBrk="0" hangingPunct="1">
+      <a:defRPr sz="1800" kern="1200">
         <a:solidFill>
           <a:schemeClr val="tx1"/>
         </a:solidFill>
@@ -126,8 +129,8 @@
         <a:cs typeface="+mn-cs"/>
       </a:defRPr>
     </a:lvl6pPr>
-    <a:lvl7pPr algn="l" defTabSz="457200" eaLnBrk="1" hangingPunct="1" latinLnBrk="0" marL="2743200" rtl="0">
-      <a:defRPr kern="1200" sz="1800">
+    <a:lvl7pPr marL="2743200" algn="l" defTabSz="457200" rtl="0" eaLnBrk="1" latinLnBrk="0" hangingPunct="1">
+      <a:defRPr sz="1800" kern="1200">
         <a:solidFill>
           <a:schemeClr val="tx1"/>
         </a:solidFill>
@@ -136,8 +139,8 @@
         <a:cs typeface="+mn-cs"/>
       </a:defRPr>
     </a:lvl7pPr>
-    <a:lvl8pPr algn="l" defTabSz="457200" eaLnBrk="1" hangingPunct="1" latinLnBrk="0" marL="3200400" rtl="0">
-      <a:defRPr kern="1200" sz="1800">
+    <a:lvl8pPr marL="3200400" algn="l" defTabSz="457200" rtl="0" eaLnBrk="1" latinLnBrk="0" hangingPunct="1">
+      <a:defRPr sz="1800" kern="1200">
         <a:solidFill>
           <a:schemeClr val="tx1"/>
         </a:solidFill>
@@ -146,8 +149,8 @@
         <a:cs typeface="+mn-cs"/>
       </a:defRPr>
     </a:lvl8pPr>
-    <a:lvl9pPr algn="l" defTabSz="457200" eaLnBrk="1" hangingPunct="1" latinLnBrk="0" marL="3657600" rtl="0">
-      <a:defRPr kern="1200" sz="1800">
+    <a:lvl9pPr marL="3657600" algn="l" defTabSz="457200" rtl="0" eaLnBrk="1" latinLnBrk="0" hangingPunct="1">
+      <a:defRPr sz="1800" kern="1200">
         <a:solidFill>
           <a:schemeClr val="tx1"/>
         </a:solidFill>
@@ -174,6 +177,477 @@
     </p:ext>
   </p:extLst>
 </p:presentation>
+</file>
+
+<file path=ppt/notesMasters/notesMaster1.xml><?xml version="1.0" encoding="utf-8"?>
+<p:notesMaster xmlns:a="http://schemas.openxmlformats.org/drawingml/2006/main" xmlns:r="http://schemas.openxmlformats.org/officeDocument/2006/relationships" xmlns:p="http://schemas.openxmlformats.org/presentationml/2006/main">
+  <p:cSld>
+    <p:bg>
+      <p:bgRef idx="1001">
+        <a:schemeClr val="bg1"/>
+      </p:bgRef>
+    </p:bg>
+    <p:spTree>
+      <p:nvGrpSpPr>
+        <p:cNvPr id="1" name=""/>
+        <p:cNvGrpSpPr/>
+        <p:nvPr/>
+      </p:nvGrpSpPr>
+      <p:grpSpPr>
+        <a:xfrm>
+          <a:off x="0" y="0"/>
+          <a:ext cx="0" cy="0"/>
+          <a:chOff x="0" y="0"/>
+          <a:chExt cx="0" cy="0"/>
+        </a:xfrm>
+      </p:grpSpPr>
+      <p:sp>
+        <p:nvSpPr>
+          <p:cNvPr id="2" name="Header Placeholder 1"/>
+          <p:cNvSpPr>
+            <a:spLocks noGrp="1"/>
+          </p:cNvSpPr>
+          <p:nvPr>
+            <p:ph type="hdr" sz="quarter"/>
+          </p:nvPr>
+        </p:nvSpPr>
+        <p:spPr>
+          <a:xfrm>
+            <a:off x="0" y="0"/>
+            <a:ext cx="2971800" cy="458788"/>
+          </a:xfrm>
+          <a:prstGeom prst="rect">
+            <a:avLst/>
+          </a:prstGeom>
+        </p:spPr>
+        <p:txBody>
+          <a:bodyPr vert="horz" lIns="91440" tIns="45720" rIns="91440" bIns="45720" rtlCol="0"/>
+          <a:lstStyle>
+            <a:lvl1pPr algn="l">
+              <a:defRPr sz="1200"/>
+            </a:lvl1pPr>
+          </a:lstStyle>
+          <a:p>
+            <a:endParaRPr lang="en-US"/>
+          </a:p>
+        </p:txBody>
+      </p:sp>
+      <p:sp>
+        <p:nvSpPr>
+          <p:cNvPr id="3" name="Date Placeholder 2"/>
+          <p:cNvSpPr>
+            <a:spLocks noGrp="1"/>
+          </p:cNvSpPr>
+          <p:nvPr>
+            <p:ph type="dt" idx="1"/>
+          </p:nvPr>
+        </p:nvSpPr>
+        <p:spPr>
+          <a:xfrm>
+            <a:off x="3884613" y="0"/>
+            <a:ext cx="2971800" cy="458788"/>
+          </a:xfrm>
+          <a:prstGeom prst="rect">
+            <a:avLst/>
+          </a:prstGeom>
+        </p:spPr>
+        <p:txBody>
+          <a:bodyPr vert="horz" lIns="91440" tIns="45720" rIns="91440" bIns="45720" rtlCol="0"/>
+          <a:lstStyle>
+            <a:lvl1pPr algn="r">
+              <a:defRPr sz="1200"/>
+            </a:lvl1pPr>
+          </a:lstStyle>
+          <a:p>
+            <a:fld id="{C2D701EA-F419-FF49-AEA3-50B8FCCC0C86}" type="datetimeFigureOut">
+              <a:rPr lang="en-US" smtClean="0"/>
+              <a:t>4/24/26</a:t>
+            </a:fld>
+            <a:endParaRPr lang="en-US"/>
+          </a:p>
+        </p:txBody>
+      </p:sp>
+      <p:sp>
+        <p:nvSpPr>
+          <p:cNvPr id="4" name="Slide Image Placeholder 3"/>
+          <p:cNvSpPr>
+            <a:spLocks noGrp="1" noRot="1" noChangeAspect="1"/>
+          </p:cNvSpPr>
+          <p:nvPr>
+            <p:ph type="sldImg" idx="2"/>
+          </p:nvPr>
+        </p:nvSpPr>
+        <p:spPr>
+          <a:xfrm>
+            <a:off x="685800" y="1143000"/>
+            <a:ext cx="5486400" cy="3086100"/>
+          </a:xfrm>
+          <a:prstGeom prst="rect">
+            <a:avLst/>
+          </a:prstGeom>
+          <a:noFill/>
+          <a:ln w="12700">
+            <a:solidFill>
+              <a:prstClr val="black"/>
+            </a:solidFill>
+          </a:ln>
+        </p:spPr>
+        <p:txBody>
+          <a:bodyPr vert="horz" lIns="91440" tIns="45720" rIns="91440" bIns="45720" rtlCol="0" anchor="ctr"/>
+          <a:lstStyle/>
+          <a:p>
+            <a:endParaRPr lang="en-US"/>
+          </a:p>
+        </p:txBody>
+      </p:sp>
+      <p:sp>
+        <p:nvSpPr>
+          <p:cNvPr id="5" name="Notes Placeholder 4"/>
+          <p:cNvSpPr>
+            <a:spLocks noGrp="1"/>
+          </p:cNvSpPr>
+          <p:nvPr>
+            <p:ph type="body" sz="quarter" idx="3"/>
+          </p:nvPr>
+        </p:nvSpPr>
+        <p:spPr>
+          <a:xfrm>
+            <a:off x="685800" y="4400550"/>
+            <a:ext cx="5486400" cy="3600450"/>
+          </a:xfrm>
+          <a:prstGeom prst="rect">
+            <a:avLst/>
+          </a:prstGeom>
+        </p:spPr>
+        <p:txBody>
+          <a:bodyPr vert="horz" lIns="91440" tIns="45720" rIns="91440" bIns="45720" rtlCol="0"/>
+          <a:lstStyle/>
+          <a:p>
+            <a:pPr lvl="0"/>
+            <a:r>
+              <a:rPr lang="en-US"/>
+              <a:t>Click to edit Master text styles</a:t>
+            </a:r>
+          </a:p>
+          <a:p>
+            <a:pPr lvl="1"/>
+            <a:r>
+              <a:rPr lang="en-US"/>
+              <a:t>Second level</a:t>
+            </a:r>
+          </a:p>
+          <a:p>
+            <a:pPr lvl="2"/>
+            <a:r>
+              <a:rPr lang="en-US"/>
+              <a:t>Third level</a:t>
+            </a:r>
+          </a:p>
+          <a:p>
+            <a:pPr lvl="3"/>
+            <a:r>
+              <a:rPr lang="en-US"/>
+              <a:t>Fourth level</a:t>
+            </a:r>
+          </a:p>
+          <a:p>
+            <a:pPr lvl="4"/>
+            <a:r>
+              <a:rPr lang="en-US"/>
+              <a:t>Fifth level</a:t>
+            </a:r>
+          </a:p>
+        </p:txBody>
+      </p:sp>
+      <p:sp>
+        <p:nvSpPr>
+          <p:cNvPr id="6" name="Footer Placeholder 5"/>
+          <p:cNvSpPr>
+            <a:spLocks noGrp="1"/>
+          </p:cNvSpPr>
+          <p:nvPr>
+            <p:ph type="ftr" sz="quarter" idx="4"/>
+          </p:nvPr>
+        </p:nvSpPr>
+        <p:spPr>
+          <a:xfrm>
+            <a:off x="0" y="8685213"/>
+            <a:ext cx="2971800" cy="458787"/>
+          </a:xfrm>
+          <a:prstGeom prst="rect">
+            <a:avLst/>
+          </a:prstGeom>
+        </p:spPr>
+        <p:txBody>
+          <a:bodyPr vert="horz" lIns="91440" tIns="45720" rIns="91440" bIns="45720" rtlCol="0" anchor="b"/>
+          <a:lstStyle>
+            <a:lvl1pPr algn="l">
+              <a:defRPr sz="1200"/>
+            </a:lvl1pPr>
+          </a:lstStyle>
+          <a:p>
+            <a:endParaRPr lang="en-US"/>
+          </a:p>
+        </p:txBody>
+      </p:sp>
+      <p:sp>
+        <p:nvSpPr>
+          <p:cNvPr id="7" name="Slide Number Placeholder 6"/>
+          <p:cNvSpPr>
+            <a:spLocks noGrp="1"/>
+          </p:cNvSpPr>
+          <p:nvPr>
+            <p:ph type="sldNum" sz="quarter" idx="5"/>
+          </p:nvPr>
+        </p:nvSpPr>
+        <p:spPr>
+          <a:xfrm>
+            <a:off x="3884613" y="8685213"/>
+            <a:ext cx="2971800" cy="458787"/>
+          </a:xfrm>
+          <a:prstGeom prst="rect">
+            <a:avLst/>
+          </a:prstGeom>
+        </p:spPr>
+        <p:txBody>
+          <a:bodyPr vert="horz" lIns="91440" tIns="45720" rIns="91440" bIns="45720" rtlCol="0" anchor="b"/>
+          <a:lstStyle>
+            <a:lvl1pPr algn="r">
+              <a:defRPr sz="1200"/>
+            </a:lvl1pPr>
+          </a:lstStyle>
+          <a:p>
+            <a:fld id="{CD254A83-B1AB-7245-A7BA-297058111743}" type="slidenum">
+              <a:rPr lang="en-US" smtClean="0"/>
+              <a:t>‹#›</a:t>
+            </a:fld>
+            <a:endParaRPr lang="en-US"/>
+          </a:p>
+        </p:txBody>
+      </p:sp>
+    </p:spTree>
+    <p:extLst>
+      <p:ext uri="{BB962C8B-B14F-4D97-AF65-F5344CB8AC3E}">
+        <p14:creationId xmlns:p14="http://schemas.microsoft.com/office/powerpoint/2010/main" val="541372722"/>
+      </p:ext>
+    </p:extLst>
+  </p:cSld>
+  <p:clrMap bg1="lt1" tx1="dk1" bg2="lt2" tx2="dk2" accent1="accent1" accent2="accent2" accent3="accent3" accent4="accent4" accent5="accent5" accent6="accent6" hlink="hlink" folHlink="folHlink"/>
+  <p:notesStyle>
+    <a:lvl1pPr marL="0" algn="l" defTabSz="914400" rtl="0" eaLnBrk="1" latinLnBrk="0" hangingPunct="1">
+      <a:defRPr sz="1200" kern="1200">
+        <a:solidFill>
+          <a:schemeClr val="tx1"/>
+        </a:solidFill>
+        <a:latin typeface="+mn-lt"/>
+        <a:ea typeface="+mn-ea"/>
+        <a:cs typeface="+mn-cs"/>
+      </a:defRPr>
+    </a:lvl1pPr>
+    <a:lvl2pPr marL="457200" algn="l" defTabSz="914400" rtl="0" eaLnBrk="1" latinLnBrk="0" hangingPunct="1">
+      <a:defRPr sz="1200" kern="1200">
+        <a:solidFill>
+          <a:schemeClr val="tx1"/>
+        </a:solidFill>
+        <a:latin typeface="+mn-lt"/>
+        <a:ea typeface="+mn-ea"/>
+        <a:cs typeface="+mn-cs"/>
+      </a:defRPr>
+    </a:lvl2pPr>
+    <a:lvl3pPr marL="914400" algn="l" defTabSz="914400" rtl="0" eaLnBrk="1" latinLnBrk="0" hangingPunct="1">
+      <a:defRPr sz="1200" kern="1200">
+        <a:solidFill>
+          <a:schemeClr val="tx1"/>
+        </a:solidFill>
+        <a:latin typeface="+mn-lt"/>
+        <a:ea typeface="+mn-ea"/>
+        <a:cs typeface="+mn-cs"/>
+      </a:defRPr>
+    </a:lvl3pPr>
+    <a:lvl4pPr marL="1371600" algn="l" defTabSz="914400" rtl="0" eaLnBrk="1" latinLnBrk="0" hangingPunct="1">
+      <a:defRPr sz="1200" kern="1200">
+        <a:solidFill>
+          <a:schemeClr val="tx1"/>
+        </a:solidFill>
+        <a:latin typeface="+mn-lt"/>
+        <a:ea typeface="+mn-ea"/>
+        <a:cs typeface="+mn-cs"/>
+      </a:defRPr>
+    </a:lvl4pPr>
+    <a:lvl5pPr marL="1828800" algn="l" defTabSz="914400" rtl="0" eaLnBrk="1" latinLnBrk="0" hangingPunct="1">
+      <a:defRPr sz="1200" kern="1200">
+        <a:solidFill>
+          <a:schemeClr val="tx1"/>
+        </a:solidFill>
+        <a:latin typeface="+mn-lt"/>
+        <a:ea typeface="+mn-ea"/>
+        <a:cs typeface="+mn-cs"/>
+      </a:defRPr>
+    </a:lvl5pPr>
+    <a:lvl6pPr marL="2286000" algn="l" defTabSz="914400" rtl="0" eaLnBrk="1" latinLnBrk="0" hangingPunct="1">
+      <a:defRPr sz="1200" kern="1200">
+        <a:solidFill>
+          <a:schemeClr val="tx1"/>
+        </a:solidFill>
+        <a:latin typeface="+mn-lt"/>
+        <a:ea typeface="+mn-ea"/>
+        <a:cs typeface="+mn-cs"/>
+      </a:defRPr>
+    </a:lvl6pPr>
+    <a:lvl7pPr marL="2743200" algn="l" defTabSz="914400" rtl="0" eaLnBrk="1" latinLnBrk="0" hangingPunct="1">
+      <a:defRPr sz="1200" kern="1200">
+        <a:solidFill>
+          <a:schemeClr val="tx1"/>
+        </a:solidFill>
+        <a:latin typeface="+mn-lt"/>
+        <a:ea typeface="+mn-ea"/>
+        <a:cs typeface="+mn-cs"/>
+      </a:defRPr>
+    </a:lvl7pPr>
+    <a:lvl8pPr marL="3200400" algn="l" defTabSz="914400" rtl="0" eaLnBrk="1" latinLnBrk="0" hangingPunct="1">
+      <a:defRPr sz="1200" kern="1200">
+        <a:solidFill>
+          <a:schemeClr val="tx1"/>
+        </a:solidFill>
+        <a:latin typeface="+mn-lt"/>
+        <a:ea typeface="+mn-ea"/>
+        <a:cs typeface="+mn-cs"/>
+      </a:defRPr>
+    </a:lvl8pPr>
+    <a:lvl9pPr marL="3657600" algn="l" defTabSz="914400" rtl="0" eaLnBrk="1" latinLnBrk="0" hangingPunct="1">
+      <a:defRPr sz="1200" kern="1200">
+        <a:solidFill>
+          <a:schemeClr val="tx1"/>
+        </a:solidFill>
+        <a:latin typeface="+mn-lt"/>
+        <a:ea typeface="+mn-ea"/>
+        <a:cs typeface="+mn-cs"/>
+      </a:defRPr>
+    </a:lvl9pPr>
+  </p:notesStyle>
+</p:notesMaster>
+</file>
+
+<file path=ppt/notesSlides/notesSlide1.xml><?xml version="1.0" encoding="utf-8"?>
+<p:notes xmlns:a="http://schemas.openxmlformats.org/drawingml/2006/main" xmlns:r="http://schemas.openxmlformats.org/officeDocument/2006/relationships" xmlns:p="http://schemas.openxmlformats.org/presentationml/2006/main" showMasterSp="0" showMasterPhAnim="0">
+  <p:cSld>
+    <p:spTree>
+      <p:nvGrpSpPr>
+        <p:cNvPr id="1" name="Shape 122"/>
+        <p:cNvGrpSpPr/>
+        <p:nvPr/>
+      </p:nvGrpSpPr>
+      <p:grpSpPr>
+        <a:xfrm>
+          <a:off x="0" y="0"/>
+          <a:ext cx="0" cy="0"/>
+          <a:chOff x="0" y="0"/>
+          <a:chExt cx="0" cy="0"/>
+        </a:xfrm>
+      </p:grpSpPr>
+      <p:sp>
+        <p:nvSpPr>
+          <p:cNvPr id="123" name="Google Shape;123;g389dc543835_0_2:notes"/>
+          <p:cNvSpPr txBox="1">
+            <a:spLocks noGrp="1"/>
+          </p:cNvSpPr>
+          <p:nvPr>
+            <p:ph type="body" idx="1"/>
+          </p:nvPr>
+        </p:nvSpPr>
+        <p:spPr>
+          <a:xfrm>
+            <a:off x="685800" y="4400550"/>
+            <a:ext cx="5486400" cy="3600600"/>
+          </a:xfrm>
+          <a:prstGeom prst="rect">
+            <a:avLst/>
+          </a:prstGeom>
+          <a:noFill/>
+          <a:ln>
+            <a:noFill/>
+          </a:ln>
+        </p:spPr>
+        <p:txBody>
+          <a:bodyPr spcFirstLastPara="1" wrap="square" lIns="91425" tIns="45700" rIns="91425" bIns="45700" anchor="t" anchorCtr="0">
+            <a:noAutofit/>
+          </a:bodyPr>
+          <a:lstStyle/>
+          <a:p>
+            <a:pPr marL="0" lvl="0" indent="0" algn="l" rtl="0">
+              <a:lnSpc>
+                <a:spcPct val="100000"/>
+              </a:lnSpc>
+              <a:spcBef>
+                <a:spcPts val="0"/>
+              </a:spcBef>
+              <a:spcAft>
+                <a:spcPts val="0"/>
+              </a:spcAft>
+              <a:buSzPts val="1400"/>
+              <a:buNone/>
+            </a:pPr>
+            <a:endParaRPr/>
+          </a:p>
+        </p:txBody>
+      </p:sp>
+      <p:sp>
+        <p:nvSpPr>
+          <p:cNvPr id="124" name="Google Shape;124;g389dc543835_0_2:notes"/>
+          <p:cNvSpPr>
+            <a:spLocks noGrp="1" noRot="1" noChangeAspect="1"/>
+          </p:cNvSpPr>
+          <p:nvPr>
+            <p:ph type="sldImg" idx="2"/>
+          </p:nvPr>
+        </p:nvSpPr>
+        <p:spPr>
+          <a:xfrm>
+            <a:off x="685800" y="1143000"/>
+            <a:ext cx="5486400" cy="3086100"/>
+          </a:xfrm>
+          <a:custGeom>
+            <a:avLst/>
+            <a:gdLst/>
+            <a:ahLst/>
+            <a:cxnLst/>
+            <a:rect l="l" t="t" r="r" b="b"/>
+            <a:pathLst>
+              <a:path w="120000" h="120000" extrusionOk="0">
+                <a:moveTo>
+                  <a:pt x="0" y="0"/>
+                </a:moveTo>
+                <a:lnTo>
+                  <a:pt x="120000" y="0"/>
+                </a:lnTo>
+                <a:lnTo>
+                  <a:pt x="120000" y="120000"/>
+                </a:lnTo>
+                <a:lnTo>
+                  <a:pt x="0" y="120000"/>
+                </a:lnTo>
+                <a:close/>
+              </a:path>
+            </a:pathLst>
+          </a:custGeom>
+          <a:noFill/>
+          <a:ln w="12700" cap="flat" cmpd="sng">
+            <a:solidFill>
+              <a:srgbClr val="000000"/>
+            </a:solidFill>
+            <a:prstDash val="solid"/>
+            <a:round/>
+            <a:headEnd type="none" w="sm" len="sm"/>
+            <a:tailEnd type="none" w="sm" len="sm"/>
+          </a:ln>
+        </p:spPr>
+      </p:sp>
+    </p:spTree>
+  </p:cSld>
+  <p:clrMapOvr>
+    <a:masterClrMapping/>
+  </p:clrMapOvr>
+</p:notes>
 </file>
 
 <file path=ppt/slideLayouts/slideLayout1.xml><?xml version="1.0" encoding="utf-8"?>
@@ -355,7 +829,7 @@
           <a:p>
             <a:fld id="{241EB5C9-1307-BA42-ABA2-0BC069CD8E7F}" type="datetimeFigureOut">
               <a:rPr lang="en-US" smtClean="0"/>
-              <a:t>1/2/22</a:t>
+              <a:t>4/24/26</a:t>
             </a:fld>
             <a:endParaRPr lang="en-US"/>
           </a:p>
@@ -523,7 +997,7 @@
           <a:p>
             <a:fld id="{241EB5C9-1307-BA42-ABA2-0BC069CD8E7F}" type="datetimeFigureOut">
               <a:rPr lang="en-US" smtClean="0"/>
-              <a:t>1/2/22</a:t>
+              <a:t>4/24/26</a:t>
             </a:fld>
             <a:endParaRPr lang="en-US"/>
           </a:p>
@@ -701,7 +1175,7 @@
           <a:p>
             <a:fld id="{241EB5C9-1307-BA42-ABA2-0BC069CD8E7F}" type="datetimeFigureOut">
               <a:rPr lang="en-US" smtClean="0"/>
-              <a:t>1/2/22</a:t>
+              <a:t>4/24/26</a:t>
             </a:fld>
             <a:endParaRPr lang="en-US"/>
           </a:p>
@@ -753,6 +1227,486 @@
     <p:extLst>
       <p:ext uri="{BB962C8B-B14F-4D97-AF65-F5344CB8AC3E}">
         <p14:creationId xmlns:p14="http://schemas.microsoft.com/office/powerpoint/2010/main" val="2581529045"/>
+      </p:ext>
+    </p:extLst>
+  </p:cSld>
+  <p:clrMapOvr>
+    <a:masterClrMapping/>
+  </p:clrMapOvr>
+</p:sldLayout>
+</file>
+
+<file path=ppt/slideLayouts/slideLayout12.xml><?xml version="1.0" encoding="utf-8"?>
+<p:sldLayout xmlns:a="http://schemas.openxmlformats.org/drawingml/2006/main" xmlns:r="http://schemas.openxmlformats.org/officeDocument/2006/relationships" xmlns:p="http://schemas.openxmlformats.org/presentationml/2006/main" matchingName="White Title Slide">
+  <p:cSld name="White Title Slide">
+    <p:bg>
+      <p:bgPr>
+        <a:solidFill>
+          <a:schemeClr val="lt1"/>
+        </a:solidFill>
+        <a:effectLst/>
+      </p:bgPr>
+    </p:bg>
+    <p:spTree>
+      <p:nvGrpSpPr>
+        <p:cNvPr id="1" name="Shape 15"/>
+        <p:cNvGrpSpPr/>
+        <p:nvPr/>
+      </p:nvGrpSpPr>
+      <p:grpSpPr>
+        <a:xfrm>
+          <a:off x="0" y="0"/>
+          <a:ext cx="0" cy="0"/>
+          <a:chOff x="0" y="0"/>
+          <a:chExt cx="0" cy="0"/>
+        </a:xfrm>
+      </p:grpSpPr>
+      <p:sp>
+        <p:nvSpPr>
+          <p:cNvPr id="16" name="Google Shape;16;g389dc543835_0_273"/>
+          <p:cNvSpPr/>
+          <p:nvPr/>
+        </p:nvSpPr>
+        <p:spPr>
+          <a:xfrm>
+            <a:off x="0" y="4905056"/>
+            <a:ext cx="339975" cy="238050"/>
+          </a:xfrm>
+          <a:prstGeom prst="rect">
+            <a:avLst/>
+          </a:prstGeom>
+          <a:solidFill>
+            <a:schemeClr val="lt1"/>
+          </a:solidFill>
+          <a:ln>
+            <a:noFill/>
+          </a:ln>
+        </p:spPr>
+        <p:txBody>
+          <a:bodyPr spcFirstLastPara="1" wrap="square" lIns="68569" tIns="34275" rIns="68569" bIns="34275" anchor="ctr" anchorCtr="0">
+            <a:noAutofit/>
+          </a:bodyPr>
+          <a:lstStyle/>
+          <a:p>
+            <a:pPr marL="0" marR="0" lvl="0" indent="0" algn="ctr" rtl="0">
+              <a:lnSpc>
+                <a:spcPct val="100000"/>
+              </a:lnSpc>
+              <a:spcBef>
+                <a:spcPts val="0"/>
+              </a:spcBef>
+              <a:spcAft>
+                <a:spcPts val="0"/>
+              </a:spcAft>
+              <a:buClr>
+                <a:srgbClr val="000000"/>
+              </a:buClr>
+              <a:buSzPts val="1800"/>
+              <a:buFont typeface="Arial"/>
+              <a:buNone/>
+            </a:pPr>
+            <a:endParaRPr sz="1350" b="0" i="0" u="none" strike="noStrike" cap="none">
+              <a:solidFill>
+                <a:schemeClr val="lt1"/>
+              </a:solidFill>
+              <a:latin typeface="Arial"/>
+              <a:ea typeface="Arial"/>
+              <a:cs typeface="Arial"/>
+              <a:sym typeface="Arial"/>
+            </a:endParaRPr>
+          </a:p>
+        </p:txBody>
+      </p:sp>
+      <p:sp>
+        <p:nvSpPr>
+          <p:cNvPr id="17" name="Google Shape;17;g389dc543835_0_273"/>
+          <p:cNvSpPr txBox="1">
+            <a:spLocks noGrp="1"/>
+          </p:cNvSpPr>
+          <p:nvPr>
+            <p:ph type="dt" idx="10"/>
+          </p:nvPr>
+        </p:nvSpPr>
+        <p:spPr>
+          <a:xfrm>
+            <a:off x="2362496" y="4889197"/>
+            <a:ext cx="2057400" cy="276999"/>
+          </a:xfrm>
+          <a:prstGeom prst="rect">
+            <a:avLst/>
+          </a:prstGeom>
+          <a:noFill/>
+          <a:ln>
+            <a:noFill/>
+          </a:ln>
+        </p:spPr>
+        <p:txBody>
+          <a:bodyPr spcFirstLastPara="1" wrap="square" lIns="0" tIns="0" rIns="0" bIns="0" anchor="ctr" anchorCtr="0">
+            <a:spAutoFit/>
+          </a:bodyPr>
+          <a:lstStyle>
+            <a:lvl1pPr lvl="0" algn="l">
+              <a:lnSpc>
+                <a:spcPct val="100000"/>
+              </a:lnSpc>
+              <a:spcBef>
+                <a:spcPts val="0"/>
+              </a:spcBef>
+              <a:spcAft>
+                <a:spcPts val="0"/>
+              </a:spcAft>
+              <a:buSzPts val="1400"/>
+              <a:buNone/>
+              <a:defRPr>
+                <a:solidFill>
+                  <a:schemeClr val="dk2"/>
+                </a:solidFill>
+              </a:defRPr>
+            </a:lvl1pPr>
+            <a:lvl2pPr lvl="1" algn="l">
+              <a:lnSpc>
+                <a:spcPct val="100000"/>
+              </a:lnSpc>
+              <a:spcBef>
+                <a:spcPts val="0"/>
+              </a:spcBef>
+              <a:spcAft>
+                <a:spcPts val="0"/>
+              </a:spcAft>
+              <a:buSzPts val="1400"/>
+              <a:buNone/>
+              <a:defRPr/>
+            </a:lvl2pPr>
+            <a:lvl3pPr lvl="2" algn="l">
+              <a:lnSpc>
+                <a:spcPct val="100000"/>
+              </a:lnSpc>
+              <a:spcBef>
+                <a:spcPts val="0"/>
+              </a:spcBef>
+              <a:spcAft>
+                <a:spcPts val="0"/>
+              </a:spcAft>
+              <a:buSzPts val="1400"/>
+              <a:buNone/>
+              <a:defRPr/>
+            </a:lvl3pPr>
+            <a:lvl4pPr lvl="3" algn="l">
+              <a:lnSpc>
+                <a:spcPct val="100000"/>
+              </a:lnSpc>
+              <a:spcBef>
+                <a:spcPts val="0"/>
+              </a:spcBef>
+              <a:spcAft>
+                <a:spcPts val="0"/>
+              </a:spcAft>
+              <a:buSzPts val="1400"/>
+              <a:buNone/>
+              <a:defRPr/>
+            </a:lvl4pPr>
+            <a:lvl5pPr lvl="4" algn="l">
+              <a:lnSpc>
+                <a:spcPct val="100000"/>
+              </a:lnSpc>
+              <a:spcBef>
+                <a:spcPts val="0"/>
+              </a:spcBef>
+              <a:spcAft>
+                <a:spcPts val="0"/>
+              </a:spcAft>
+              <a:buSzPts val="1400"/>
+              <a:buNone/>
+              <a:defRPr/>
+            </a:lvl5pPr>
+            <a:lvl6pPr lvl="5" algn="l">
+              <a:lnSpc>
+                <a:spcPct val="100000"/>
+              </a:lnSpc>
+              <a:spcBef>
+                <a:spcPts val="0"/>
+              </a:spcBef>
+              <a:spcAft>
+                <a:spcPts val="0"/>
+              </a:spcAft>
+              <a:buSzPts val="1400"/>
+              <a:buNone/>
+              <a:defRPr/>
+            </a:lvl6pPr>
+            <a:lvl7pPr lvl="6" algn="l">
+              <a:lnSpc>
+                <a:spcPct val="100000"/>
+              </a:lnSpc>
+              <a:spcBef>
+                <a:spcPts val="0"/>
+              </a:spcBef>
+              <a:spcAft>
+                <a:spcPts val="0"/>
+              </a:spcAft>
+              <a:buSzPts val="1400"/>
+              <a:buNone/>
+              <a:defRPr/>
+            </a:lvl7pPr>
+            <a:lvl8pPr lvl="7" algn="l">
+              <a:lnSpc>
+                <a:spcPct val="100000"/>
+              </a:lnSpc>
+              <a:spcBef>
+                <a:spcPts val="0"/>
+              </a:spcBef>
+              <a:spcAft>
+                <a:spcPts val="0"/>
+              </a:spcAft>
+              <a:buSzPts val="1400"/>
+              <a:buNone/>
+              <a:defRPr/>
+            </a:lvl8pPr>
+            <a:lvl9pPr lvl="8" algn="l">
+              <a:lnSpc>
+                <a:spcPct val="100000"/>
+              </a:lnSpc>
+              <a:spcBef>
+                <a:spcPts val="0"/>
+              </a:spcBef>
+              <a:spcAft>
+                <a:spcPts val="0"/>
+              </a:spcAft>
+              <a:buSzPts val="1400"/>
+              <a:buNone/>
+              <a:defRPr/>
+            </a:lvl9pPr>
+          </a:lstStyle>
+          <a:p>
+            <a:endParaRPr/>
+          </a:p>
+        </p:txBody>
+      </p:sp>
+      <p:sp>
+        <p:nvSpPr>
+          <p:cNvPr id="18" name="Google Shape;18;g389dc543835_0_273"/>
+          <p:cNvSpPr txBox="1">
+            <a:spLocks noGrp="1"/>
+          </p:cNvSpPr>
+          <p:nvPr>
+            <p:ph type="title"/>
+          </p:nvPr>
+        </p:nvSpPr>
+        <p:spPr>
+          <a:xfrm>
+            <a:off x="663191" y="428729"/>
+            <a:ext cx="7825500" cy="1674450"/>
+          </a:xfrm>
+          <a:prstGeom prst="rect">
+            <a:avLst/>
+          </a:prstGeom>
+          <a:noFill/>
+          <a:ln>
+            <a:noFill/>
+          </a:ln>
+        </p:spPr>
+        <p:txBody>
+          <a:bodyPr spcFirstLastPara="1" wrap="square" lIns="0" tIns="0" rIns="0" bIns="0" anchor="t" anchorCtr="0">
+            <a:noAutofit/>
+          </a:bodyPr>
+          <a:lstStyle>
+            <a:lvl1pPr lvl="0" algn="l">
+              <a:lnSpc>
+                <a:spcPct val="90000"/>
+              </a:lnSpc>
+              <a:spcBef>
+                <a:spcPts val="0"/>
+              </a:spcBef>
+              <a:spcAft>
+                <a:spcPts val="0"/>
+              </a:spcAft>
+              <a:buClr>
+                <a:schemeClr val="dk2"/>
+              </a:buClr>
+              <a:buSzPts val="8000"/>
+              <a:buFont typeface="Geist"/>
+              <a:buNone/>
+              <a:defRPr>
+                <a:solidFill>
+                  <a:schemeClr val="dk2"/>
+                </a:solidFill>
+              </a:defRPr>
+            </a:lvl1pPr>
+            <a:lvl2pPr lvl="1" algn="l">
+              <a:lnSpc>
+                <a:spcPct val="100000"/>
+              </a:lnSpc>
+              <a:spcBef>
+                <a:spcPts val="0"/>
+              </a:spcBef>
+              <a:spcAft>
+                <a:spcPts val="0"/>
+              </a:spcAft>
+              <a:buSzPts val="1400"/>
+              <a:buNone/>
+              <a:defRPr/>
+            </a:lvl2pPr>
+            <a:lvl3pPr lvl="2" algn="l">
+              <a:lnSpc>
+                <a:spcPct val="100000"/>
+              </a:lnSpc>
+              <a:spcBef>
+                <a:spcPts val="0"/>
+              </a:spcBef>
+              <a:spcAft>
+                <a:spcPts val="0"/>
+              </a:spcAft>
+              <a:buSzPts val="1400"/>
+              <a:buNone/>
+              <a:defRPr/>
+            </a:lvl3pPr>
+            <a:lvl4pPr lvl="3" algn="l">
+              <a:lnSpc>
+                <a:spcPct val="100000"/>
+              </a:lnSpc>
+              <a:spcBef>
+                <a:spcPts val="0"/>
+              </a:spcBef>
+              <a:spcAft>
+                <a:spcPts val="0"/>
+              </a:spcAft>
+              <a:buSzPts val="1400"/>
+              <a:buNone/>
+              <a:defRPr/>
+            </a:lvl4pPr>
+            <a:lvl5pPr lvl="4" algn="l">
+              <a:lnSpc>
+                <a:spcPct val="100000"/>
+              </a:lnSpc>
+              <a:spcBef>
+                <a:spcPts val="0"/>
+              </a:spcBef>
+              <a:spcAft>
+                <a:spcPts val="0"/>
+              </a:spcAft>
+              <a:buSzPts val="1400"/>
+              <a:buNone/>
+              <a:defRPr/>
+            </a:lvl5pPr>
+            <a:lvl6pPr lvl="5" algn="l">
+              <a:lnSpc>
+                <a:spcPct val="100000"/>
+              </a:lnSpc>
+              <a:spcBef>
+                <a:spcPts val="0"/>
+              </a:spcBef>
+              <a:spcAft>
+                <a:spcPts val="0"/>
+              </a:spcAft>
+              <a:buSzPts val="1400"/>
+              <a:buNone/>
+              <a:defRPr/>
+            </a:lvl6pPr>
+            <a:lvl7pPr lvl="6" algn="l">
+              <a:lnSpc>
+                <a:spcPct val="100000"/>
+              </a:lnSpc>
+              <a:spcBef>
+                <a:spcPts val="0"/>
+              </a:spcBef>
+              <a:spcAft>
+                <a:spcPts val="0"/>
+              </a:spcAft>
+              <a:buSzPts val="1400"/>
+              <a:buNone/>
+              <a:defRPr/>
+            </a:lvl7pPr>
+            <a:lvl8pPr lvl="7" algn="l">
+              <a:lnSpc>
+                <a:spcPct val="100000"/>
+              </a:lnSpc>
+              <a:spcBef>
+                <a:spcPts val="0"/>
+              </a:spcBef>
+              <a:spcAft>
+                <a:spcPts val="0"/>
+              </a:spcAft>
+              <a:buSzPts val="1400"/>
+              <a:buNone/>
+              <a:defRPr/>
+            </a:lvl8pPr>
+            <a:lvl9pPr lvl="8" algn="l">
+              <a:lnSpc>
+                <a:spcPct val="100000"/>
+              </a:lnSpc>
+              <a:spcBef>
+                <a:spcPts val="0"/>
+              </a:spcBef>
+              <a:spcAft>
+                <a:spcPts val="0"/>
+              </a:spcAft>
+              <a:buSzPts val="1400"/>
+              <a:buNone/>
+              <a:defRPr/>
+            </a:lvl9pPr>
+          </a:lstStyle>
+          <a:p>
+            <a:endParaRPr/>
+          </a:p>
+        </p:txBody>
+      </p:sp>
+      <p:pic>
+        <p:nvPicPr>
+          <p:cNvPr id="19" name="Google Shape;19;g389dc543835_0_273"/>
+          <p:cNvPicPr preferRelativeResize="0"/>
+          <p:nvPr/>
+        </p:nvPicPr>
+        <p:blipFill rotWithShape="1">
+          <a:blip r:embed="rId2">
+            <a:alphaModFix/>
+          </a:blip>
+          <a:srcRect/>
+          <a:stretch/>
+        </p:blipFill>
+        <p:spPr>
+          <a:xfrm>
+            <a:off x="8960644" y="0"/>
+            <a:ext cx="204788" cy="5143500"/>
+          </a:xfrm>
+          <a:prstGeom prst="rect">
+            <a:avLst/>
+          </a:prstGeom>
+          <a:noFill/>
+          <a:ln>
+            <a:noFill/>
+          </a:ln>
+        </p:spPr>
+      </p:pic>
+      <p:pic>
+        <p:nvPicPr>
+          <p:cNvPr id="20" name="Google Shape;20;g389dc543835_0_273"/>
+          <p:cNvPicPr preferRelativeResize="0"/>
+          <p:nvPr/>
+        </p:nvPicPr>
+        <p:blipFill rotWithShape="1">
+          <a:blip r:embed="rId3">
+            <a:alphaModFix/>
+          </a:blip>
+          <a:srcRect/>
+          <a:stretch/>
+        </p:blipFill>
+        <p:spPr>
+          <a:xfrm>
+            <a:off x="87095" y="4931269"/>
+            <a:ext cx="205740" cy="122464"/>
+          </a:xfrm>
+          <a:prstGeom prst="rect">
+            <a:avLst/>
+          </a:prstGeom>
+          <a:noFill/>
+          <a:ln>
+            <a:noFill/>
+          </a:ln>
+        </p:spPr>
+      </p:pic>
+    </p:spTree>
+    <p:extLst>
+      <p:ext uri="{BB962C8B-B14F-4D97-AF65-F5344CB8AC3E}">
+        <p14:creationId xmlns:p14="http://schemas.microsoft.com/office/powerpoint/2010/main" val="1398682882"/>
       </p:ext>
     </p:extLst>
   </p:cSld>
@@ -869,7 +1823,7 @@
           <a:p>
             <a:fld id="{241EB5C9-1307-BA42-ABA2-0BC069CD8E7F}" type="datetimeFigureOut">
               <a:rPr lang="en-US" smtClean="0"/>
-              <a:t>1/2/22</a:t>
+              <a:t>4/24/26</a:t>
             </a:fld>
             <a:endParaRPr lang="en-US"/>
           </a:p>
@@ -1114,7 +2068,7 @@
           <a:p>
             <a:fld id="{241EB5C9-1307-BA42-ABA2-0BC069CD8E7F}" type="datetimeFigureOut">
               <a:rPr lang="en-US" smtClean="0"/>
-              <a:t>1/2/22</a:t>
+              <a:t>4/24/26</a:t>
             </a:fld>
             <a:endParaRPr lang="en-US"/>
           </a:p>
@@ -1399,7 +2353,7 @@
           <a:p>
             <a:fld id="{241EB5C9-1307-BA42-ABA2-0BC069CD8E7F}" type="datetimeFigureOut">
               <a:rPr lang="en-US" smtClean="0"/>
-              <a:t>1/2/22</a:t>
+              <a:t>4/24/26</a:t>
             </a:fld>
             <a:endParaRPr lang="en-US"/>
           </a:p>
@@ -1818,7 +2772,7 @@
           <a:p>
             <a:fld id="{241EB5C9-1307-BA42-ABA2-0BC069CD8E7F}" type="datetimeFigureOut">
               <a:rPr lang="en-US" smtClean="0"/>
-              <a:t>1/2/22</a:t>
+              <a:t>4/24/26</a:t>
             </a:fld>
             <a:endParaRPr lang="en-US"/>
           </a:p>
@@ -1935,7 +2889,7 @@
           <a:p>
             <a:fld id="{241EB5C9-1307-BA42-ABA2-0BC069CD8E7F}" type="datetimeFigureOut">
               <a:rPr lang="en-US" smtClean="0"/>
-              <a:t>1/2/22</a:t>
+              <a:t>4/24/26</a:t>
             </a:fld>
             <a:endParaRPr lang="en-US"/>
           </a:p>
@@ -2030,7 +2984,7 @@
           <a:p>
             <a:fld id="{241EB5C9-1307-BA42-ABA2-0BC069CD8E7F}" type="datetimeFigureOut">
               <a:rPr lang="en-US" smtClean="0"/>
-              <a:t>1/2/22</a:t>
+              <a:t>4/24/26</a:t>
             </a:fld>
             <a:endParaRPr lang="en-US"/>
           </a:p>
@@ -2305,7 +3259,7 @@
           <a:p>
             <a:fld id="{241EB5C9-1307-BA42-ABA2-0BC069CD8E7F}" type="datetimeFigureOut">
               <a:rPr lang="en-US" smtClean="0"/>
-              <a:t>1/2/22</a:t>
+              <a:t>4/24/26</a:t>
             </a:fld>
             <a:endParaRPr lang="en-US"/>
           </a:p>
@@ -2557,7 +3511,7 @@
           <a:p>
             <a:fld id="{241EB5C9-1307-BA42-ABA2-0BC069CD8E7F}" type="datetimeFigureOut">
               <a:rPr lang="en-US" smtClean="0"/>
-              <a:t>1/2/22</a:t>
+              <a:t>4/24/26</a:t>
             </a:fld>
             <a:endParaRPr lang="en-US"/>
           </a:p>
@@ -2619,7 +3573,7 @@
 </file>
 
 <file path=ppt/slideMasters/slideMaster1.xml><?xml version="1.0" encoding="utf-8"?>
-<p:sldMaster xmlns:a="http://schemas.openxmlformats.org/drawingml/2006/main" xmlns:p="http://schemas.openxmlformats.org/presentationml/2006/main" xmlns:r="http://schemas.openxmlformats.org/officeDocument/2006/relationships">
+<p:sldMaster xmlns:a="http://schemas.openxmlformats.org/drawingml/2006/main" xmlns:r="http://schemas.openxmlformats.org/officeDocument/2006/relationships" xmlns:p="http://schemas.openxmlformats.org/presentationml/2006/main">
   <p:cSld>
     <p:bg>
       <p:bgRef idx="1001">
@@ -2660,7 +3614,7 @@
           </a:prstGeom>
         </p:spPr>
         <p:txBody>
-          <a:bodyPr anchor="ctr" bIns="45720" lIns="91440" rIns="91440" rtlCol="0" tIns="45720" vert="horz">
+          <a:bodyPr vert="horz" lIns="91440" tIns="45720" rIns="91440" bIns="45720" rtlCol="0" anchor="ctr">
             <a:normAutofit/>
           </a:bodyPr>
           <a:lstStyle/>
@@ -2679,7 +3633,7 @@
             <a:spLocks noGrp="1"/>
           </p:cNvSpPr>
           <p:nvPr>
-            <p:ph idx="1" type="body"/>
+            <p:ph type="body" idx="1"/>
           </p:nvPr>
         </p:nvSpPr>
         <p:spPr>
@@ -2692,7 +3646,7 @@
           </a:prstGeom>
         </p:spPr>
         <p:txBody>
-          <a:bodyPr bIns="45720" lIns="91440" rIns="91440" rtlCol="0" tIns="45720" vert="horz">
+          <a:bodyPr vert="horz" lIns="91440" tIns="45720" rIns="91440" bIns="45720" rtlCol="0">
             <a:normAutofit/>
           </a:bodyPr>
           <a:lstStyle/>
@@ -2740,7 +3694,7 @@
             <a:spLocks noGrp="1"/>
           </p:cNvSpPr>
           <p:nvPr>
-            <p:ph idx="2" sz="half" type="dt"/>
+            <p:ph type="dt" sz="half" idx="2"/>
           </p:nvPr>
         </p:nvSpPr>
         <p:spPr>
@@ -2753,7 +3707,7 @@
           </a:prstGeom>
         </p:spPr>
         <p:txBody>
-          <a:bodyPr anchor="ctr" bIns="45720" lIns="91440" rIns="91440" rtlCol="0" tIns="45720" vert="horz"/>
+          <a:bodyPr vert="horz" lIns="91440" tIns="45720" rIns="91440" bIns="45720" rtlCol="0" anchor="ctr"/>
           <a:lstStyle>
             <a:lvl1pPr algn="l">
               <a:defRPr sz="900">
@@ -2768,7 +3722,7 @@
           <a:p>
             <a:fld id="{241EB5C9-1307-BA42-ABA2-0BC069CD8E7F}" type="datetimeFigureOut">
               <a:rPr lang="en-US" smtClean="0"/>
-              <a:t>1/2/22</a:t>
+              <a:t>4/24/26</a:t>
             </a:fld>
             <a:endParaRPr lang="en-US"/>
           </a:p>
@@ -2781,7 +3735,7 @@
             <a:spLocks noGrp="1"/>
           </p:cNvSpPr>
           <p:nvPr>
-            <p:ph idx="3" sz="quarter" type="ftr"/>
+            <p:ph type="ftr" sz="quarter" idx="3"/>
           </p:nvPr>
         </p:nvSpPr>
         <p:spPr>
@@ -2794,7 +3748,7 @@
           </a:prstGeom>
         </p:spPr>
         <p:txBody>
-          <a:bodyPr anchor="ctr" bIns="45720" lIns="91440" rIns="91440" rtlCol="0" tIns="45720" vert="horz"/>
+          <a:bodyPr vert="horz" lIns="91440" tIns="45720" rIns="91440" bIns="45720" rtlCol="0" anchor="ctr"/>
           <a:lstStyle>
             <a:lvl1pPr algn="ctr">
               <a:defRPr sz="900">
@@ -2818,7 +3772,7 @@
             <a:spLocks noGrp="1"/>
           </p:cNvSpPr>
           <p:nvPr>
-            <p:ph idx="4" sz="quarter" type="sldNum"/>
+            <p:ph type="sldNum" sz="quarter" idx="4"/>
           </p:nvPr>
         </p:nvSpPr>
         <p:spPr>
@@ -2831,7 +3785,7 @@
           </a:prstGeom>
         </p:spPr>
         <p:txBody>
-          <a:bodyPr anchor="ctr" bIns="45720" lIns="91440" rIns="91440" rtlCol="0" tIns="45720" vert="horz"/>
+          <a:bodyPr vert="horz" lIns="91440" tIns="45720" rIns="91440" bIns="45720" rtlCol="0" anchor="ctr"/>
           <a:lstStyle>
             <a:lvl1pPr algn="r">
               <a:defRPr sz="900">
@@ -2859,7 +3813,7 @@
       </p:ext>
     </p:extLst>
   </p:cSld>
-  <p:clrMap accent1="accent1" accent2="accent2" accent3="accent3" accent4="accent4" accent5="accent5" accent6="accent6" bg1="lt1" bg2="lt2" folHlink="folHlink" hlink="hlink" tx1="dk1" tx2="dk2"/>
+  <p:clrMap bg1="lt1" tx1="dk1" bg2="lt2" tx2="dk2" accent1="accent1" accent2="accent2" accent3="accent3" accent4="accent4" accent5="accent5" accent6="accent6" hlink="hlink" folHlink="folHlink"/>
   <p:sldLayoutIdLst>
     <p:sldLayoutId id="2147483649" r:id="rId1"/>
     <p:sldLayoutId id="2147483650" r:id="rId2"/>
@@ -2872,15 +3826,16 @@
     <p:sldLayoutId id="2147483657" r:id="rId9"/>
     <p:sldLayoutId id="2147483658" r:id="rId10"/>
     <p:sldLayoutId id="2147483659" r:id="rId11"/>
+    <p:sldLayoutId id="2147483660" r:id="rId12"/>
   </p:sldLayoutIdLst>
   <p:txStyles>
     <p:titleStyle>
-      <a:lvl1pPr algn="ctr" defTabSz="342900" eaLnBrk="1" hangingPunct="1" latinLnBrk="0" rtl="0">
+      <a:lvl1pPr algn="ctr" defTabSz="342900" rtl="0" eaLnBrk="1" latinLnBrk="0" hangingPunct="1">
         <a:spcBef>
           <a:spcPct val="0"/>
         </a:spcBef>
         <a:buNone/>
-        <a:defRPr kern="1200" sz="3300">
+        <a:defRPr sz="3300" kern="1200">
           <a:solidFill>
             <a:schemeClr val="tx1"/>
           </a:solidFill>
@@ -2891,13 +3846,13 @@
       </a:lvl1pPr>
     </p:titleStyle>
     <p:bodyStyle>
-      <a:lvl1pPr algn="l" defTabSz="342900" eaLnBrk="1" hangingPunct="1" indent="-342900" latinLnBrk="0" marL="342900" rtl="0">
+      <a:lvl1pPr marL="342900" indent="-342900" algn="l" defTabSz="342900" rtl="0" eaLnBrk="1" latinLnBrk="0" hangingPunct="1">
         <a:spcBef>
           <a:spcPct val="20000"/>
         </a:spcBef>
         <a:buFont typeface="Arial"/>
         <a:buChar char="•"/>
-        <a:defRPr kern="1200" sz="2400">
+        <a:defRPr sz="2400" kern="1200">
           <a:solidFill>
             <a:schemeClr val="tx1"/>
           </a:solidFill>
@@ -2906,13 +3861,13 @@
           <a:cs typeface="+mn-cs"/>
         </a:defRPr>
       </a:lvl1pPr>
-      <a:lvl2pPr algn="l" defTabSz="342900" eaLnBrk="1" hangingPunct="1" indent="-342900" latinLnBrk="0" marL="685800" rtl="0">
+      <a:lvl2pPr marL="685800" indent="-342900" algn="l" defTabSz="342900" rtl="0" eaLnBrk="1" latinLnBrk="0" hangingPunct="1">
         <a:spcBef>
           <a:spcPct val="20000"/>
         </a:spcBef>
         <a:buFont typeface="Arial"/>
         <a:buChar char="–"/>
-        <a:defRPr kern="1200" sz="2100">
+        <a:defRPr sz="2100" kern="1200">
           <a:solidFill>
             <a:schemeClr val="tx1"/>
           </a:solidFill>
@@ -2921,13 +3876,13 @@
           <a:cs typeface="+mn-cs"/>
         </a:defRPr>
       </a:lvl2pPr>
-      <a:lvl3pPr algn="l" defTabSz="342900" eaLnBrk="1" hangingPunct="1" indent="-342900" latinLnBrk="0" marL="1028700" rtl="0">
+      <a:lvl3pPr marL="1028700" indent="-342900" algn="l" defTabSz="342900" rtl="0" eaLnBrk="1" latinLnBrk="0" hangingPunct="1">
         <a:spcBef>
           <a:spcPct val="20000"/>
         </a:spcBef>
         <a:buFont typeface="Arial"/>
         <a:buChar char="•"/>
-        <a:defRPr kern="1200" sz="1800">
+        <a:defRPr sz="1800" kern="1200">
           <a:solidFill>
             <a:schemeClr val="tx1"/>
           </a:solidFill>
@@ -2936,13 +3891,13 @@
           <a:cs typeface="+mn-cs"/>
         </a:defRPr>
       </a:lvl3pPr>
-      <a:lvl4pPr algn="l" defTabSz="342900" eaLnBrk="1" hangingPunct="1" indent="-342900" latinLnBrk="0" marL="1371600" rtl="0">
+      <a:lvl4pPr marL="1371600" indent="-342900" algn="l" defTabSz="342900" rtl="0" eaLnBrk="1" latinLnBrk="0" hangingPunct="1">
         <a:spcBef>
           <a:spcPct val="20000"/>
         </a:spcBef>
         <a:buFont typeface="Arial"/>
         <a:buChar char="–"/>
-        <a:defRPr kern="1200" sz="1500">
+        <a:defRPr sz="1500" kern="1200">
           <a:solidFill>
             <a:schemeClr val="tx1"/>
           </a:solidFill>
@@ -2951,13 +3906,13 @@
           <a:cs typeface="+mn-cs"/>
         </a:defRPr>
       </a:lvl4pPr>
-      <a:lvl5pPr algn="l" defTabSz="342900" eaLnBrk="1" hangingPunct="1" indent="-342900" latinLnBrk="0" marL="1714500" rtl="0">
+      <a:lvl5pPr marL="1714500" indent="-342900" algn="l" defTabSz="342900" rtl="0" eaLnBrk="1" latinLnBrk="0" hangingPunct="1">
         <a:spcBef>
           <a:spcPct val="20000"/>
         </a:spcBef>
         <a:buFont typeface="Arial"/>
         <a:buChar char="»"/>
-        <a:defRPr kern="1200" sz="1500">
+        <a:defRPr sz="1500" kern="1200">
           <a:solidFill>
             <a:schemeClr val="tx1"/>
           </a:solidFill>
@@ -2966,13 +3921,13 @@
           <a:cs typeface="+mn-cs"/>
         </a:defRPr>
       </a:lvl5pPr>
-      <a:lvl6pPr algn="l" defTabSz="342900" eaLnBrk="1" hangingPunct="1" indent="-342900" latinLnBrk="0" marL="2057400" rtl="0">
+      <a:lvl6pPr marL="2057400" indent="-342900" algn="l" defTabSz="342900" rtl="0" eaLnBrk="1" latinLnBrk="0" hangingPunct="1">
         <a:spcBef>
           <a:spcPct val="20000"/>
         </a:spcBef>
         <a:buFont typeface="Arial"/>
         <a:buChar char="•"/>
-        <a:defRPr kern="1200" sz="1500">
+        <a:defRPr sz="1500" kern="1200">
           <a:solidFill>
             <a:schemeClr val="tx1"/>
           </a:solidFill>
@@ -2981,13 +3936,13 @@
           <a:cs typeface="+mn-cs"/>
         </a:defRPr>
       </a:lvl6pPr>
-      <a:lvl7pPr algn="l" defTabSz="342900" eaLnBrk="1" hangingPunct="1" indent="-342900" latinLnBrk="0" marL="2400300" rtl="0">
+      <a:lvl7pPr marL="2400300" indent="-342900" algn="l" defTabSz="342900" rtl="0" eaLnBrk="1" latinLnBrk="0" hangingPunct="1">
         <a:spcBef>
           <a:spcPct val="20000"/>
         </a:spcBef>
         <a:buFont typeface="Arial"/>
         <a:buChar char="•"/>
-        <a:defRPr kern="1200" sz="1500">
+        <a:defRPr sz="1500" kern="1200">
           <a:solidFill>
             <a:schemeClr val="tx1"/>
           </a:solidFill>
@@ -2996,13 +3951,13 @@
           <a:cs typeface="+mn-cs"/>
         </a:defRPr>
       </a:lvl7pPr>
-      <a:lvl8pPr algn="l" defTabSz="342900" eaLnBrk="1" hangingPunct="1" indent="-342900" latinLnBrk="0" marL="2743200" rtl="0">
+      <a:lvl8pPr marL="2743200" indent="-342900" algn="l" defTabSz="342900" rtl="0" eaLnBrk="1" latinLnBrk="0" hangingPunct="1">
         <a:spcBef>
           <a:spcPct val="20000"/>
         </a:spcBef>
         <a:buFont typeface="Arial"/>
         <a:buChar char="•"/>
-        <a:defRPr kern="1200" sz="1500">
+        <a:defRPr sz="1500" kern="1200">
           <a:solidFill>
             <a:schemeClr val="tx1"/>
           </a:solidFill>
@@ -3011,13 +3966,13 @@
           <a:cs typeface="+mn-cs"/>
         </a:defRPr>
       </a:lvl8pPr>
-      <a:lvl9pPr algn="l" defTabSz="342900" eaLnBrk="1" hangingPunct="1" indent="-342900" latinLnBrk="0" marL="3086100" rtl="0">
+      <a:lvl9pPr marL="3086100" indent="-342900" algn="l" defTabSz="342900" rtl="0" eaLnBrk="1" latinLnBrk="0" hangingPunct="1">
         <a:spcBef>
           <a:spcPct val="20000"/>
         </a:spcBef>
         <a:buFont typeface="Arial"/>
         <a:buChar char="•"/>
-        <a:defRPr kern="1200" sz="1500">
+        <a:defRPr sz="1500" kern="1200">
           <a:solidFill>
             <a:schemeClr val="tx1"/>
           </a:solidFill>
@@ -3031,8 +3986,8 @@
       <a:defPPr>
         <a:defRPr lang="en-US"/>
       </a:defPPr>
-      <a:lvl1pPr algn="l" defTabSz="342900" eaLnBrk="1" hangingPunct="1" latinLnBrk="0" marL="0" rtl="0">
-        <a:defRPr kern="1200" sz="1350">
+      <a:lvl1pPr marL="0" algn="l" defTabSz="342900" rtl="0" eaLnBrk="1" latinLnBrk="0" hangingPunct="1">
+        <a:defRPr sz="1350" kern="1200">
           <a:solidFill>
             <a:schemeClr val="tx1"/>
           </a:solidFill>
@@ -3041,8 +3996,8 @@
           <a:cs typeface="+mn-cs"/>
         </a:defRPr>
       </a:lvl1pPr>
-      <a:lvl2pPr algn="l" defTabSz="342900" eaLnBrk="1" hangingPunct="1" latinLnBrk="0" marL="342900" rtl="0">
-        <a:defRPr kern="1200" sz="1350">
+      <a:lvl2pPr marL="342900" algn="l" defTabSz="342900" rtl="0" eaLnBrk="1" latinLnBrk="0" hangingPunct="1">
+        <a:defRPr sz="1350" kern="1200">
           <a:solidFill>
             <a:schemeClr val="tx1"/>
           </a:solidFill>
@@ -3051,8 +4006,8 @@
           <a:cs typeface="+mn-cs"/>
         </a:defRPr>
       </a:lvl2pPr>
-      <a:lvl3pPr algn="l" defTabSz="342900" eaLnBrk="1" hangingPunct="1" latinLnBrk="0" marL="685800" rtl="0">
-        <a:defRPr kern="1200" sz="1350">
+      <a:lvl3pPr marL="685800" algn="l" defTabSz="342900" rtl="0" eaLnBrk="1" latinLnBrk="0" hangingPunct="1">
+        <a:defRPr sz="1350" kern="1200">
           <a:solidFill>
             <a:schemeClr val="tx1"/>
           </a:solidFill>
@@ -3061,8 +4016,8 @@
           <a:cs typeface="+mn-cs"/>
         </a:defRPr>
       </a:lvl3pPr>
-      <a:lvl4pPr algn="l" defTabSz="342900" eaLnBrk="1" hangingPunct="1" latinLnBrk="0" marL="1028700" rtl="0">
-        <a:defRPr kern="1200" sz="1350">
+      <a:lvl4pPr marL="1028700" algn="l" defTabSz="342900" rtl="0" eaLnBrk="1" latinLnBrk="0" hangingPunct="1">
+        <a:defRPr sz="1350" kern="1200">
           <a:solidFill>
             <a:schemeClr val="tx1"/>
           </a:solidFill>
@@ -3071,8 +4026,8 @@
           <a:cs typeface="+mn-cs"/>
         </a:defRPr>
       </a:lvl4pPr>
-      <a:lvl5pPr algn="l" defTabSz="342900" eaLnBrk="1" hangingPunct="1" latinLnBrk="0" marL="1371600" rtl="0">
-        <a:defRPr kern="1200" sz="1350">
+      <a:lvl5pPr marL="1371600" algn="l" defTabSz="342900" rtl="0" eaLnBrk="1" latinLnBrk="0" hangingPunct="1">
+        <a:defRPr sz="1350" kern="1200">
           <a:solidFill>
             <a:schemeClr val="tx1"/>
           </a:solidFill>
@@ -3081,8 +4036,8 @@
           <a:cs typeface="+mn-cs"/>
         </a:defRPr>
       </a:lvl5pPr>
-      <a:lvl6pPr algn="l" defTabSz="342900" eaLnBrk="1" hangingPunct="1" latinLnBrk="0" marL="1714500" rtl="0">
-        <a:defRPr kern="1200" sz="1350">
+      <a:lvl6pPr marL="1714500" algn="l" defTabSz="342900" rtl="0" eaLnBrk="1" latinLnBrk="0" hangingPunct="1">
+        <a:defRPr sz="1350" kern="1200">
           <a:solidFill>
             <a:schemeClr val="tx1"/>
           </a:solidFill>
@@ -3091,8 +4046,8 @@
           <a:cs typeface="+mn-cs"/>
         </a:defRPr>
       </a:lvl6pPr>
-      <a:lvl7pPr algn="l" defTabSz="342900" eaLnBrk="1" hangingPunct="1" latinLnBrk="0" marL="2057400" rtl="0">
-        <a:defRPr kern="1200" sz="1350">
+      <a:lvl7pPr marL="2057400" algn="l" defTabSz="342900" rtl="0" eaLnBrk="1" latinLnBrk="0" hangingPunct="1">
+        <a:defRPr sz="1350" kern="1200">
           <a:solidFill>
             <a:schemeClr val="tx1"/>
           </a:solidFill>
@@ -3101,8 +4056,8 @@
           <a:cs typeface="+mn-cs"/>
         </a:defRPr>
       </a:lvl7pPr>
-      <a:lvl8pPr algn="l" defTabSz="342900" eaLnBrk="1" hangingPunct="1" latinLnBrk="0" marL="2400300" rtl="0">
-        <a:defRPr kern="1200" sz="1350">
+      <a:lvl8pPr marL="2400300" algn="l" defTabSz="342900" rtl="0" eaLnBrk="1" latinLnBrk="0" hangingPunct="1">
+        <a:defRPr sz="1350" kern="1200">
           <a:solidFill>
             <a:schemeClr val="tx1"/>
           </a:solidFill>
@@ -3111,8 +4066,8 @@
           <a:cs typeface="+mn-cs"/>
         </a:defRPr>
       </a:lvl8pPr>
-      <a:lvl9pPr algn="l" defTabSz="342900" eaLnBrk="1" hangingPunct="1" latinLnBrk="0" marL="2743200" rtl="0">
-        <a:defRPr kern="1200" sz="1350">
+      <a:lvl9pPr marL="2743200" algn="l" defTabSz="342900" rtl="0" eaLnBrk="1" latinLnBrk="0" hangingPunct="1">
+        <a:defRPr sz="1350" kern="1200">
           <a:solidFill>
             <a:schemeClr val="tx1"/>
           </a:solidFill>
@@ -3131,7 +4086,7 @@
   <p:cSld>
     <p:spTree>
       <p:nvGrpSpPr>
-        <p:cNvPr id="1" name=""/>
+        <p:cNvPr id="1" name="Shape 125"/>
         <p:cNvGrpSpPr/>
         <p:nvPr/>
       </p:nvGrpSpPr>
@@ -3145,97 +4100,167 @@
       </p:grpSpPr>
       <p:sp>
         <p:nvSpPr>
-          <p:cNvPr id="2" name="Title 1"/>
-          <p:cNvSpPr>
+          <p:cNvPr id="126" name="Google Shape;126;g389dc543835_0_2"/>
+          <p:cNvSpPr txBox="1">
             <a:spLocks noGrp="1"/>
           </p:cNvSpPr>
           <p:nvPr>
-            <p:ph type="ctrTitle"/>
+            <p:ph type="dt" idx="10"/>
           </p:nvPr>
         </p:nvSpPr>
         <p:spPr>
           <a:xfrm>
-            <a:off x="685800" y="1597819"/>
-            <a:ext cx="7772400" cy="1102519"/>
+            <a:off x="2347256" y="4714771"/>
+            <a:ext cx="2057400" cy="276999"/>
           </a:xfrm>
+          <a:prstGeom prst="rect">
+            <a:avLst/>
+          </a:prstGeom>
+          <a:noFill/>
+          <a:ln>
+            <a:noFill/>
+          </a:ln>
         </p:spPr>
         <p:txBody>
-          <a:bodyPr/>
+          <a:bodyPr spcFirstLastPara="1" wrap="square" lIns="0" tIns="0" rIns="0" bIns="0" anchor="ctr" anchorCtr="0">
+            <a:spAutoFit/>
+          </a:bodyPr>
           <a:lstStyle/>
           <a:p>
-            <a:pPr lvl="0" indent="0" marL="0">
-              <a:buNone/>
-            </a:pPr>
-            <a:r>
-              <a:rPr/>
-              <a:t>Hardening Web Applications</a:t>
-            </a:r>
+            <a:r>
+              <a:rPr lang="en-US" dirty="0"/>
+              <a:t>April 14, 2026</a:t>
+            </a:r>
+            <a:endParaRPr dirty="0"/>
           </a:p>
         </p:txBody>
       </p:sp>
       <p:sp>
         <p:nvSpPr>
-          <p:cNvPr id="3" name="Subtitle 2"/>
-          <p:cNvSpPr>
+          <p:cNvPr id="127" name="Google Shape;127;g389dc543835_0_2"/>
+          <p:cNvSpPr txBox="1">
             <a:spLocks noGrp="1"/>
           </p:cNvSpPr>
           <p:nvPr>
-            <p:ph idx="1" type="subTitle"/>
+            <p:ph type="title"/>
           </p:nvPr>
         </p:nvSpPr>
         <p:spPr>
           <a:xfrm>
-            <a:off x="1371600" y="2914650"/>
-            <a:ext cx="6400800" cy="1314450"/>
+            <a:off x="663191" y="428729"/>
+            <a:ext cx="7825500" cy="1674450"/>
           </a:xfrm>
+          <a:prstGeom prst="rect">
+            <a:avLst/>
+          </a:prstGeom>
+          <a:noFill/>
+          <a:ln>
+            <a:noFill/>
+          </a:ln>
         </p:spPr>
         <p:txBody>
-          <a:bodyPr/>
+          <a:bodyPr spcFirstLastPara="1" wrap="square" lIns="0" tIns="0" rIns="0" bIns="0" anchor="t" anchorCtr="0">
+            <a:noAutofit/>
+          </a:bodyPr>
           <a:lstStyle/>
           <a:p>
-            <a:pPr lvl="0" indent="0" marL="0">
-              <a:buNone/>
-            </a:pPr>
-            <a:r>
-              <a:rPr/>
-              <a:t>Security, Performance, and Production Readiness</a:t>
-            </a:r>
-            <a:br/>
-            <a:br/>
-            <a:r>
-              <a:rPr/>
-              <a:t>Jason Kuruzovich</a:t>
-            </a:r>
+            <a:r>
+              <a:rPr lang="en-US" sz="4950" dirty="0">
+                <a:solidFill>
+                  <a:schemeClr val="dk1"/>
+                </a:solidFill>
+              </a:rPr>
+              <a:t>Scaling Web Applications: </a:t>
+            </a:r>
+            <a:r>
+              <a:rPr lang="en-US" sz="5400" b="1" dirty="0">
+                <a:solidFill>
+                  <a:srgbClr val="028090"/>
+                </a:solidFill>
+                <a:latin typeface="Calibri" pitchFamily="34" charset="0"/>
+                <a:ea typeface="Calibri" pitchFamily="34" charset="-122"/>
+                <a:cs typeface="Calibri" pitchFamily="34" charset="-120"/>
+              </a:rPr>
+              <a:t>Architecture Patterns</a:t>
+            </a:r>
+            <a:br>
+              <a:rPr lang="en-US" sz="5400" dirty="0"/>
+            </a:br>
+            <a:endParaRPr sz="4950" dirty="0">
+              <a:solidFill>
+                <a:schemeClr val="dk1"/>
+              </a:solidFill>
+            </a:endParaRPr>
           </a:p>
         </p:txBody>
       </p:sp>
+      <p:pic>
+        <p:nvPicPr>
+          <p:cNvPr id="128" name="Google Shape;128;g389dc543835_0_2"/>
+          <p:cNvPicPr preferRelativeResize="0"/>
+          <p:nvPr/>
+        </p:nvPicPr>
+        <p:blipFill rotWithShape="1">
+          <a:blip r:embed="rId3">
+            <a:alphaModFix/>
+          </a:blip>
+          <a:srcRect/>
+          <a:stretch/>
+        </p:blipFill>
+        <p:spPr>
+          <a:xfrm>
+            <a:off x="820876" y="3562987"/>
+            <a:ext cx="1271906" cy="738526"/>
+          </a:xfrm>
+          <a:prstGeom prst="rect">
+            <a:avLst/>
+          </a:prstGeom>
+          <a:noFill/>
+          <a:ln>
+            <a:noFill/>
+          </a:ln>
+        </p:spPr>
+      </p:pic>
       <p:sp>
         <p:nvSpPr>
-          <p:cNvPr id="4" name="Date Placeholder 3"/>
-          <p:cNvSpPr>
-            <a:spLocks noGrp="1"/>
-          </p:cNvSpPr>
-          <p:nvPr>
-            <p:ph idx="10" sz="half" type="dt"/>
-          </p:nvPr>
+          <p:cNvPr id="2" name="TextBox 1">
+            <a:extLst>
+              <a:ext uri="{FF2B5EF4-FFF2-40B4-BE49-F238E27FC236}">
+                <a16:creationId xmlns:a16="http://schemas.microsoft.com/office/drawing/2014/main" id="{DD8A339F-DD0C-D34F-9D50-768FA1361B40}"/>
+              </a:ext>
+            </a:extLst>
+          </p:cNvPr>
+          <p:cNvSpPr txBox="1"/>
+          <p:nvPr/>
         </p:nvSpPr>
-        <p:spPr/>
+        <p:spPr>
+          <a:xfrm>
+            <a:off x="3673929" y="3040322"/>
+            <a:ext cx="2849336" cy="461665"/>
+          </a:xfrm>
+          <a:prstGeom prst="rect">
+            <a:avLst/>
+          </a:prstGeom>
+          <a:noFill/>
+        </p:spPr>
         <p:txBody>
-          <a:bodyPr/>
+          <a:bodyPr wrap="square" rtlCol="0">
+            <a:spAutoFit/>
+          </a:bodyPr>
           <a:lstStyle/>
           <a:p>
-            <a:pPr lvl="0" indent="0" marL="0">
-              <a:buNone/>
-            </a:pPr>
-            <a:r>
-              <a:rPr/>
-              <a:t>April 24, 2026</a:t>
+            <a:r>
+              <a:rPr lang="en-US" sz="2400" b="1" dirty="0"/>
+              <a:t>Jason Kuruzovich</a:t>
             </a:r>
           </a:p>
         </p:txBody>
       </p:sp>
     </p:spTree>
   </p:cSld>
+  <p:clrMapOvr>
+    <a:masterClrMapping/>
+  </p:clrMapOvr>
 </p:sld>
 </file>
 
@@ -3268,10 +4293,12 @@
         </p:nvSpPr>
         <p:spPr/>
         <p:txBody>
-          <a:bodyPr/>
+          <a:bodyPr>
+            <a:normAutofit fontScale="55000" lnSpcReduction="20000"/>
+          </a:bodyPr>
           <a:lstStyle/>
           <a:p>
-            <a:pPr lvl="0" indent="0" marL="0">
+            <a:pPr marL="0" lvl="0" indent="0">
               <a:spcBef>
                 <a:spcPts val="3000"/>
               </a:spcBef>
@@ -3283,11 +4310,10 @@
             </a:r>
           </a:p>
           <a:p>
-            <a:pPr lvl="0" indent="0" marL="0">
+            <a:pPr marL="0" lvl="0" indent="0">
               <a:buNone/>
             </a:pPr>
             <a:r>
-              <a:rPr/>
               <a:t>The most common vulnerability. You’ve seen this in Lab 6:</a:t>
             </a:r>
           </a:p>
@@ -3910,7 +4936,7 @@
             </a:r>
           </a:p>
           <a:p>
-            <a:pPr lvl="0" indent="0" marL="0">
+            <a:pPr marL="0" lvl="0" indent="0">
               <a:buNone/>
             </a:pPr>
             <a:r>
@@ -3921,7 +4947,6 @@
           <a:p>
             <a:pPr lvl="0"/>
             <a:r>
-              <a:rPr/>
               <a:t>Every query filters by </a:t>
             </a:r>
             <a:r>
@@ -3931,21 +4956,18 @@
               <a:t>userId</a:t>
             </a:r>
             <a:r>
-              <a:rPr/>
               <a:t> or checks ownership</a:t>
             </a:r>
           </a:p>
           <a:p>
             <a:pPr lvl="0"/>
             <a:r>
-              <a:rPr/>
               <a:t>Admin-only routes verify role, not just authentication</a:t>
             </a:r>
           </a:p>
           <a:p>
             <a:pPr lvl="0"/>
             <a:r>
-              <a:rPr/>
               <a:t>Direct object references (e.g., </a:t>
             </a:r>
             <a:r>
@@ -3955,7 +4977,6 @@
               <a:t>/api/projects/123</a:t>
             </a:r>
             <a:r>
-              <a:rPr/>
               <a:t>) check ownership</a:t>
             </a:r>
           </a:p>
@@ -3963,6 +4984,9 @@
       </p:sp>
     </p:spTree>
   </p:cSld>
+  <p:clrMapOvr>
+    <a:masterClrMapping/>
+  </p:clrMapOvr>
 </p:sld>
 </file>
 
@@ -3995,10 +5019,12 @@
         </p:nvSpPr>
         <p:spPr/>
         <p:txBody>
-          <a:bodyPr/>
+          <a:bodyPr>
+            <a:normAutofit fontScale="47500" lnSpcReduction="20000"/>
+          </a:bodyPr>
           <a:lstStyle/>
           <a:p>
-            <a:pPr lvl="0" indent="0" marL="0">
+            <a:pPr marL="0" lvl="0" indent="0">
               <a:spcBef>
                 <a:spcPts val="3000"/>
               </a:spcBef>
@@ -4010,7 +5036,7 @@
             </a:r>
           </a:p>
           <a:p>
-            <a:pPr lvl="0" indent="0" marL="0">
+            <a:pPr marL="0" lvl="0" indent="0">
               <a:spcBef>
                 <a:spcPts val="3000"/>
               </a:spcBef>
@@ -4303,7 +5329,7 @@
             </a:r>
           </a:p>
           <a:p>
-            <a:pPr lvl="0" indent="0" marL="0">
+            <a:pPr marL="0" lvl="0" indent="0">
               <a:spcBef>
                 <a:spcPts val="3000"/>
               </a:spcBef>
@@ -4630,6 +5656,9 @@
       </p:sp>
     </p:spTree>
   </p:cSld>
+  <p:clrMapOvr>
+    <a:masterClrMapping/>
+  </p:clrMapOvr>
 </p:sld>
 </file>
 
@@ -4662,10 +5691,12 @@
         </p:nvSpPr>
         <p:spPr/>
         <p:txBody>
-          <a:bodyPr/>
+          <a:bodyPr>
+            <a:normAutofit fontScale="55000" lnSpcReduction="20000"/>
+          </a:bodyPr>
           <a:lstStyle/>
           <a:p>
-            <a:pPr lvl="0" indent="0" marL="0">
+            <a:pPr marL="0" lvl="0" indent="0">
               <a:spcBef>
                 <a:spcPts val="3000"/>
               </a:spcBef>
@@ -4975,7 +6006,7 @@
             </a:r>
           </a:p>
           <a:p>
-            <a:pPr lvl="0" indent="0" marL="0">
+            <a:pPr marL="0" lvl="0" indent="0">
               <a:buNone/>
             </a:pPr>
             <a:r>
@@ -4986,14 +6017,12 @@
           <a:p>
             <a:pPr lvl="0"/>
             <a:r>
-              <a:rPr/>
               <a:t>Use frameworks that auto-escape (React, Angular, Vue)</a:t>
             </a:r>
           </a:p>
           <a:p>
             <a:pPr lvl="0"/>
             <a:r>
-              <a:rPr/>
               <a:t>Never use </a:t>
             </a:r>
             <a:r>
@@ -5003,21 +6032,18 @@
               <a:t>dangerouslySetInnerHTML</a:t>
             </a:r>
             <a:r>
-              <a:rPr/>
               <a:t> with user data</a:t>
             </a:r>
           </a:p>
           <a:p>
             <a:pPr lvl="0"/>
             <a:r>
-              <a:rPr/>
               <a:t>Use Content Security Policy (CSP) headers</a:t>
             </a:r>
           </a:p>
           <a:p>
             <a:pPr lvl="0"/>
             <a:r>
-              <a:rPr/>
               <a:t>Store JWTs in </a:t>
             </a:r>
             <a:r>
@@ -5027,7 +6053,6 @@
               <a:t>httpOnly</a:t>
             </a:r>
             <a:r>
-              <a:rPr/>
               <a:t> cookies (not </a:t>
             </a:r>
             <a:r>
@@ -5037,7 +6062,6 @@
               <a:t>localStorage</a:t>
             </a:r>
             <a:r>
-              <a:rPr/>
               <a:t>) when possible</a:t>
             </a:r>
           </a:p>
@@ -5045,6 +6069,9 @@
       </p:sp>
     </p:spTree>
   </p:cSld>
+  <p:clrMapOvr>
+    <a:masterClrMapping/>
+  </p:clrMapOvr>
 </p:sld>
 </file>
 
@@ -5080,11 +6107,10 @@
           <a:bodyPr/>
           <a:lstStyle/>
           <a:p>
-            <a:pPr lvl="0" indent="0" marL="0">
+            <a:pPr marL="0" lvl="0" indent="0">
               <a:buNone/>
             </a:pPr>
             <a:r>
-              <a:rPr/>
               <a:t>Part 3: Authentication Hardening</a:t>
             </a:r>
           </a:p>
@@ -5092,6 +6118,9 @@
       </p:sp>
     </p:spTree>
   </p:cSld>
+  <p:clrMapOvr>
+    <a:masterClrMapping/>
+  </p:clrMapOvr>
 </p:sld>
 </file>
 
@@ -5119,7 +6148,7 @@
             <a:spLocks noGrp="1"/>
           </p:cNvSpPr>
           <p:nvPr>
-            <p:ph idx="2" sz="half" type="body"/>
+            <p:ph type="body" sz="half" idx="2"/>
           </p:nvPr>
         </p:nvSpPr>
         <p:spPr/>
@@ -5127,7 +6156,7 @@
           <a:bodyPr/>
           <a:lstStyle/>
           <a:p>
-            <a:pPr lvl="0" indent="0" marL="0">
+            <a:pPr marL="0" lvl="0" indent="0">
               <a:spcBef>
                 <a:spcPts val="3000"/>
               </a:spcBef>
@@ -5139,11 +6168,10 @@
             </a:r>
           </a:p>
           <a:p>
-            <a:pPr lvl="0" indent="0" marL="0">
+            <a:pPr marL="0" lvl="0" indent="0">
               <a:buNone/>
             </a:pPr>
             <a:r>
-              <a:rPr/>
               <a:t>What you learned in Lab 6, reinforced:</a:t>
             </a:r>
           </a:p>
@@ -5161,7 +6189,7 @@
         </p:nvGraphicFramePr>
         <p:xfrm>
           <a:off x="3568700" y="203200"/>
-          <a:ext cx="5105400" cy="4381500"/>
+          <a:ext cx="5105400" cy="2308860"/>
         </p:xfrm>
         <a:graphic>
           <a:graphicData uri="http://schemas.openxmlformats.org/drawingml/2006/table">
@@ -5170,8 +6198,20 @@
                 <a:tableStyleId>{5C22544A-7EE6-4342-B048-85BDC9FD1C3A}</a:tableStyleId>
               </a:tblPr>
               <a:tblGrid>
-                <a:gridCol w="2552700"/>
-                <a:gridCol w="2552700"/>
+                <a:gridCol w="2552700">
+                  <a:extLst>
+                    <a:ext uri="{9D8B030D-6E8A-4147-A177-3AD203B41FA5}">
+                      <a16:colId xmlns:a16="http://schemas.microsoft.com/office/drawing/2014/main" val="20000"/>
+                    </a:ext>
+                  </a:extLst>
+                </a:gridCol>
+                <a:gridCol w="2552700">
+                  <a:extLst>
+                    <a:ext uri="{9D8B030D-6E8A-4147-A177-3AD203B41FA5}">
+                      <a16:colId xmlns:a16="http://schemas.microsoft.com/office/drawing/2014/main" val="20001"/>
+                    </a:ext>
+                  </a:extLst>
+                </a:gridCol>
               </a:tblGrid>
               <a:tr h="0">
                 <a:tc>
@@ -5179,11 +6219,10 @@
                     <a:bodyPr/>
                     <a:lstStyle/>
                     <a:p>
-                      <a:pPr lvl="0" indent="0" marL="0">
+                      <a:pPr marL="0" lvl="0" indent="0">
                         <a:buNone/>
                       </a:pPr>
                       <a:r>
-                        <a:rPr/>
                         <a:t>Approach</a:t>
                       </a:r>
                     </a:p>
@@ -5195,17 +6234,21 @@
                     <a:bodyPr/>
                     <a:lstStyle/>
                     <a:p>
-                      <a:pPr lvl="0" indent="0" marL="0">
+                      <a:pPr marL="0" lvl="0" indent="0">
                         <a:buNone/>
                       </a:pPr>
                       <a:r>
-                        <a:rPr/>
                         <a:t>Security</a:t>
                       </a:r>
                     </a:p>
                   </a:txBody>
                   <a:tcPr/>
                 </a:tc>
+                <a:extLst>
+                  <a:ext uri="{0D108BD9-81ED-4DB2-BD59-A6C34878D82A}">
+                    <a16:rowId xmlns:a16="http://schemas.microsoft.com/office/drawing/2014/main" val="10000"/>
+                  </a:ext>
+                </a:extLst>
               </a:tr>
               <a:tr h="0">
                 <a:tc>
@@ -5213,31 +6256,36 @@
                     <a:bodyPr/>
                     <a:lstStyle/>
                     <a:p>
-                      <a:pPr lvl="0" indent="0" marL="0">
+                      <a:pPr marL="0" lvl="0" indent="0">
                         <a:buNone/>
                       </a:pPr>
                       <a:r>
-                        <a:rPr/>
                         <a:t>Plaintext</a:t>
                       </a:r>
                     </a:p>
                   </a:txBody>
+                  <a:tcPr/>
                 </a:tc>
                 <a:tc>
                   <a:txBody>
                     <a:bodyPr/>
                     <a:lstStyle/>
                     <a:p>
-                      <a:pPr lvl="0" indent="0" marL="0">
+                      <a:pPr marL="0" lvl="0" indent="0">
                         <a:buNone/>
                       </a:pPr>
                       <a:r>
-                        <a:rPr/>
                         <a:t>Catastrophic – one breach exposes all passwords</a:t>
                       </a:r>
                     </a:p>
                   </a:txBody>
+                  <a:tcPr/>
                 </a:tc>
+                <a:extLst>
+                  <a:ext uri="{0D108BD9-81ED-4DB2-BD59-A6C34878D82A}">
+                    <a16:rowId xmlns:a16="http://schemas.microsoft.com/office/drawing/2014/main" val="10001"/>
+                  </a:ext>
+                </a:extLst>
               </a:tr>
               <a:tr h="0">
                 <a:tc>
@@ -5245,31 +6293,36 @@
                     <a:bodyPr/>
                     <a:lstStyle/>
                     <a:p>
-                      <a:pPr lvl="0" indent="0" marL="0">
+                      <a:pPr marL="0" lvl="0" indent="0">
                         <a:buNone/>
                       </a:pPr>
                       <a:r>
-                        <a:rPr/>
                         <a:t>MD5 / SHA-256</a:t>
                       </a:r>
                     </a:p>
                   </a:txBody>
+                  <a:tcPr/>
                 </a:tc>
                 <a:tc>
                   <a:txBody>
                     <a:bodyPr/>
                     <a:lstStyle/>
                     <a:p>
-                      <a:pPr lvl="0" indent="0" marL="0">
+                      <a:pPr marL="0" lvl="0" indent="0">
                         <a:buNone/>
                       </a:pPr>
                       <a:r>
-                        <a:rPr/>
                         <a:t>Bad – fast hashes are brute-forceable (billions/sec on GPU)</a:t>
                       </a:r>
                     </a:p>
                   </a:txBody>
+                  <a:tcPr/>
                 </a:tc>
+                <a:extLst>
+                  <a:ext uri="{0D108BD9-81ED-4DB2-BD59-A6C34878D82A}">
+                    <a16:rowId xmlns:a16="http://schemas.microsoft.com/office/drawing/2014/main" val="10002"/>
+                  </a:ext>
+                </a:extLst>
               </a:tr>
               <a:tr h="0">
                 <a:tc>
@@ -5277,31 +6330,36 @@
                     <a:bodyPr/>
                     <a:lstStyle/>
                     <a:p>
-                      <a:pPr lvl="0" indent="0" marL="0">
+                      <a:pPr marL="0" lvl="0" indent="0">
                         <a:buNone/>
                       </a:pPr>
                       <a:r>
-                        <a:rPr/>
                         <a:t>bcrypt (cost 10)</a:t>
                       </a:r>
                     </a:p>
                   </a:txBody>
+                  <a:tcPr/>
                 </a:tc>
                 <a:tc>
                   <a:txBody>
                     <a:bodyPr/>
                     <a:lstStyle/>
                     <a:p>
-                      <a:pPr lvl="0" indent="0" marL="0">
+                      <a:pPr marL="0" lvl="0" indent="0">
                         <a:buNone/>
                       </a:pPr>
                       <a:r>
-                        <a:rPr/>
                         <a:t>Good – intentionally slow (~100ms per hash)</a:t>
                       </a:r>
                     </a:p>
                   </a:txBody>
+                  <a:tcPr/>
                 </a:tc>
+                <a:extLst>
+                  <a:ext uri="{0D108BD9-81ED-4DB2-BD59-A6C34878D82A}">
+                    <a16:rowId xmlns:a16="http://schemas.microsoft.com/office/drawing/2014/main" val="10003"/>
+                  </a:ext>
+                </a:extLst>
               </a:tr>
               <a:tr h="0">
                 <a:tc>
@@ -5309,31 +6367,36 @@
                     <a:bodyPr/>
                     <a:lstStyle/>
                     <a:p>
-                      <a:pPr lvl="0" indent="0" marL="0">
+                      <a:pPr marL="0" lvl="0" indent="0">
                         <a:buNone/>
                       </a:pPr>
                       <a:r>
-                        <a:rPr/>
                         <a:t>Argon2id</a:t>
                       </a:r>
                     </a:p>
                   </a:txBody>
+                  <a:tcPr/>
                 </a:tc>
                 <a:tc>
                   <a:txBody>
                     <a:bodyPr/>
                     <a:lstStyle/>
                     <a:p>
-                      <a:pPr lvl="0" indent="0" marL="0">
+                      <a:pPr marL="0" lvl="0" indent="0">
                         <a:buNone/>
                       </a:pPr>
                       <a:r>
-                        <a:rPr/>
                         <a:t>Best – memory-hard, resists GPU/ASIC attacks</a:t>
                       </a:r>
                     </a:p>
                   </a:txBody>
+                  <a:tcPr/>
                 </a:tc>
+                <a:extLst>
+                  <a:ext uri="{0D108BD9-81ED-4DB2-BD59-A6C34878D82A}">
+                    <a16:rowId xmlns:a16="http://schemas.microsoft.com/office/drawing/2014/main" val="10004"/>
+                  </a:ext>
+                </a:extLst>
               </a:tr>
             </a:tbl>
           </a:graphicData>
@@ -5341,6 +6404,9 @@
       </p:graphicFrame>
     </p:spTree>
   </p:cSld>
+  <p:clrMapOvr>
+    <a:masterClrMapping/>
+  </p:clrMapOvr>
 </p:sld>
 </file>
 
@@ -5373,7 +6439,9 @@
         </p:nvSpPr>
         <p:spPr/>
         <p:txBody>
-          <a:bodyPr/>
+          <a:bodyPr>
+            <a:normAutofit fontScale="92500" lnSpcReduction="20000"/>
+          </a:bodyPr>
           <a:lstStyle/>
           <a:p>
             <a:pPr lvl="0" indent="0">
@@ -5840,6 +6908,9 @@
       </p:sp>
     </p:spTree>
   </p:cSld>
+  <p:clrMapOvr>
+    <a:masterClrMapping/>
+  </p:clrMapOvr>
 </p:sld>
 </file>
 
@@ -5867,7 +6938,7 @@
             <a:spLocks noGrp="1"/>
           </p:cNvSpPr>
           <p:nvPr>
-            <p:ph idx="2" sz="half" type="body"/>
+            <p:ph type="body" sz="half" idx="2"/>
           </p:nvPr>
         </p:nvSpPr>
         <p:spPr/>
@@ -5875,7 +6946,7 @@
           <a:bodyPr/>
           <a:lstStyle/>
           <a:p>
-            <a:pPr lvl="0" indent="0" marL="0">
+            <a:pPr marL="0" lvl="0" indent="0">
               <a:spcBef>
                 <a:spcPts val="3000"/>
               </a:spcBef>
@@ -5887,11 +6958,10 @@
             </a:r>
           </a:p>
           <a:p>
-            <a:pPr lvl="0" indent="0" marL="0">
+            <a:pPr marL="0" lvl="0" indent="0">
               <a:buNone/>
             </a:pPr>
             <a:r>
-              <a:rPr/>
               <a:t>Beyond what Lab 6 covered:</a:t>
             </a:r>
           </a:p>
@@ -5909,7 +6979,7 @@
         </p:nvGraphicFramePr>
         <p:xfrm>
           <a:off x="3568700" y="203200"/>
-          <a:ext cx="5105400" cy="4381500"/>
+          <a:ext cx="5105400" cy="3520440"/>
         </p:xfrm>
         <a:graphic>
           <a:graphicData uri="http://schemas.openxmlformats.org/drawingml/2006/table">
@@ -5918,8 +6988,20 @@
                 <a:tableStyleId>{5C22544A-7EE6-4342-B048-85BDC9FD1C3A}</a:tableStyleId>
               </a:tblPr>
               <a:tblGrid>
-                <a:gridCol w="3403600"/>
-                <a:gridCol w="1701800"/>
+                <a:gridCol w="3403600">
+                  <a:extLst>
+                    <a:ext uri="{9D8B030D-6E8A-4147-A177-3AD203B41FA5}">
+                      <a16:colId xmlns:a16="http://schemas.microsoft.com/office/drawing/2014/main" val="20000"/>
+                    </a:ext>
+                  </a:extLst>
+                </a:gridCol>
+                <a:gridCol w="1701800">
+                  <a:extLst>
+                    <a:ext uri="{9D8B030D-6E8A-4147-A177-3AD203B41FA5}">
+                      <a16:colId xmlns:a16="http://schemas.microsoft.com/office/drawing/2014/main" val="20001"/>
+                    </a:ext>
+                  </a:extLst>
+                </a:gridCol>
               </a:tblGrid>
               <a:tr h="0">
                 <a:tc>
@@ -5927,11 +7009,10 @@
                     <a:bodyPr/>
                     <a:lstStyle/>
                     <a:p>
-                      <a:pPr lvl="0" indent="0" marL="0">
+                      <a:pPr marL="0" lvl="0" indent="0">
                         <a:buNone/>
                       </a:pPr>
                       <a:r>
-                        <a:rPr/>
                         <a:t>Practice</a:t>
                       </a:r>
                     </a:p>
@@ -5943,17 +7024,21 @@
                     <a:bodyPr/>
                     <a:lstStyle/>
                     <a:p>
-                      <a:pPr lvl="0" indent="0" marL="0">
+                      <a:pPr marL="0" lvl="0" indent="0">
                         <a:buNone/>
                       </a:pPr>
                       <a:r>
-                        <a:rPr/>
                         <a:t>Why</a:t>
                       </a:r>
                     </a:p>
                   </a:txBody>
                   <a:tcPr/>
                 </a:tc>
+                <a:extLst>
+                  <a:ext uri="{0D108BD9-81ED-4DB2-BD59-A6C34878D82A}">
+                    <a16:rowId xmlns:a16="http://schemas.microsoft.com/office/drawing/2014/main" val="10000"/>
+                  </a:ext>
+                </a:extLst>
               </a:tr>
               <a:tr h="0">
                 <a:tc>
@@ -5961,31 +7046,36 @@
                     <a:bodyPr/>
                     <a:lstStyle/>
                     <a:p>
-                      <a:pPr lvl="0" indent="0" marL="0">
+                      <a:pPr marL="0" lvl="0" indent="0">
                         <a:buNone/>
                       </a:pPr>
                       <a:r>
-                        <a:rPr/>
                         <a:t>Short access token TTL (15 min)</a:t>
                       </a:r>
                     </a:p>
                   </a:txBody>
+                  <a:tcPr/>
                 </a:tc>
                 <a:tc>
                   <a:txBody>
                     <a:bodyPr/>
                     <a:lstStyle/>
                     <a:p>
-                      <a:pPr lvl="0" indent="0" marL="0">
+                      <a:pPr marL="0" lvl="0" indent="0">
                         <a:buNone/>
                       </a:pPr>
                       <a:r>
-                        <a:rPr/>
                         <a:t>Limits damage window if stolen</a:t>
                       </a:r>
                     </a:p>
                   </a:txBody>
+                  <a:tcPr/>
                 </a:tc>
+                <a:extLst>
+                  <a:ext uri="{0D108BD9-81ED-4DB2-BD59-A6C34878D82A}">
+                    <a16:rowId xmlns:a16="http://schemas.microsoft.com/office/drawing/2014/main" val="10001"/>
+                  </a:ext>
+                </a:extLst>
               </a:tr>
               <a:tr h="0">
                 <a:tc>
@@ -5993,31 +7083,36 @@
                     <a:bodyPr/>
                     <a:lstStyle/>
                     <a:p>
-                      <a:pPr lvl="0" indent="0" marL="0">
+                      <a:pPr marL="0" lvl="0" indent="0">
                         <a:buNone/>
                       </a:pPr>
                       <a:r>
-                        <a:rPr/>
                         <a:t>Rotate refresh tokens on use</a:t>
                       </a:r>
                     </a:p>
                   </a:txBody>
+                  <a:tcPr/>
                 </a:tc>
                 <a:tc>
                   <a:txBody>
                     <a:bodyPr/>
                     <a:lstStyle/>
                     <a:p>
-                      <a:pPr lvl="0" indent="0" marL="0">
+                      <a:pPr marL="0" lvl="0" indent="0">
                         <a:buNone/>
                       </a:pPr>
                       <a:r>
-                        <a:rPr/>
                         <a:t>Detect token reuse (theft indicator)</a:t>
                       </a:r>
                     </a:p>
                   </a:txBody>
+                  <a:tcPr/>
                 </a:tc>
+                <a:extLst>
+                  <a:ext uri="{0D108BD9-81ED-4DB2-BD59-A6C34878D82A}">
+                    <a16:rowId xmlns:a16="http://schemas.microsoft.com/office/drawing/2014/main" val="10002"/>
+                  </a:ext>
+                </a:extLst>
               </a:tr>
               <a:tr h="0">
                 <a:tc>
@@ -6025,11 +7120,10 @@
                     <a:bodyPr/>
                     <a:lstStyle/>
                     <a:p>
-                      <a:pPr lvl="0" indent="0" marL="0">
+                      <a:pPr marL="0" lvl="0" indent="0">
                         <a:buNone/>
                       </a:pPr>
                       <a:r>
-                        <a:rPr/>
                         <a:t>Store </a:t>
                       </a:r>
                       <a:r>
@@ -6039,27 +7133,32 @@
                         <a:t>JWT_SECRET</a:t>
                       </a:r>
                       <a:r>
-                        <a:rPr/>
                         <a:t> in env vars</a:t>
                       </a:r>
                     </a:p>
                   </a:txBody>
+                  <a:tcPr/>
                 </a:tc>
                 <a:tc>
                   <a:txBody>
                     <a:bodyPr/>
                     <a:lstStyle/>
                     <a:p>
-                      <a:pPr lvl="0" indent="0" marL="0">
+                      <a:pPr marL="0" lvl="0" indent="0">
                         <a:buNone/>
                       </a:pPr>
                       <a:r>
-                        <a:rPr/>
                         <a:t>Never hardcode secrets in source</a:t>
                       </a:r>
                     </a:p>
                   </a:txBody>
+                  <a:tcPr/>
                 </a:tc>
+                <a:extLst>
+                  <a:ext uri="{0D108BD9-81ED-4DB2-BD59-A6C34878D82A}">
+                    <a16:rowId xmlns:a16="http://schemas.microsoft.com/office/drawing/2014/main" val="10003"/>
+                  </a:ext>
+                </a:extLst>
               </a:tr>
               <a:tr h="0">
                 <a:tc>
@@ -6067,31 +7166,36 @@
                     <a:bodyPr/>
                     <a:lstStyle/>
                     <a:p>
-                      <a:pPr lvl="0" indent="0" marL="0">
+                      <a:pPr marL="0" lvl="0" indent="0">
                         <a:buNone/>
                       </a:pPr>
                       <a:r>
-                        <a:rPr/>
                         <a:t>Use RS256 (asymmetric) in production</a:t>
                       </a:r>
                     </a:p>
                   </a:txBody>
+                  <a:tcPr/>
                 </a:tc>
                 <a:tc>
                   <a:txBody>
                     <a:bodyPr/>
                     <a:lstStyle/>
                     <a:p>
-                      <a:pPr lvl="0" indent="0" marL="0">
+                      <a:pPr marL="0" lvl="0" indent="0">
                         <a:buNone/>
                       </a:pPr>
                       <a:r>
-                        <a:rPr/>
                         <a:t>Public key can verify without exposing signing key</a:t>
                       </a:r>
                     </a:p>
                   </a:txBody>
+                  <a:tcPr/>
                 </a:tc>
+                <a:extLst>
+                  <a:ext uri="{0D108BD9-81ED-4DB2-BD59-A6C34878D82A}">
+                    <a16:rowId xmlns:a16="http://schemas.microsoft.com/office/drawing/2014/main" val="10004"/>
+                  </a:ext>
+                </a:extLst>
               </a:tr>
               <a:tr h="0">
                 <a:tc>
@@ -6099,11 +7203,10 @@
                     <a:bodyPr/>
                     <a:lstStyle/>
                     <a:p>
-                      <a:pPr lvl="0" indent="0" marL="0">
+                      <a:pPr marL="0" lvl="0" indent="0">
                         <a:buNone/>
                       </a:pPr>
                       <a:r>
-                        <a:rPr/>
                         <a:t>Validate </a:t>
                       </a:r>
                       <a:r>
@@ -6113,7 +7216,6 @@
                         <a:t>iss</a:t>
                       </a:r>
                       <a:r>
-                        <a:rPr/>
                         <a:t>, </a:t>
                       </a:r>
                       <a:r>
@@ -6123,7 +7225,6 @@
                         <a:t>aud</a:t>
                       </a:r>
                       <a:r>
-                        <a:rPr/>
                         <a:t>, </a:t>
                       </a:r>
                       <a:r>
@@ -6133,27 +7234,32 @@
                         <a:t>exp</a:t>
                       </a:r>
                       <a:r>
-                        <a:rPr/>
                         <a:t> claims</a:t>
                       </a:r>
                     </a:p>
                   </a:txBody>
+                  <a:tcPr/>
                 </a:tc>
                 <a:tc>
                   <a:txBody>
                     <a:bodyPr/>
                     <a:lstStyle/>
                     <a:p>
-                      <a:pPr lvl="0" indent="0" marL="0">
+                      <a:pPr marL="0" lvl="0" indent="0">
                         <a:buNone/>
                       </a:pPr>
                       <a:r>
-                        <a:rPr/>
                         <a:t>Prevent token from other apps being accepted</a:t>
                       </a:r>
                     </a:p>
                   </a:txBody>
+                  <a:tcPr/>
                 </a:tc>
+                <a:extLst>
+                  <a:ext uri="{0D108BD9-81ED-4DB2-BD59-A6C34878D82A}">
+                    <a16:rowId xmlns:a16="http://schemas.microsoft.com/office/drawing/2014/main" val="10005"/>
+                  </a:ext>
+                </a:extLst>
               </a:tr>
               <a:tr h="0">
                 <a:tc>
@@ -6161,31 +7267,36 @@
                     <a:bodyPr/>
                     <a:lstStyle/>
                     <a:p>
-                      <a:pPr lvl="0" indent="0" marL="0">
+                      <a:pPr marL="0" lvl="0" indent="0">
                         <a:buNone/>
                       </a:pPr>
                       <a:r>
-                        <a:rPr/>
                         <a:t>Revocation list for refresh tokens</a:t>
                       </a:r>
                     </a:p>
                   </a:txBody>
+                  <a:tcPr/>
                 </a:tc>
                 <a:tc>
                   <a:txBody>
                     <a:bodyPr/>
                     <a:lstStyle/>
                     <a:p>
-                      <a:pPr lvl="0" indent="0" marL="0">
+                      <a:pPr marL="0" lvl="0" indent="0">
                         <a:buNone/>
                       </a:pPr>
                       <a:r>
-                        <a:rPr/>
                         <a:t>Enable true logout</a:t>
                       </a:r>
                     </a:p>
                   </a:txBody>
+                  <a:tcPr/>
                 </a:tc>
+                <a:extLst>
+                  <a:ext uri="{0D108BD9-81ED-4DB2-BD59-A6C34878D82A}">
+                    <a16:rowId xmlns:a16="http://schemas.microsoft.com/office/drawing/2014/main" val="10006"/>
+                  </a:ext>
+                </a:extLst>
               </a:tr>
             </a:tbl>
           </a:graphicData>
@@ -6193,6 +7304,9 @@
       </p:graphicFrame>
     </p:spTree>
   </p:cSld>
+  <p:clrMapOvr>
+    <a:masterClrMapping/>
+  </p:clrMapOvr>
 </p:sld>
 </file>
 
@@ -6228,7 +7342,7 @@
           <a:bodyPr/>
           <a:lstStyle/>
           <a:p>
-            <a:pPr lvl="0" indent="0" marL="0">
+            <a:pPr marL="0" lvl="0" indent="0">
               <a:buNone/>
             </a:pPr>
             <a:r>
@@ -6236,7 +7350,6 @@
               <a:t>Never</a:t>
             </a:r>
             <a:r>
-              <a:rPr/>
               <a:t> put sensitive data (passwords, SSNs) in JWT payloads. They are signed, not encrypted — anyone can decode them at </a:t>
             </a:r>
             <a:r>
@@ -6246,7 +7359,6 @@
               <a:t>jwt.io</a:t>
             </a:r>
             <a:r>
-              <a:rPr/>
               <a:t>.</a:t>
             </a:r>
           </a:p>
@@ -6254,6 +7366,9 @@
       </p:sp>
     </p:spTree>
   </p:cSld>
+  <p:clrMapOvr>
+    <a:masterClrMapping/>
+  </p:clrMapOvr>
 </p:sld>
 </file>
 
@@ -6286,17 +7401,19 @@
         </p:nvSpPr>
         <p:spPr/>
         <p:txBody>
-          <a:bodyPr/>
+          <a:bodyPr>
+            <a:normAutofit fontScale="55000" lnSpcReduction="20000"/>
+          </a:bodyPr>
           <a:lstStyle/>
           <a:p>
-            <a:pPr lvl="0" indent="0" marL="0">
+            <a:pPr marL="0" lvl="0" indent="0">
               <a:spcBef>
                 <a:spcPts val="3000"/>
               </a:spcBef>
               <a:buNone/>
             </a:pPr>
             <a:r>
-              <a:rPr b="1"/>
+              <a:rPr b="1" dirty="0"/>
               <a:t>Rate Limiting &amp; Brute Force Protection</a:t>
             </a:r>
           </a:p>
@@ -6305,7 +7422,7 @@
               <a:buNone/>
             </a:pPr>
             <a:r>
-              <a:rPr b="1">
+              <a:rPr b="1" dirty="0">
                 <a:solidFill>
                   <a:srgbClr val="007020"/>
                 </a:solidFill>
@@ -6314,13 +7431,25 @@
               <a:t>const</a:t>
             </a:r>
             <a:r>
-              <a:rPr>
-                <a:latin typeface="Courier"/>
-              </a:rPr>
-              <a:t> rateLimit </a:t>
-            </a:r>
-            <a:r>
-              <a:rPr>
+              <a:rPr dirty="0">
+                <a:latin typeface="Courier"/>
+              </a:rPr>
+              <a:t> </a:t>
+            </a:r>
+            <a:r>
+              <a:rPr dirty="0" err="1">
+                <a:latin typeface="Courier"/>
+              </a:rPr>
+              <a:t>rateLimit</a:t>
+            </a:r>
+            <a:r>
+              <a:rPr dirty="0">
+                <a:latin typeface="Courier"/>
+              </a:rPr>
+              <a:t> </a:t>
+            </a:r>
+            <a:r>
+              <a:rPr dirty="0">
                 <a:solidFill>
                   <a:srgbClr val="666666"/>
                 </a:solidFill>
@@ -6329,13 +7458,13 @@
               <a:t>=</a:t>
             </a:r>
             <a:r>
-              <a:rPr>
+              <a:rPr dirty="0">
                 <a:latin typeface="Courier"/>
               </a:rPr>
               <a:t> </a:t>
             </a:r>
             <a:r>
-              <a:rPr>
+              <a:rPr dirty="0">
                 <a:solidFill>
                   <a:srgbClr val="BC7A00"/>
                 </a:solidFill>
@@ -6344,13 +7473,13 @@
               <a:t>require</a:t>
             </a:r>
             <a:r>
-              <a:rPr>
+              <a:rPr dirty="0">
                 <a:latin typeface="Courier"/>
               </a:rPr>
               <a:t>(</a:t>
             </a:r>
             <a:r>
-              <a:rPr>
+              <a:rPr dirty="0">
                 <a:solidFill>
                   <a:srgbClr val="4070A0"/>
                 </a:solidFill>
@@ -6359,13 +7488,13 @@
               <a:t>'express-rate-limit'</a:t>
             </a:r>
             <a:r>
-              <a:rPr>
+              <a:rPr dirty="0">
                 <a:latin typeface="Courier"/>
               </a:rPr>
               <a:t>)</a:t>
             </a:r>
             <a:r>
-              <a:rPr>
+              <a:rPr dirty="0">
                 <a:solidFill>
                   <a:srgbClr val="666666"/>
                 </a:solidFill>
@@ -6373,10 +7502,14 @@
               </a:rPr>
               <a:t>;</a:t>
             </a:r>
-            <a:br/>
-            <a:br/>
-            <a:r>
-              <a:rPr i="1">
+            <a:br>
+              <a:rPr dirty="0"/>
+            </a:br>
+            <a:br>
+              <a:rPr dirty="0"/>
+            </a:br>
+            <a:r>
+              <a:rPr i="1" dirty="0">
                 <a:solidFill>
                   <a:srgbClr val="60A0B0"/>
                 </a:solidFill>
@@ -6384,9 +7517,11 @@
               </a:rPr>
               <a:t>// General API rate limit</a:t>
             </a:r>
-            <a:br/>
-            <a:r>
-              <a:rPr b="1">
+            <a:br>
+              <a:rPr dirty="0"/>
+            </a:br>
+            <a:r>
+              <a:rPr b="1" dirty="0">
                 <a:solidFill>
                   <a:srgbClr val="007020"/>
                 </a:solidFill>
@@ -6395,13 +7530,25 @@
               <a:t>const</a:t>
             </a:r>
             <a:r>
-              <a:rPr>
-                <a:latin typeface="Courier"/>
-              </a:rPr>
-              <a:t> apiLimiter </a:t>
-            </a:r>
-            <a:r>
-              <a:rPr>
+              <a:rPr dirty="0">
+                <a:latin typeface="Courier"/>
+              </a:rPr>
+              <a:t> </a:t>
+            </a:r>
+            <a:r>
+              <a:rPr dirty="0" err="1">
+                <a:latin typeface="Courier"/>
+              </a:rPr>
+              <a:t>apiLimiter</a:t>
+            </a:r>
+            <a:r>
+              <a:rPr dirty="0">
+                <a:latin typeface="Courier"/>
+              </a:rPr>
+              <a:t> </a:t>
+            </a:r>
+            <a:r>
+              <a:rPr dirty="0">
                 <a:solidFill>
                   <a:srgbClr val="666666"/>
                 </a:solidFill>
@@ -6410,13 +7557,13 @@
               <a:t>=</a:t>
             </a:r>
             <a:r>
-              <a:rPr>
+              <a:rPr dirty="0">
                 <a:latin typeface="Courier"/>
               </a:rPr>
               <a:t> </a:t>
             </a:r>
             <a:r>
-              <a:rPr>
+              <a:rPr dirty="0" err="1">
                 <a:solidFill>
                   <a:srgbClr val="06287E"/>
                 </a:solidFill>
@@ -6425,20 +7572,22 @@
               <a:t>rateLimit</a:t>
             </a:r>
             <a:r>
-              <a:rPr>
+              <a:rPr dirty="0">
                 <a:latin typeface="Courier"/>
               </a:rPr>
               <a:t>({</a:t>
             </a:r>
-            <a:br/>
-            <a:r>
-              <a:rPr>
+            <a:br>
+              <a:rPr dirty="0"/>
+            </a:br>
+            <a:r>
+              <a:rPr dirty="0">
                 <a:latin typeface="Courier"/>
               </a:rPr>
               <a:t>  </a:t>
             </a:r>
             <a:r>
-              <a:rPr>
+              <a:rPr dirty="0" err="1">
                 <a:solidFill>
                   <a:srgbClr val="902000"/>
                 </a:solidFill>
@@ -6447,7 +7596,7 @@
               <a:t>windowMs</a:t>
             </a:r>
             <a:r>
-              <a:rPr>
+              <a:rPr dirty="0">
                 <a:solidFill>
                   <a:srgbClr val="666666"/>
                 </a:solidFill>
@@ -6456,13 +7605,13 @@
               <a:t>:</a:t>
             </a:r>
             <a:r>
-              <a:rPr>
+              <a:rPr dirty="0">
                 <a:latin typeface="Courier"/>
               </a:rPr>
               <a:t> </a:t>
             </a:r>
             <a:r>
-              <a:rPr>
+              <a:rPr dirty="0">
                 <a:solidFill>
                   <a:srgbClr val="40A070"/>
                 </a:solidFill>
@@ -6471,13 +7620,13 @@
               <a:t>15</a:t>
             </a:r>
             <a:r>
-              <a:rPr>
+              <a:rPr dirty="0">
                 <a:latin typeface="Courier"/>
               </a:rPr>
               <a:t> </a:t>
             </a:r>
             <a:r>
-              <a:rPr>
+              <a:rPr dirty="0">
                 <a:solidFill>
                   <a:srgbClr val="666666"/>
                 </a:solidFill>
@@ -6486,13 +7635,13 @@
               <a:t>*</a:t>
             </a:r>
             <a:r>
-              <a:rPr>
+              <a:rPr dirty="0">
                 <a:latin typeface="Courier"/>
               </a:rPr>
               <a:t> </a:t>
             </a:r>
             <a:r>
-              <a:rPr>
+              <a:rPr dirty="0">
                 <a:solidFill>
                   <a:srgbClr val="40A070"/>
                 </a:solidFill>
@@ -6501,13 +7650,13 @@
               <a:t>60</a:t>
             </a:r>
             <a:r>
-              <a:rPr>
+              <a:rPr dirty="0">
                 <a:latin typeface="Courier"/>
               </a:rPr>
               <a:t> </a:t>
             </a:r>
             <a:r>
-              <a:rPr>
+              <a:rPr dirty="0">
                 <a:solidFill>
                   <a:srgbClr val="666666"/>
                 </a:solidFill>
@@ -6516,13 +7665,13 @@
               <a:t>*</a:t>
             </a:r>
             <a:r>
-              <a:rPr>
+              <a:rPr dirty="0">
                 <a:latin typeface="Courier"/>
               </a:rPr>
               <a:t> </a:t>
             </a:r>
             <a:r>
-              <a:rPr>
+              <a:rPr dirty="0">
                 <a:solidFill>
                   <a:srgbClr val="40A070"/>
                 </a:solidFill>
@@ -6531,7 +7680,7 @@
               <a:t>1000</a:t>
             </a:r>
             <a:r>
-              <a:rPr>
+              <a:rPr dirty="0">
                 <a:solidFill>
                   <a:srgbClr val="666666"/>
                 </a:solidFill>
@@ -6540,13 +7689,13 @@
               <a:t>,</a:t>
             </a:r>
             <a:r>
-              <a:rPr>
+              <a:rPr dirty="0">
                 <a:latin typeface="Courier"/>
               </a:rPr>
               <a:t>  </a:t>
             </a:r>
             <a:r>
-              <a:rPr i="1">
+              <a:rPr i="1" dirty="0">
                 <a:solidFill>
                   <a:srgbClr val="60A0B0"/>
                 </a:solidFill>
@@ -6554,15 +7703,17 @@
               </a:rPr>
               <a:t>// 15 minutes</a:t>
             </a:r>
-            <a:br/>
-            <a:r>
-              <a:rPr>
+            <a:br>
+              <a:rPr dirty="0"/>
+            </a:br>
+            <a:r>
+              <a:rPr dirty="0">
                 <a:latin typeface="Courier"/>
               </a:rPr>
               <a:t>  </a:t>
             </a:r>
             <a:r>
-              <a:rPr>
+              <a:rPr dirty="0">
                 <a:solidFill>
                   <a:srgbClr val="902000"/>
                 </a:solidFill>
@@ -6571,7 +7722,7 @@
               <a:t>max</a:t>
             </a:r>
             <a:r>
-              <a:rPr>
+              <a:rPr dirty="0">
                 <a:solidFill>
                   <a:srgbClr val="666666"/>
                 </a:solidFill>
@@ -6580,13 +7731,13 @@
               <a:t>:</a:t>
             </a:r>
             <a:r>
-              <a:rPr>
+              <a:rPr dirty="0">
                 <a:latin typeface="Courier"/>
               </a:rPr>
               <a:t> </a:t>
             </a:r>
             <a:r>
-              <a:rPr>
+              <a:rPr dirty="0">
                 <a:solidFill>
                   <a:srgbClr val="40A070"/>
                 </a:solidFill>
@@ -6595,7 +7746,7 @@
               <a:t>100</a:t>
             </a:r>
             <a:r>
-              <a:rPr>
+              <a:rPr dirty="0">
                 <a:solidFill>
                   <a:srgbClr val="666666"/>
                 </a:solidFill>
@@ -6604,13 +7755,13 @@
               <a:t>,</a:t>
             </a:r>
             <a:r>
-              <a:rPr>
+              <a:rPr dirty="0">
                 <a:latin typeface="Courier"/>
               </a:rPr>
               <a:t>                   </a:t>
             </a:r>
             <a:r>
-              <a:rPr i="1">
+              <a:rPr i="1" dirty="0">
                 <a:solidFill>
                   <a:srgbClr val="60A0B0"/>
                 </a:solidFill>
@@ -6618,15 +7769,17 @@
               </a:rPr>
               <a:t>// 100 requests per window</a:t>
             </a:r>
-            <a:br/>
-            <a:r>
-              <a:rPr>
+            <a:br>
+              <a:rPr dirty="0"/>
+            </a:br>
+            <a:r>
+              <a:rPr dirty="0">
                 <a:latin typeface="Courier"/>
               </a:rPr>
               <a:t>  </a:t>
             </a:r>
             <a:r>
-              <a:rPr>
+              <a:rPr dirty="0">
                 <a:solidFill>
                   <a:srgbClr val="902000"/>
                 </a:solidFill>
@@ -6635,7 +7788,7 @@
               <a:t>message</a:t>
             </a:r>
             <a:r>
-              <a:rPr>
+              <a:rPr dirty="0">
                 <a:solidFill>
                   <a:srgbClr val="666666"/>
                 </a:solidFill>
@@ -6644,13 +7797,13 @@
               <a:t>:</a:t>
             </a:r>
             <a:r>
-              <a:rPr>
+              <a:rPr dirty="0">
                 <a:latin typeface="Courier"/>
               </a:rPr>
               <a:t> { </a:t>
             </a:r>
             <a:r>
-              <a:rPr>
+              <a:rPr dirty="0">
                 <a:solidFill>
                   <a:srgbClr val="902000"/>
                 </a:solidFill>
@@ -6659,7 +7812,7 @@
               <a:t>error</a:t>
             </a:r>
             <a:r>
-              <a:rPr>
+              <a:rPr dirty="0">
                 <a:solidFill>
                   <a:srgbClr val="666666"/>
                 </a:solidFill>
@@ -6668,13 +7821,13 @@
               <a:t>:</a:t>
             </a:r>
             <a:r>
-              <a:rPr>
+              <a:rPr dirty="0">
                 <a:latin typeface="Courier"/>
               </a:rPr>
               <a:t> </a:t>
             </a:r>
             <a:r>
-              <a:rPr>
+              <a:rPr dirty="0">
                 <a:solidFill>
                   <a:srgbClr val="4070A0"/>
                 </a:solidFill>
@@ -6683,20 +7836,22 @@
               <a:t>'Too many requests, try again later'</a:t>
             </a:r>
             <a:r>
-              <a:rPr>
+              <a:rPr dirty="0">
                 <a:latin typeface="Courier"/>
               </a:rPr>
               <a:t> }</a:t>
             </a:r>
-            <a:br/>
-            <a:r>
-              <a:rPr>
+            <a:br>
+              <a:rPr dirty="0"/>
+            </a:br>
+            <a:r>
+              <a:rPr dirty="0">
                 <a:latin typeface="Courier"/>
               </a:rPr>
               <a:t>})</a:t>
             </a:r>
             <a:r>
-              <a:rPr>
+              <a:rPr dirty="0">
                 <a:solidFill>
                   <a:srgbClr val="666666"/>
                 </a:solidFill>
@@ -6704,10 +7859,14 @@
               </a:rPr>
               <a:t>;</a:t>
             </a:r>
-            <a:br/>
-            <a:br/>
-            <a:r>
-              <a:rPr i="1">
+            <a:br>
+              <a:rPr dirty="0"/>
+            </a:br>
+            <a:br>
+              <a:rPr dirty="0"/>
+            </a:br>
+            <a:r>
+              <a:rPr i="1" dirty="0">
                 <a:solidFill>
                   <a:srgbClr val="60A0B0"/>
                 </a:solidFill>
@@ -6715,9 +7874,11 @@
               </a:rPr>
               <a:t>// Stricter limit on auth endpoints</a:t>
             </a:r>
-            <a:br/>
-            <a:r>
-              <a:rPr b="1">
+            <a:br>
+              <a:rPr dirty="0"/>
+            </a:br>
+            <a:r>
+              <a:rPr b="1" dirty="0">
                 <a:solidFill>
                   <a:srgbClr val="007020"/>
                 </a:solidFill>
@@ -6726,13 +7887,25 @@
               <a:t>const</a:t>
             </a:r>
             <a:r>
-              <a:rPr>
-                <a:latin typeface="Courier"/>
-              </a:rPr>
-              <a:t> authLimiter </a:t>
-            </a:r>
-            <a:r>
-              <a:rPr>
+              <a:rPr dirty="0">
+                <a:latin typeface="Courier"/>
+              </a:rPr>
+              <a:t> </a:t>
+            </a:r>
+            <a:r>
+              <a:rPr dirty="0" err="1">
+                <a:latin typeface="Courier"/>
+              </a:rPr>
+              <a:t>authLimiter</a:t>
+            </a:r>
+            <a:r>
+              <a:rPr dirty="0">
+                <a:latin typeface="Courier"/>
+              </a:rPr>
+              <a:t> </a:t>
+            </a:r>
+            <a:r>
+              <a:rPr dirty="0">
                 <a:solidFill>
                   <a:srgbClr val="666666"/>
                 </a:solidFill>
@@ -6741,13 +7914,13 @@
               <a:t>=</a:t>
             </a:r>
             <a:r>
-              <a:rPr>
+              <a:rPr dirty="0">
                 <a:latin typeface="Courier"/>
               </a:rPr>
               <a:t> </a:t>
             </a:r>
             <a:r>
-              <a:rPr>
+              <a:rPr dirty="0" err="1">
                 <a:solidFill>
                   <a:srgbClr val="06287E"/>
                 </a:solidFill>
@@ -6756,20 +7929,22 @@
               <a:t>rateLimit</a:t>
             </a:r>
             <a:r>
-              <a:rPr>
+              <a:rPr dirty="0">
                 <a:latin typeface="Courier"/>
               </a:rPr>
               <a:t>({</a:t>
             </a:r>
-            <a:br/>
-            <a:r>
-              <a:rPr>
+            <a:br>
+              <a:rPr dirty="0"/>
+            </a:br>
+            <a:r>
+              <a:rPr dirty="0">
                 <a:latin typeface="Courier"/>
               </a:rPr>
               <a:t>  </a:t>
             </a:r>
             <a:r>
-              <a:rPr>
+              <a:rPr dirty="0" err="1">
                 <a:solidFill>
                   <a:srgbClr val="902000"/>
                 </a:solidFill>
@@ -6778,7 +7953,7 @@
               <a:t>windowMs</a:t>
             </a:r>
             <a:r>
-              <a:rPr>
+              <a:rPr dirty="0">
                 <a:solidFill>
                   <a:srgbClr val="666666"/>
                 </a:solidFill>
@@ -6787,13 +7962,13 @@
               <a:t>:</a:t>
             </a:r>
             <a:r>
-              <a:rPr>
+              <a:rPr dirty="0">
                 <a:latin typeface="Courier"/>
               </a:rPr>
               <a:t> </a:t>
             </a:r>
             <a:r>
-              <a:rPr>
+              <a:rPr dirty="0">
                 <a:solidFill>
                   <a:srgbClr val="40A070"/>
                 </a:solidFill>
@@ -6802,13 +7977,13 @@
               <a:t>15</a:t>
             </a:r>
             <a:r>
-              <a:rPr>
+              <a:rPr dirty="0">
                 <a:latin typeface="Courier"/>
               </a:rPr>
               <a:t> </a:t>
             </a:r>
             <a:r>
-              <a:rPr>
+              <a:rPr dirty="0">
                 <a:solidFill>
                   <a:srgbClr val="666666"/>
                 </a:solidFill>
@@ -6817,13 +7992,13 @@
               <a:t>*</a:t>
             </a:r>
             <a:r>
-              <a:rPr>
+              <a:rPr dirty="0">
                 <a:latin typeface="Courier"/>
               </a:rPr>
               <a:t> </a:t>
             </a:r>
             <a:r>
-              <a:rPr>
+              <a:rPr dirty="0">
                 <a:solidFill>
                   <a:srgbClr val="40A070"/>
                 </a:solidFill>
@@ -6832,13 +8007,13 @@
               <a:t>60</a:t>
             </a:r>
             <a:r>
-              <a:rPr>
+              <a:rPr dirty="0">
                 <a:latin typeface="Courier"/>
               </a:rPr>
               <a:t> </a:t>
             </a:r>
             <a:r>
-              <a:rPr>
+              <a:rPr dirty="0">
                 <a:solidFill>
                   <a:srgbClr val="666666"/>
                 </a:solidFill>
@@ -6847,13 +8022,13 @@
               <a:t>*</a:t>
             </a:r>
             <a:r>
-              <a:rPr>
+              <a:rPr dirty="0">
                 <a:latin typeface="Courier"/>
               </a:rPr>
               <a:t> </a:t>
             </a:r>
             <a:r>
-              <a:rPr>
+              <a:rPr dirty="0">
                 <a:solidFill>
                   <a:srgbClr val="40A070"/>
                 </a:solidFill>
@@ -6862,7 +8037,7 @@
               <a:t>1000</a:t>
             </a:r>
             <a:r>
-              <a:rPr>
+              <a:rPr dirty="0">
                 <a:solidFill>
                   <a:srgbClr val="666666"/>
                 </a:solidFill>
@@ -6870,15 +8045,17 @@
               </a:rPr>
               <a:t>,</a:t>
             </a:r>
-            <a:br/>
-            <a:r>
-              <a:rPr>
+            <a:br>
+              <a:rPr dirty="0"/>
+            </a:br>
+            <a:r>
+              <a:rPr dirty="0">
                 <a:latin typeface="Courier"/>
               </a:rPr>
               <a:t>  </a:t>
             </a:r>
             <a:r>
-              <a:rPr>
+              <a:rPr dirty="0">
                 <a:solidFill>
                   <a:srgbClr val="902000"/>
                 </a:solidFill>
@@ -6887,7 +8064,7 @@
               <a:t>max</a:t>
             </a:r>
             <a:r>
-              <a:rPr>
+              <a:rPr dirty="0">
                 <a:solidFill>
                   <a:srgbClr val="666666"/>
                 </a:solidFill>
@@ -6896,13 +8073,13 @@
               <a:t>:</a:t>
             </a:r>
             <a:r>
-              <a:rPr>
+              <a:rPr dirty="0">
                 <a:latin typeface="Courier"/>
               </a:rPr>
               <a:t> </a:t>
             </a:r>
             <a:r>
-              <a:rPr>
+              <a:rPr dirty="0">
                 <a:solidFill>
                   <a:srgbClr val="40A070"/>
                 </a:solidFill>
@@ -6911,7 +8088,7 @@
               <a:t>5</a:t>
             </a:r>
             <a:r>
-              <a:rPr>
+              <a:rPr dirty="0">
                 <a:solidFill>
                   <a:srgbClr val="666666"/>
                 </a:solidFill>
@@ -6920,13 +8097,13 @@
               <a:t>,</a:t>
             </a:r>
             <a:r>
-              <a:rPr>
+              <a:rPr dirty="0">
                 <a:latin typeface="Courier"/>
               </a:rPr>
               <a:t>                     </a:t>
             </a:r>
             <a:r>
-              <a:rPr i="1">
+              <a:rPr i="1" dirty="0">
                 <a:solidFill>
                   <a:srgbClr val="60A0B0"/>
                 </a:solidFill>
@@ -6934,15 +8111,17 @@
               </a:rPr>
               <a:t>// 5 login attempts per 15 min</a:t>
             </a:r>
-            <a:br/>
-            <a:r>
-              <a:rPr>
+            <a:br>
+              <a:rPr dirty="0"/>
+            </a:br>
+            <a:r>
+              <a:rPr dirty="0">
                 <a:latin typeface="Courier"/>
               </a:rPr>
               <a:t>  </a:t>
             </a:r>
             <a:r>
-              <a:rPr>
+              <a:rPr dirty="0">
                 <a:solidFill>
                   <a:srgbClr val="902000"/>
                 </a:solidFill>
@@ -6951,7 +8130,7 @@
               <a:t>message</a:t>
             </a:r>
             <a:r>
-              <a:rPr>
+              <a:rPr dirty="0">
                 <a:solidFill>
                   <a:srgbClr val="666666"/>
                 </a:solidFill>
@@ -6960,13 +8139,13 @@
               <a:t>:</a:t>
             </a:r>
             <a:r>
-              <a:rPr>
+              <a:rPr dirty="0">
                 <a:latin typeface="Courier"/>
               </a:rPr>
               <a:t> { </a:t>
             </a:r>
             <a:r>
-              <a:rPr>
+              <a:rPr dirty="0">
                 <a:solidFill>
                   <a:srgbClr val="902000"/>
                 </a:solidFill>
@@ -6975,7 +8154,7 @@
               <a:t>error</a:t>
             </a:r>
             <a:r>
-              <a:rPr>
+              <a:rPr dirty="0">
                 <a:solidFill>
                   <a:srgbClr val="666666"/>
                 </a:solidFill>
@@ -6984,13 +8163,13 @@
               <a:t>:</a:t>
             </a:r>
             <a:r>
-              <a:rPr>
+              <a:rPr dirty="0">
                 <a:latin typeface="Courier"/>
               </a:rPr>
               <a:t> </a:t>
             </a:r>
             <a:r>
-              <a:rPr>
+              <a:rPr dirty="0">
                 <a:solidFill>
                   <a:srgbClr val="4070A0"/>
                 </a:solidFill>
@@ -6999,20 +8178,22 @@
               <a:t>'Too many login attempts'</a:t>
             </a:r>
             <a:r>
-              <a:rPr>
+              <a:rPr dirty="0">
                 <a:latin typeface="Courier"/>
               </a:rPr>
               <a:t> }</a:t>
             </a:r>
-            <a:br/>
-            <a:r>
-              <a:rPr>
+            <a:br>
+              <a:rPr dirty="0"/>
+            </a:br>
+            <a:r>
+              <a:rPr dirty="0">
                 <a:latin typeface="Courier"/>
               </a:rPr>
               <a:t>})</a:t>
             </a:r>
             <a:r>
-              <a:rPr>
+              <a:rPr dirty="0">
                 <a:solidFill>
                   <a:srgbClr val="666666"/>
                 </a:solidFill>
@@ -7020,16 +8201,20 @@
               </a:rPr>
               <a:t>;</a:t>
             </a:r>
-            <a:br/>
-            <a:br/>
-            <a:r>
-              <a:rPr>
+            <a:br>
+              <a:rPr dirty="0"/>
+            </a:br>
+            <a:br>
+              <a:rPr dirty="0"/>
+            </a:br>
+            <a:r>
+              <a:rPr dirty="0" err="1">
                 <a:latin typeface="Courier"/>
               </a:rPr>
               <a:t>app</a:t>
             </a:r>
             <a:r>
-              <a:rPr>
+              <a:rPr dirty="0" err="1">
                 <a:solidFill>
                   <a:srgbClr val="666666"/>
                 </a:solidFill>
@@ -7038,7 +8223,7 @@
               <a:t>.</a:t>
             </a:r>
             <a:r>
-              <a:rPr>
+              <a:rPr dirty="0" err="1">
                 <a:solidFill>
                   <a:srgbClr val="06287E"/>
                 </a:solidFill>
@@ -7047,22 +8232,40 @@
               <a:t>use</a:t>
             </a:r>
             <a:r>
-              <a:rPr>
+              <a:rPr dirty="0">
                 <a:latin typeface="Courier"/>
               </a:rPr>
               <a:t>(</a:t>
             </a:r>
             <a:r>
-              <a:rPr>
+              <a:rPr dirty="0">
                 <a:solidFill>
                   <a:srgbClr val="4070A0"/>
                 </a:solidFill>
                 <a:latin typeface="Courier"/>
               </a:rPr>
-              <a:t>'/api/'</a:t>
-            </a:r>
-            <a:r>
-              <a:rPr>
+              <a:t>'/</a:t>
+            </a:r>
+            <a:r>
+              <a:rPr dirty="0" err="1">
+                <a:solidFill>
+                  <a:srgbClr val="4070A0"/>
+                </a:solidFill>
+                <a:latin typeface="Courier"/>
+              </a:rPr>
+              <a:t>api</a:t>
+            </a:r>
+            <a:r>
+              <a:rPr dirty="0">
+                <a:solidFill>
+                  <a:srgbClr val="4070A0"/>
+                </a:solidFill>
+                <a:latin typeface="Courier"/>
+              </a:rPr>
+              <a:t>/'</a:t>
+            </a:r>
+            <a:r>
+              <a:rPr dirty="0">
                 <a:solidFill>
                   <a:srgbClr val="666666"/>
                 </a:solidFill>
@@ -7071,13 +8274,25 @@
               <a:t>,</a:t>
             </a:r>
             <a:r>
-              <a:rPr>
-                <a:latin typeface="Courier"/>
-              </a:rPr>
-              <a:t> apiLimiter)</a:t>
-            </a:r>
-            <a:r>
-              <a:rPr>
+              <a:rPr dirty="0">
+                <a:latin typeface="Courier"/>
+              </a:rPr>
+              <a:t> </a:t>
+            </a:r>
+            <a:r>
+              <a:rPr dirty="0" err="1">
+                <a:latin typeface="Courier"/>
+              </a:rPr>
+              <a:t>apiLimiter</a:t>
+            </a:r>
+            <a:r>
+              <a:rPr dirty="0">
+                <a:latin typeface="Courier"/>
+              </a:rPr>
+              <a:t>)</a:t>
+            </a:r>
+            <a:r>
+              <a:rPr dirty="0">
                 <a:solidFill>
                   <a:srgbClr val="666666"/>
                 </a:solidFill>
@@ -7085,15 +8300,17 @@
               </a:rPr>
               <a:t>;</a:t>
             </a:r>
-            <a:br/>
-            <a:r>
-              <a:rPr>
+            <a:br>
+              <a:rPr dirty="0"/>
+            </a:br>
+            <a:r>
+              <a:rPr dirty="0" err="1">
                 <a:latin typeface="Courier"/>
               </a:rPr>
               <a:t>app</a:t>
             </a:r>
             <a:r>
-              <a:rPr>
+              <a:rPr dirty="0" err="1">
                 <a:solidFill>
                   <a:srgbClr val="666666"/>
                 </a:solidFill>
@@ -7102,7 +8319,7 @@
               <a:t>.</a:t>
             </a:r>
             <a:r>
-              <a:rPr>
+              <a:rPr dirty="0" err="1">
                 <a:solidFill>
                   <a:srgbClr val="06287E"/>
                 </a:solidFill>
@@ -7111,22 +8328,40 @@
               <a:t>use</a:t>
             </a:r>
             <a:r>
-              <a:rPr>
+              <a:rPr dirty="0">
                 <a:latin typeface="Courier"/>
               </a:rPr>
               <a:t>(</a:t>
             </a:r>
             <a:r>
-              <a:rPr>
+              <a:rPr dirty="0">
                 <a:solidFill>
                   <a:srgbClr val="4070A0"/>
                 </a:solidFill>
                 <a:latin typeface="Courier"/>
               </a:rPr>
-              <a:t>'/api/login'</a:t>
-            </a:r>
-            <a:r>
-              <a:rPr>
+              <a:t>'/</a:t>
+            </a:r>
+            <a:r>
+              <a:rPr dirty="0" err="1">
+                <a:solidFill>
+                  <a:srgbClr val="4070A0"/>
+                </a:solidFill>
+                <a:latin typeface="Courier"/>
+              </a:rPr>
+              <a:t>api</a:t>
+            </a:r>
+            <a:r>
+              <a:rPr dirty="0">
+                <a:solidFill>
+                  <a:srgbClr val="4070A0"/>
+                </a:solidFill>
+                <a:latin typeface="Courier"/>
+              </a:rPr>
+              <a:t>/login'</a:t>
+            </a:r>
+            <a:r>
+              <a:rPr dirty="0">
                 <a:solidFill>
                   <a:srgbClr val="666666"/>
                 </a:solidFill>
@@ -7135,13 +8370,25 @@
               <a:t>,</a:t>
             </a:r>
             <a:r>
-              <a:rPr>
-                <a:latin typeface="Courier"/>
-              </a:rPr>
-              <a:t> authLimiter)</a:t>
-            </a:r>
-            <a:r>
-              <a:rPr>
+              <a:rPr dirty="0">
+                <a:latin typeface="Courier"/>
+              </a:rPr>
+              <a:t> </a:t>
+            </a:r>
+            <a:r>
+              <a:rPr dirty="0" err="1">
+                <a:latin typeface="Courier"/>
+              </a:rPr>
+              <a:t>authLimiter</a:t>
+            </a:r>
+            <a:r>
+              <a:rPr dirty="0">
+                <a:latin typeface="Courier"/>
+              </a:rPr>
+              <a:t>)</a:t>
+            </a:r>
+            <a:r>
+              <a:rPr dirty="0">
                 <a:solidFill>
                   <a:srgbClr val="666666"/>
                 </a:solidFill>
@@ -7149,15 +8396,17 @@
               </a:rPr>
               <a:t>;</a:t>
             </a:r>
-            <a:br/>
-            <a:r>
-              <a:rPr>
+            <a:br>
+              <a:rPr dirty="0"/>
+            </a:br>
+            <a:r>
+              <a:rPr dirty="0" err="1">
                 <a:latin typeface="Courier"/>
               </a:rPr>
               <a:t>app</a:t>
             </a:r>
             <a:r>
-              <a:rPr>
+              <a:rPr dirty="0" err="1">
                 <a:solidFill>
                   <a:srgbClr val="666666"/>
                 </a:solidFill>
@@ -7166,7 +8415,7 @@
               <a:t>.</a:t>
             </a:r>
             <a:r>
-              <a:rPr>
+              <a:rPr dirty="0" err="1">
                 <a:solidFill>
                   <a:srgbClr val="06287E"/>
                 </a:solidFill>
@@ -7175,22 +8424,40 @@
               <a:t>use</a:t>
             </a:r>
             <a:r>
-              <a:rPr>
+              <a:rPr dirty="0">
                 <a:latin typeface="Courier"/>
               </a:rPr>
               <a:t>(</a:t>
             </a:r>
             <a:r>
-              <a:rPr>
+              <a:rPr dirty="0">
                 <a:solidFill>
                   <a:srgbClr val="4070A0"/>
                 </a:solidFill>
                 <a:latin typeface="Courier"/>
               </a:rPr>
-              <a:t>'/api/register'</a:t>
-            </a:r>
-            <a:r>
-              <a:rPr>
+              <a:t>'/</a:t>
+            </a:r>
+            <a:r>
+              <a:rPr dirty="0" err="1">
+                <a:solidFill>
+                  <a:srgbClr val="4070A0"/>
+                </a:solidFill>
+                <a:latin typeface="Courier"/>
+              </a:rPr>
+              <a:t>api</a:t>
+            </a:r>
+            <a:r>
+              <a:rPr dirty="0">
+                <a:solidFill>
+                  <a:srgbClr val="4070A0"/>
+                </a:solidFill>
+                <a:latin typeface="Courier"/>
+              </a:rPr>
+              <a:t>/register'</a:t>
+            </a:r>
+            <a:r>
+              <a:rPr dirty="0">
                 <a:solidFill>
                   <a:srgbClr val="666666"/>
                 </a:solidFill>
@@ -7199,13 +8466,25 @@
               <a:t>,</a:t>
             </a:r>
             <a:r>
-              <a:rPr>
-                <a:latin typeface="Courier"/>
-              </a:rPr>
-              <a:t> authLimiter)</a:t>
-            </a:r>
-            <a:r>
-              <a:rPr>
+              <a:rPr dirty="0">
+                <a:latin typeface="Courier"/>
+              </a:rPr>
+              <a:t> </a:t>
+            </a:r>
+            <a:r>
+              <a:rPr dirty="0" err="1">
+                <a:latin typeface="Courier"/>
+              </a:rPr>
+              <a:t>authLimiter</a:t>
+            </a:r>
+            <a:r>
+              <a:rPr dirty="0">
+                <a:latin typeface="Courier"/>
+              </a:rPr>
+              <a:t>)</a:t>
+            </a:r>
+            <a:r>
+              <a:rPr dirty="0">
                 <a:solidFill>
                   <a:srgbClr val="666666"/>
                 </a:solidFill>
@@ -7218,6 +8497,9 @@
       </p:sp>
     </p:spTree>
   </p:cSld>
+  <p:clrMapOvr>
+    <a:masterClrMapping/>
+  </p:clrMapOvr>
 </p:sld>
 </file>
 
@@ -7245,7 +8527,7 @@
             <a:spLocks noGrp="1"/>
           </p:cNvSpPr>
           <p:nvPr>
-            <p:ph idx="2" sz="half" type="body"/>
+            <p:ph type="body" sz="half" idx="2"/>
           </p:nvPr>
         </p:nvSpPr>
         <p:spPr/>
@@ -7253,7 +8535,7 @@
           <a:bodyPr/>
           <a:lstStyle/>
           <a:p>
-            <a:pPr lvl="0" indent="0" marL="0">
+            <a:pPr marL="0" lvl="0" indent="0">
               <a:spcBef>
                 <a:spcPts val="3000"/>
               </a:spcBef>
@@ -7278,7 +8560,7 @@
         </p:nvGraphicFramePr>
         <p:xfrm>
           <a:off x="3568700" y="203200"/>
-          <a:ext cx="5105400" cy="4381500"/>
+          <a:ext cx="5105400" cy="4777740"/>
         </p:xfrm>
         <a:graphic>
           <a:graphicData uri="http://schemas.openxmlformats.org/drawingml/2006/table">
@@ -7287,10 +8569,34 @@
                 <a:tableStyleId>{5C22544A-7EE6-4342-B048-85BDC9FD1C3A}</a:tableStyleId>
               </a:tblPr>
               <a:tblGrid>
-                <a:gridCol w="1562100"/>
-                <a:gridCol w="1841500"/>
-                <a:gridCol w="850900"/>
-                <a:gridCol w="850900"/>
+                <a:gridCol w="1562100">
+                  <a:extLst>
+                    <a:ext uri="{9D8B030D-6E8A-4147-A177-3AD203B41FA5}">
+                      <a16:colId xmlns:a16="http://schemas.microsoft.com/office/drawing/2014/main" val="20000"/>
+                    </a:ext>
+                  </a:extLst>
+                </a:gridCol>
+                <a:gridCol w="1841500">
+                  <a:extLst>
+                    <a:ext uri="{9D8B030D-6E8A-4147-A177-3AD203B41FA5}">
+                      <a16:colId xmlns:a16="http://schemas.microsoft.com/office/drawing/2014/main" val="20001"/>
+                    </a:ext>
+                  </a:extLst>
+                </a:gridCol>
+                <a:gridCol w="850900">
+                  <a:extLst>
+                    <a:ext uri="{9D8B030D-6E8A-4147-A177-3AD203B41FA5}">
+                      <a16:colId xmlns:a16="http://schemas.microsoft.com/office/drawing/2014/main" val="20002"/>
+                    </a:ext>
+                  </a:extLst>
+                </a:gridCol>
+                <a:gridCol w="850900">
+                  <a:extLst>
+                    <a:ext uri="{9D8B030D-6E8A-4147-A177-3AD203B41FA5}">
+                      <a16:colId xmlns:a16="http://schemas.microsoft.com/office/drawing/2014/main" val="20003"/>
+                    </a:ext>
+                  </a:extLst>
+                </a:gridCol>
               </a:tblGrid>
               <a:tr h="0">
                 <a:tc>
@@ -7298,11 +8604,10 @@
                     <a:bodyPr/>
                     <a:lstStyle/>
                     <a:p>
-                      <a:pPr lvl="0" indent="0" marL="0">
+                      <a:pPr marL="0" lvl="0" indent="0">
                         <a:buNone/>
                       </a:pPr>
                       <a:r>
-                        <a:rPr/>
                         <a:t>Algorithm</a:t>
                       </a:r>
                     </a:p>
@@ -7314,11 +8619,10 @@
                     <a:bodyPr/>
                     <a:lstStyle/>
                     <a:p>
-                      <a:pPr lvl="0" indent="0" marL="0">
+                      <a:pPr marL="0" lvl="0" indent="0">
                         <a:buNone/>
                       </a:pPr>
                       <a:r>
-                        <a:rPr/>
                         <a:t>How It Works</a:t>
                       </a:r>
                     </a:p>
@@ -7330,11 +8634,10 @@
                     <a:bodyPr/>
                     <a:lstStyle/>
                     <a:p>
-                      <a:pPr lvl="0" indent="0" marL="0">
+                      <a:pPr marL="0" lvl="0" indent="0">
                         <a:buNone/>
                       </a:pPr>
                       <a:r>
-                        <a:rPr/>
                         <a:t>Pros</a:t>
                       </a:r>
                     </a:p>
@@ -7346,17 +8649,21 @@
                     <a:bodyPr/>
                     <a:lstStyle/>
                     <a:p>
-                      <a:pPr lvl="0" indent="0" marL="0">
+                      <a:pPr marL="0" lvl="0" indent="0">
                         <a:buNone/>
                       </a:pPr>
                       <a:r>
-                        <a:rPr/>
                         <a:t>Cons</a:t>
                       </a:r>
                     </a:p>
                   </a:txBody>
                   <a:tcPr/>
                 </a:tc>
+                <a:extLst>
+                  <a:ext uri="{0D108BD9-81ED-4DB2-BD59-A6C34878D82A}">
+                    <a16:rowId xmlns:a16="http://schemas.microsoft.com/office/drawing/2014/main" val="10000"/>
+                  </a:ext>
+                </a:extLst>
               </a:tr>
               <a:tr h="0">
                 <a:tc>
@@ -7364,7 +8671,7 @@
                     <a:bodyPr/>
                     <a:lstStyle/>
                     <a:p>
-                      <a:pPr lvl="0" indent="0" marL="0">
+                      <a:pPr marL="0" lvl="0" indent="0">
                         <a:buNone/>
                       </a:pPr>
                       <a:r>
@@ -7373,52 +8680,58 @@
                       </a:r>
                     </a:p>
                   </a:txBody>
+                  <a:tcPr/>
                 </a:tc>
                 <a:tc>
                   <a:txBody>
                     <a:bodyPr/>
                     <a:lstStyle/>
                     <a:p>
-                      <a:pPr lvl="0" indent="0" marL="0">
+                      <a:pPr marL="0" lvl="0" indent="0">
                         <a:buNone/>
                       </a:pPr>
                       <a:r>
-                        <a:rPr/>
                         <a:t>Count requests in fixed time slots (e.g., 0:00–0:15)</a:t>
                       </a:r>
                     </a:p>
                   </a:txBody>
+                  <a:tcPr/>
                 </a:tc>
                 <a:tc>
                   <a:txBody>
                     <a:bodyPr/>
                     <a:lstStyle/>
                     <a:p>
-                      <a:pPr lvl="0" indent="0" marL="0">
+                      <a:pPr marL="0" lvl="0" indent="0">
                         <a:buNone/>
                       </a:pPr>
                       <a:r>
-                        <a:rPr/>
                         <a:t>Simple to implement</a:t>
                       </a:r>
                     </a:p>
                   </a:txBody>
+                  <a:tcPr/>
                 </a:tc>
                 <a:tc>
                   <a:txBody>
                     <a:bodyPr/>
                     <a:lstStyle/>
                     <a:p>
-                      <a:pPr lvl="0" indent="0" marL="0">
+                      <a:pPr marL="0" lvl="0" indent="0">
                         <a:buNone/>
                       </a:pPr>
                       <a:r>
-                        <a:rPr/>
                         <a:t>Burst at window boundary (2x allowed)</a:t>
                       </a:r>
                     </a:p>
                   </a:txBody>
+                  <a:tcPr/>
                 </a:tc>
+                <a:extLst>
+                  <a:ext uri="{0D108BD9-81ED-4DB2-BD59-A6C34878D82A}">
+                    <a16:rowId xmlns:a16="http://schemas.microsoft.com/office/drawing/2014/main" val="10001"/>
+                  </a:ext>
+                </a:extLst>
               </a:tr>
               <a:tr h="0">
                 <a:tc>
@@ -7426,7 +8739,7 @@
                     <a:bodyPr/>
                     <a:lstStyle/>
                     <a:p>
-                      <a:pPr lvl="0" indent="0" marL="0">
+                      <a:pPr marL="0" lvl="0" indent="0">
                         <a:buNone/>
                       </a:pPr>
                       <a:r>
@@ -7435,52 +8748,58 @@
                       </a:r>
                     </a:p>
                   </a:txBody>
+                  <a:tcPr/>
                 </a:tc>
                 <a:tc>
                   <a:txBody>
                     <a:bodyPr/>
                     <a:lstStyle/>
                     <a:p>
-                      <a:pPr lvl="0" indent="0" marL="0">
+                      <a:pPr marL="0" lvl="0" indent="0">
                         <a:buNone/>
                       </a:pPr>
                       <a:r>
-                        <a:rPr/>
                         <a:t>Rolling window based on each request’s timestamp</a:t>
                       </a:r>
                     </a:p>
                   </a:txBody>
+                  <a:tcPr/>
                 </a:tc>
                 <a:tc>
                   <a:txBody>
                     <a:bodyPr/>
                     <a:lstStyle/>
                     <a:p>
-                      <a:pPr lvl="0" indent="0" marL="0">
+                      <a:pPr marL="0" lvl="0" indent="0">
                         <a:buNone/>
                       </a:pPr>
                       <a:r>
-                        <a:rPr/>
                         <a:t>Smooth enforcement</a:t>
                       </a:r>
                     </a:p>
                   </a:txBody>
+                  <a:tcPr/>
                 </a:tc>
                 <a:tc>
                   <a:txBody>
                     <a:bodyPr/>
                     <a:lstStyle/>
                     <a:p>
-                      <a:pPr lvl="0" indent="0" marL="0">
+                      <a:pPr marL="0" lvl="0" indent="0">
                         <a:buNone/>
                       </a:pPr>
                       <a:r>
-                        <a:rPr/>
                         <a:t>More memory (per-request timestamps)</a:t>
                       </a:r>
                     </a:p>
                   </a:txBody>
+                  <a:tcPr/>
                 </a:tc>
+                <a:extLst>
+                  <a:ext uri="{0D108BD9-81ED-4DB2-BD59-A6C34878D82A}">
+                    <a16:rowId xmlns:a16="http://schemas.microsoft.com/office/drawing/2014/main" val="10002"/>
+                  </a:ext>
+                </a:extLst>
               </a:tr>
               <a:tr h="0">
                 <a:tc>
@@ -7488,7 +8807,7 @@
                     <a:bodyPr/>
                     <a:lstStyle/>
                     <a:p>
-                      <a:pPr lvl="0" indent="0" marL="0">
+                      <a:pPr marL="0" lvl="0" indent="0">
                         <a:buNone/>
                       </a:pPr>
                       <a:r>
@@ -7497,52 +8816,58 @@
                       </a:r>
                     </a:p>
                   </a:txBody>
+                  <a:tcPr/>
                 </a:tc>
                 <a:tc>
                   <a:txBody>
                     <a:bodyPr/>
                     <a:lstStyle/>
                     <a:p>
-                      <a:pPr lvl="0" indent="0" marL="0">
+                      <a:pPr marL="0" lvl="0" indent="0">
                         <a:buNone/>
                       </a:pPr>
                       <a:r>
-                        <a:rPr/>
                         <a:t>Bucket refills at steady rate; each request takes a token</a:t>
                       </a:r>
                     </a:p>
                   </a:txBody>
+                  <a:tcPr/>
                 </a:tc>
                 <a:tc>
                   <a:txBody>
                     <a:bodyPr/>
                     <a:lstStyle/>
                     <a:p>
-                      <a:pPr lvl="0" indent="0" marL="0">
+                      <a:pPr marL="0" lvl="0" indent="0">
                         <a:buNone/>
                       </a:pPr>
                       <a:r>
-                        <a:rPr/>
                         <a:t>Allows short bursts, smooth average</a:t>
                       </a:r>
                     </a:p>
                   </a:txBody>
+                  <a:tcPr/>
                 </a:tc>
                 <a:tc>
                   <a:txBody>
                     <a:bodyPr/>
                     <a:lstStyle/>
                     <a:p>
-                      <a:pPr lvl="0" indent="0" marL="0">
+                      <a:pPr marL="0" lvl="0" indent="0">
                         <a:buNone/>
                       </a:pPr>
                       <a:r>
-                        <a:rPr/>
                         <a:t>Slightly complex</a:t>
                       </a:r>
                     </a:p>
                   </a:txBody>
+                  <a:tcPr/>
                 </a:tc>
+                <a:extLst>
+                  <a:ext uri="{0D108BD9-81ED-4DB2-BD59-A6C34878D82A}">
+                    <a16:rowId xmlns:a16="http://schemas.microsoft.com/office/drawing/2014/main" val="10003"/>
+                  </a:ext>
+                </a:extLst>
               </a:tr>
               <a:tr h="0">
                 <a:tc>
@@ -7550,7 +8875,7 @@
                     <a:bodyPr/>
                     <a:lstStyle/>
                     <a:p>
-                      <a:pPr lvl="0" indent="0" marL="0">
+                      <a:pPr marL="0" lvl="0" indent="0">
                         <a:buNone/>
                       </a:pPr>
                       <a:r>
@@ -7559,52 +8884,58 @@
                       </a:r>
                     </a:p>
                   </a:txBody>
+                  <a:tcPr/>
                 </a:tc>
                 <a:tc>
                   <a:txBody>
                     <a:bodyPr/>
                     <a:lstStyle/>
                     <a:p>
-                      <a:pPr lvl="0" indent="0" marL="0">
+                      <a:pPr marL="0" lvl="0" indent="0">
                         <a:buNone/>
                       </a:pPr>
                       <a:r>
-                        <a:rPr/>
                         <a:t>Requests queue and drain at fixed rate</a:t>
                       </a:r>
                     </a:p>
                   </a:txBody>
+                  <a:tcPr/>
                 </a:tc>
                 <a:tc>
                   <a:txBody>
                     <a:bodyPr/>
                     <a:lstStyle/>
                     <a:p>
-                      <a:pPr lvl="0" indent="0" marL="0">
+                      <a:pPr marL="0" lvl="0" indent="0">
                         <a:buNone/>
                       </a:pPr>
                       <a:r>
-                        <a:rPr/>
                         <a:t>Very smooth output rate</a:t>
                       </a:r>
                     </a:p>
                   </a:txBody>
+                  <a:tcPr/>
                 </a:tc>
                 <a:tc>
                   <a:txBody>
                     <a:bodyPr/>
                     <a:lstStyle/>
                     <a:p>
-                      <a:pPr lvl="0" indent="0" marL="0">
+                      <a:pPr marL="0" lvl="0" indent="0">
                         <a:buNone/>
                       </a:pPr>
                       <a:r>
-                        <a:rPr/>
                         <a:t>Queuing adds latency</a:t>
                       </a:r>
                     </a:p>
                   </a:txBody>
+                  <a:tcPr/>
                 </a:tc>
+                <a:extLst>
+                  <a:ext uri="{0D108BD9-81ED-4DB2-BD59-A6C34878D82A}">
+                    <a16:rowId xmlns:a16="http://schemas.microsoft.com/office/drawing/2014/main" val="10004"/>
+                  </a:ext>
+                </a:extLst>
               </a:tr>
             </a:tbl>
           </a:graphicData>
@@ -7612,6 +8943,9 @@
       </p:graphicFrame>
     </p:spTree>
   </p:cSld>
+  <p:clrMapOvr>
+    <a:masterClrMapping/>
+  </p:clrMapOvr>
 </p:sld>
 </file>
 
@@ -7647,11 +8981,10 @@
           <a:bodyPr/>
           <a:lstStyle/>
           <a:p>
-            <a:pPr lvl="0" indent="0" marL="0">
+            <a:pPr marL="0" lvl="0" indent="0">
               <a:buNone/>
             </a:pPr>
             <a:r>
-              <a:rPr/>
               <a:t>Hardening Web Applications</a:t>
             </a:r>
           </a:p>
@@ -7672,18 +9005,86 @@
           <a:bodyPr/>
           <a:lstStyle/>
           <a:p>
-            <a:pPr lvl="0" indent="0" marL="0">
+            <a:pPr marL="0" lvl="0" indent="0">
               <a:buNone/>
             </a:pPr>
             <a:r>
-              <a:rPr/>
+              <a:rPr dirty="0"/>
               <a:t>From “it works” to “it’s ready for production”</a:t>
             </a:r>
+            <a:endParaRPr lang="en-US" dirty="0"/>
+          </a:p>
+          <a:p>
+            <a:pPr marL="0" lvl="0" indent="0">
+              <a:buNone/>
+            </a:pPr>
+            <a:endParaRPr lang="en-US" dirty="0"/>
+          </a:p>
+          <a:p>
+            <a:pPr marL="0" lvl="0" indent="0">
+              <a:buNone/>
+            </a:pPr>
+            <a:r>
+              <a:rPr lang="en-US" dirty="0"/>
+              <a:t>-Sanitization and validation of input.</a:t>
+            </a:r>
+          </a:p>
+          <a:p>
+            <a:pPr lvl="0">
+              <a:buFontTx/>
+              <a:buChar char="-"/>
+            </a:pPr>
+            <a:r>
+              <a:rPr lang="en-US" dirty="0"/>
+              <a:t>.env (NOT in </a:t>
+            </a:r>
+            <a:r>
+              <a:rPr lang="en-US" dirty="0" err="1"/>
+              <a:t>github</a:t>
+            </a:r>
+            <a:r>
+              <a:rPr lang="en-US" dirty="0"/>
+              <a:t> repo)</a:t>
+            </a:r>
+          </a:p>
+          <a:p>
+            <a:pPr lvl="0">
+              <a:buFontTx/>
+              <a:buChar char="-"/>
+            </a:pPr>
+            <a:r>
+              <a:rPr lang="en-US" dirty="0"/>
+              <a:t>Hashing any secure info.</a:t>
+            </a:r>
+          </a:p>
+          <a:p>
+            <a:pPr lvl="0">
+              <a:buFontTx/>
+              <a:buChar char="-"/>
+            </a:pPr>
+            <a:r>
+              <a:rPr lang="en-US" dirty="0"/>
+              <a:t>Admin Default Cred</a:t>
+            </a:r>
+          </a:p>
+          <a:p>
+            <a:pPr lvl="0">
+              <a:buFontTx/>
+              <a:buChar char="-"/>
+            </a:pPr>
+            <a:r>
+              <a:rPr lang="en-US" dirty="0"/>
+              <a:t>Social Engineering. </a:t>
+            </a:r>
+            <a:endParaRPr dirty="0"/>
           </a:p>
         </p:txBody>
       </p:sp>
     </p:spTree>
   </p:cSld>
+  <p:clrMapOvr>
+    <a:masterClrMapping/>
+  </p:clrMapOvr>
 </p:sld>
 </file>
 
@@ -7719,7 +9120,7 @@
           <a:bodyPr/>
           <a:lstStyle/>
           <a:p>
-            <a:pPr lvl="0" indent="0" marL="0">
+            <a:pPr marL="0" lvl="0" indent="0">
               <a:buNone/>
             </a:pPr>
             <a:r>
@@ -7729,7 +9130,6 @@
               <a:t>express-rate-limit</a:t>
             </a:r>
             <a:r>
-              <a:rPr/>
               <a:t> uses </a:t>
             </a:r>
             <a:r>
@@ -7737,7 +9137,6 @@
               <a:t>fixed window</a:t>
             </a:r>
             <a:r>
-              <a:rPr/>
               <a:t> by default. For distributed systems, use a </a:t>
             </a:r>
             <a:r>
@@ -7745,7 +9144,6 @@
               <a:t>Redis-backed store</a:t>
             </a:r>
             <a:r>
-              <a:rPr/>
               <a:t> so limits are shared across instances.</a:t>
             </a:r>
           </a:p>
@@ -7753,6 +9151,9 @@
       </p:sp>
     </p:spTree>
   </p:cSld>
+  <p:clrMapOvr>
+    <a:masterClrMapping/>
+  </p:clrMapOvr>
 </p:sld>
 </file>
 
@@ -7785,10 +9186,12 @@
         </p:nvSpPr>
         <p:spPr/>
         <p:txBody>
-          <a:bodyPr/>
+          <a:bodyPr>
+            <a:normAutofit fontScale="62500" lnSpcReduction="20000"/>
+          </a:bodyPr>
           <a:lstStyle/>
           <a:p>
-            <a:pPr lvl="0" indent="0" marL="0">
+            <a:pPr marL="0" lvl="0" indent="0">
               <a:spcBef>
                 <a:spcPts val="3000"/>
               </a:spcBef>
@@ -7800,11 +9203,10 @@
             </a:r>
           </a:p>
           <a:p>
-            <a:pPr lvl="0" indent="0" marL="0">
+            <a:pPr marL="0" lvl="0" indent="0">
               <a:buNone/>
             </a:pPr>
             <a:r>
-              <a:rPr/>
               <a:t>Standard response headers communicate limits to clients:</a:t>
             </a:r>
           </a:p>
@@ -7825,7 +9227,7 @@
             </a:r>
           </a:p>
           <a:p>
-            <a:pPr lvl="0" indent="0" marL="0">
+            <a:pPr marL="0" lvl="0" indent="0">
               <a:buNone/>
             </a:pPr>
             <a:r>
@@ -7836,7 +9238,6 @@
           <a:p>
             <a:pPr lvl="0"/>
             <a:r>
-              <a:rPr/>
               <a:t>Read </a:t>
             </a:r>
             <a:r>
@@ -7846,14 +9247,12 @@
               <a:t>Retry-After</a:t>
             </a:r>
             <a:r>
-              <a:rPr/>
               <a:t> header and wait before retrying</a:t>
             </a:r>
           </a:p>
           <a:p>
             <a:pPr lvl="0"/>
             <a:r>
-              <a:rPr/>
               <a:t>Use </a:t>
             </a:r>
             <a:r>
@@ -7861,14 +9260,12 @@
               <a:t>exponential backoff</a:t>
             </a:r>
             <a:r>
-              <a:rPr/>
               <a:t>: 1s → 2s → 4s → 8s (not tight loops)</a:t>
             </a:r>
           </a:p>
           <a:p>
             <a:pPr lvl="0"/>
             <a:r>
-              <a:rPr/>
               <a:t>Cache responses to reduce request count</a:t>
             </a:r>
           </a:p>
@@ -7876,6 +9273,9 @@
       </p:sp>
     </p:spTree>
   </p:cSld>
+  <p:clrMapOvr>
+    <a:masterClrMapping/>
+  </p:clrMapOvr>
 </p:sld>
 </file>
 
@@ -7908,10 +9308,12 @@
         </p:nvSpPr>
         <p:spPr/>
         <p:txBody>
-          <a:bodyPr/>
+          <a:bodyPr>
+            <a:normAutofit fontScale="55000" lnSpcReduction="20000"/>
+          </a:bodyPr>
           <a:lstStyle/>
           <a:p>
-            <a:pPr lvl="0" indent="0" marL="0">
+            <a:pPr marL="0" lvl="0" indent="0">
               <a:spcBef>
                 <a:spcPts val="3000"/>
               </a:spcBef>
@@ -8713,7 +10115,7 @@
             </a:r>
           </a:p>
           <a:p>
-            <a:pPr lvl="0" indent="0" marL="0">
+            <a:pPr marL="0" lvl="0" indent="0">
               <a:buNone/>
             </a:pPr>
             <a:r>
@@ -8721,12 +10123,11 @@
               <a:t>Why Redis?</a:t>
             </a:r>
             <a:r>
-              <a:rPr/>
               <a:t> In-memory rate limits reset when a process restarts and aren’t shared across instances. Redis gives you a single counter across your entire fleet.</a:t>
             </a:r>
           </a:p>
           <a:p>
-            <a:pPr lvl="0" indent="0" marL="0">
+            <a:pPr marL="0" lvl="0" indent="0">
               <a:buNone/>
             </a:pPr>
             <a:r>
@@ -8734,7 +10135,6 @@
               <a:t>API Gateway rate limiting:</a:t>
             </a:r>
             <a:r>
-              <a:rPr/>
               <a:t> AWS API Gateway, CloudFront, and Vercel all offer platform-level rate limiting — consider layering these with application-level limits.</a:t>
             </a:r>
           </a:p>
@@ -8742,6 +10142,9 @@
       </p:sp>
     </p:spTree>
   </p:cSld>
+  <p:clrMapOvr>
+    <a:masterClrMapping/>
+  </p:clrMapOvr>
 </p:sld>
 </file>
 
@@ -8777,11 +10180,10 @@
           <a:bodyPr/>
           <a:lstStyle/>
           <a:p>
-            <a:pPr lvl="0" indent="0" marL="0">
+            <a:pPr marL="0" lvl="0" indent="0">
               <a:buNone/>
             </a:pPr>
             <a:r>
-              <a:rPr/>
               <a:t>Part 4: HTTP Security Headers</a:t>
             </a:r>
           </a:p>
@@ -8789,6 +10191,9 @@
       </p:sp>
     </p:spTree>
   </p:cSld>
+  <p:clrMapOvr>
+    <a:masterClrMapping/>
+  </p:clrMapOvr>
 </p:sld>
 </file>
 
@@ -8816,7 +10221,7 @@
             <a:spLocks noGrp="1"/>
           </p:cNvSpPr>
           <p:nvPr>
-            <p:ph idx="2" sz="half" type="body"/>
+            <p:ph type="body" sz="half" idx="2"/>
           </p:nvPr>
         </p:nvSpPr>
         <p:spPr/>
@@ -8824,7 +10229,7 @@
           <a:bodyPr/>
           <a:lstStyle/>
           <a:p>
-            <a:pPr lvl="0" indent="0" marL="0">
+            <a:pPr marL="0" lvl="0" indent="0">
               <a:spcBef>
                 <a:spcPts val="3000"/>
               </a:spcBef>
@@ -8836,11 +10241,10 @@
             </a:r>
           </a:p>
           <a:p>
-            <a:pPr lvl="0" indent="0" marL="0">
+            <a:pPr marL="0" lvl="0" indent="0">
               <a:buNone/>
             </a:pPr>
             <a:r>
-              <a:rPr/>
               <a:t>Use the </a:t>
             </a:r>
             <a:r>
@@ -8850,7 +10254,6 @@
               <a:t>helmet</a:t>
             </a:r>
             <a:r>
-              <a:rPr/>
               <a:t> middleware — one line adds all critical headers:</a:t>
             </a:r>
           </a:p>
@@ -8984,11 +10387,10 @@
             </a:r>
           </a:p>
           <a:p>
-            <a:pPr lvl="0" indent="0" marL="0">
+            <a:pPr marL="0" lvl="0" indent="0">
               <a:buNone/>
             </a:pPr>
             <a:r>
-              <a:rPr/>
               <a:t>What </a:t>
             </a:r>
             <a:r>
@@ -8998,7 +10400,6 @@
               <a:t>helmet()</a:t>
             </a:r>
             <a:r>
-              <a:rPr/>
               <a:t> sets:</a:t>
             </a:r>
           </a:p>
@@ -9016,7 +10417,7 @@
         </p:nvGraphicFramePr>
         <p:xfrm>
           <a:off x="3568700" y="203200"/>
-          <a:ext cx="5105400" cy="4381500"/>
+          <a:ext cx="5105400" cy="2903220"/>
         </p:xfrm>
         <a:graphic>
           <a:graphicData uri="http://schemas.openxmlformats.org/drawingml/2006/table">
@@ -9025,8 +10426,20 @@
                 <a:tableStyleId>{5C22544A-7EE6-4342-B048-85BDC9FD1C3A}</a:tableStyleId>
               </a:tblPr>
               <a:tblGrid>
-                <a:gridCol w="2400300"/>
-                <a:gridCol w="2705100"/>
+                <a:gridCol w="2400300">
+                  <a:extLst>
+                    <a:ext uri="{9D8B030D-6E8A-4147-A177-3AD203B41FA5}">
+                      <a16:colId xmlns:a16="http://schemas.microsoft.com/office/drawing/2014/main" val="20000"/>
+                    </a:ext>
+                  </a:extLst>
+                </a:gridCol>
+                <a:gridCol w="2705100">
+                  <a:extLst>
+                    <a:ext uri="{9D8B030D-6E8A-4147-A177-3AD203B41FA5}">
+                      <a16:colId xmlns:a16="http://schemas.microsoft.com/office/drawing/2014/main" val="20001"/>
+                    </a:ext>
+                  </a:extLst>
+                </a:gridCol>
               </a:tblGrid>
               <a:tr h="0">
                 <a:tc>
@@ -9034,11 +10447,10 @@
                     <a:bodyPr/>
                     <a:lstStyle/>
                     <a:p>
-                      <a:pPr lvl="0" indent="0" marL="0">
+                      <a:pPr marL="0" lvl="0" indent="0">
                         <a:buNone/>
                       </a:pPr>
                       <a:r>
-                        <a:rPr/>
                         <a:t>Header</a:t>
                       </a:r>
                     </a:p>
@@ -9050,17 +10462,21 @@
                     <a:bodyPr/>
                     <a:lstStyle/>
                     <a:p>
-                      <a:pPr lvl="0" indent="0" marL="0">
+                      <a:pPr marL="0" lvl="0" indent="0">
                         <a:buNone/>
                       </a:pPr>
                       <a:r>
-                        <a:rPr/>
                         <a:t>Purpose</a:t>
                       </a:r>
                     </a:p>
                   </a:txBody>
                   <a:tcPr/>
                 </a:tc>
+                <a:extLst>
+                  <a:ext uri="{0D108BD9-81ED-4DB2-BD59-A6C34878D82A}">
+                    <a16:rowId xmlns:a16="http://schemas.microsoft.com/office/drawing/2014/main" val="10000"/>
+                  </a:ext>
+                </a:extLst>
               </a:tr>
               <a:tr h="0">
                 <a:tc>
@@ -9068,7 +10484,7 @@
                     <a:bodyPr/>
                     <a:lstStyle/>
                     <a:p>
-                      <a:pPr lvl="0" indent="0" marL="0">
+                      <a:pPr marL="0" lvl="0" indent="0">
                         <a:buNone/>
                       </a:pPr>
                       <a:r>
@@ -9079,22 +10495,28 @@
                       </a:r>
                     </a:p>
                   </a:txBody>
+                  <a:tcPr/>
                 </a:tc>
                 <a:tc>
                   <a:txBody>
                     <a:bodyPr/>
                     <a:lstStyle/>
                     <a:p>
-                      <a:pPr lvl="0" indent="0" marL="0">
+                      <a:pPr marL="0" lvl="0" indent="0">
                         <a:buNone/>
                       </a:pPr>
                       <a:r>
-                        <a:rPr/>
                         <a:t>Restricts where scripts/styles/images can load from</a:t>
                       </a:r>
                     </a:p>
                   </a:txBody>
+                  <a:tcPr/>
                 </a:tc>
+                <a:extLst>
+                  <a:ext uri="{0D108BD9-81ED-4DB2-BD59-A6C34878D82A}">
+                    <a16:rowId xmlns:a16="http://schemas.microsoft.com/office/drawing/2014/main" val="10001"/>
+                  </a:ext>
+                </a:extLst>
               </a:tr>
               <a:tr h="0">
                 <a:tc>
@@ -9102,7 +10524,7 @@
                     <a:bodyPr/>
                     <a:lstStyle/>
                     <a:p>
-                      <a:pPr lvl="0" indent="0" marL="0">
+                      <a:pPr marL="0" lvl="0" indent="0">
                         <a:buNone/>
                       </a:pPr>
                       <a:r>
@@ -9113,22 +10535,28 @@
                       </a:r>
                     </a:p>
                   </a:txBody>
+                  <a:tcPr/>
                 </a:tc>
                 <a:tc>
                   <a:txBody>
                     <a:bodyPr/>
                     <a:lstStyle/>
                     <a:p>
-                      <a:pPr lvl="0" indent="0" marL="0">
+                      <a:pPr marL="0" lvl="0" indent="0">
                         <a:buNone/>
                       </a:pPr>
                       <a:r>
-                        <a:rPr/>
                         <a:t>Prevents MIME-type sniffing</a:t>
                       </a:r>
                     </a:p>
                   </a:txBody>
+                  <a:tcPr/>
                 </a:tc>
+                <a:extLst>
+                  <a:ext uri="{0D108BD9-81ED-4DB2-BD59-A6C34878D82A}">
+                    <a16:rowId xmlns:a16="http://schemas.microsoft.com/office/drawing/2014/main" val="10002"/>
+                  </a:ext>
+                </a:extLst>
               </a:tr>
               <a:tr h="0">
                 <a:tc>
@@ -9136,7 +10564,7 @@
                     <a:bodyPr/>
                     <a:lstStyle/>
                     <a:p>
-                      <a:pPr lvl="0" indent="0" marL="0">
+                      <a:pPr marL="0" lvl="0" indent="0">
                         <a:buNone/>
                       </a:pPr>
                       <a:r>
@@ -9147,22 +10575,28 @@
                       </a:r>
                     </a:p>
                   </a:txBody>
+                  <a:tcPr/>
                 </a:tc>
                 <a:tc>
                   <a:txBody>
                     <a:bodyPr/>
                     <a:lstStyle/>
                     <a:p>
-                      <a:pPr lvl="0" indent="0" marL="0">
+                      <a:pPr marL="0" lvl="0" indent="0">
                         <a:buNone/>
                       </a:pPr>
                       <a:r>
-                        <a:rPr/>
                         <a:t>Prevents clickjacking via iframes</a:t>
                       </a:r>
                     </a:p>
                   </a:txBody>
+                  <a:tcPr/>
                 </a:tc>
+                <a:extLst>
+                  <a:ext uri="{0D108BD9-81ED-4DB2-BD59-A6C34878D82A}">
+                    <a16:rowId xmlns:a16="http://schemas.microsoft.com/office/drawing/2014/main" val="10003"/>
+                  </a:ext>
+                </a:extLst>
               </a:tr>
               <a:tr h="0">
                 <a:tc>
@@ -9170,7 +10604,7 @@
                     <a:bodyPr/>
                     <a:lstStyle/>
                     <a:p>
-                      <a:pPr lvl="0" indent="0" marL="0">
+                      <a:pPr marL="0" lvl="0" indent="0">
                         <a:buNone/>
                       </a:pPr>
                       <a:r>
@@ -9181,22 +10615,28 @@
                       </a:r>
                     </a:p>
                   </a:txBody>
+                  <a:tcPr/>
                 </a:tc>
                 <a:tc>
                   <a:txBody>
                     <a:bodyPr/>
                     <a:lstStyle/>
                     <a:p>
-                      <a:pPr lvl="0" indent="0" marL="0">
+                      <a:pPr marL="0" lvl="0" indent="0">
                         <a:buNone/>
                       </a:pPr>
                       <a:r>
-                        <a:rPr/>
                         <a:t>Forces HTTPS for future requests</a:t>
                       </a:r>
                     </a:p>
                   </a:txBody>
+                  <a:tcPr/>
                 </a:tc>
+                <a:extLst>
+                  <a:ext uri="{0D108BD9-81ED-4DB2-BD59-A6C34878D82A}">
+                    <a16:rowId xmlns:a16="http://schemas.microsoft.com/office/drawing/2014/main" val="10004"/>
+                  </a:ext>
+                </a:extLst>
               </a:tr>
               <a:tr h="0">
                 <a:tc>
@@ -9204,7 +10644,7 @@
                     <a:bodyPr/>
                     <a:lstStyle/>
                     <a:p>
-                      <a:pPr lvl="0" indent="0" marL="0">
+                      <a:pPr marL="0" lvl="0" indent="0">
                         <a:buNone/>
                       </a:pPr>
                       <a:r>
@@ -9215,22 +10655,28 @@
                       </a:r>
                     </a:p>
                   </a:txBody>
+                  <a:tcPr/>
                 </a:tc>
                 <a:tc>
                   <a:txBody>
                     <a:bodyPr/>
                     <a:lstStyle/>
                     <a:p>
-                      <a:pPr lvl="0" indent="0" marL="0">
+                      <a:pPr marL="0" lvl="0" indent="0">
                         <a:buNone/>
                       </a:pPr>
                       <a:r>
-                        <a:rPr/>
                         <a:t>Legacy XSS filter (defense in depth)</a:t>
                       </a:r>
                     </a:p>
                   </a:txBody>
+                  <a:tcPr/>
                 </a:tc>
+                <a:extLst>
+                  <a:ext uri="{0D108BD9-81ED-4DB2-BD59-A6C34878D82A}">
+                    <a16:rowId xmlns:a16="http://schemas.microsoft.com/office/drawing/2014/main" val="10005"/>
+                  </a:ext>
+                </a:extLst>
               </a:tr>
               <a:tr h="0">
                 <a:tc>
@@ -9238,7 +10684,7 @@
                     <a:bodyPr/>
                     <a:lstStyle/>
                     <a:p>
-                      <a:pPr lvl="0" indent="0" marL="0">
+                      <a:pPr marL="0" lvl="0" indent="0">
                         <a:buNone/>
                       </a:pPr>
                       <a:r>
@@ -9249,22 +10695,28 @@
                       </a:r>
                     </a:p>
                   </a:txBody>
+                  <a:tcPr/>
                 </a:tc>
                 <a:tc>
                   <a:txBody>
                     <a:bodyPr/>
                     <a:lstStyle/>
                     <a:p>
-                      <a:pPr lvl="0" indent="0" marL="0">
+                      <a:pPr marL="0" lvl="0" indent="0">
                         <a:buNone/>
                       </a:pPr>
                       <a:r>
-                        <a:rPr/>
                         <a:t>Controls referrer info sent to other sites</a:t>
                       </a:r>
                     </a:p>
                   </a:txBody>
+                  <a:tcPr/>
                 </a:tc>
+                <a:extLst>
+                  <a:ext uri="{0D108BD9-81ED-4DB2-BD59-A6C34878D82A}">
+                    <a16:rowId xmlns:a16="http://schemas.microsoft.com/office/drawing/2014/main" val="10006"/>
+                  </a:ext>
+                </a:extLst>
               </a:tr>
             </a:tbl>
           </a:graphicData>
@@ -9272,6 +10724,9 @@
       </p:graphicFrame>
     </p:spTree>
   </p:cSld>
+  <p:clrMapOvr>
+    <a:masterClrMapping/>
+  </p:clrMapOvr>
 </p:sld>
 </file>
 
@@ -9307,28 +10762,54 @@
           <a:bodyPr/>
           <a:lstStyle/>
           <a:p>
-            <a:pPr lvl="0" indent="0" marL="0">
+            <a:pPr marL="0" lvl="0" indent="0">
               <a:buNone/>
             </a:pPr>
             <a:r>
-              <a:rPr/>
+              <a:rPr dirty="0"/>
               <a:t>Test your headers at </a:t>
             </a:r>
             <a:r>
-              <a:rPr>
+              <a:rPr dirty="0">
                 <a:hlinkClick r:id="rId2"/>
               </a:rPr>
               <a:t>securityheaders.com</a:t>
             </a:r>
             <a:r>
-              <a:rPr/>
+              <a:rPr dirty="0"/>
               <a:t> — aim for an A grade.</a:t>
             </a:r>
+            <a:endParaRPr lang="en-US" dirty="0"/>
+          </a:p>
+          <a:p>
+            <a:pPr marL="0" lvl="0" indent="0">
+              <a:buNone/>
+            </a:pPr>
+            <a:endParaRPr lang="en-US" dirty="0"/>
+          </a:p>
+          <a:p>
+            <a:pPr marL="0" lvl="0" indent="0">
+              <a:buNone/>
+            </a:pPr>
+            <a:r>
+              <a:rPr lang="en-US" dirty="0">
+                <a:hlinkClick r:id="rId3"/>
+              </a:rPr>
+              <a:t>https://securityheaders.com/?q=https%3A%2F%2Fwww.rpi.edu&amp;followRedirects=on</a:t>
+            </a:r>
+            <a:r>
+              <a:rPr lang="en-US" dirty="0"/>
+              <a:t> </a:t>
+            </a:r>
+            <a:endParaRPr dirty="0"/>
           </a:p>
         </p:txBody>
       </p:sp>
     </p:spTree>
   </p:cSld>
+  <p:clrMapOvr>
+    <a:masterClrMapping/>
+  </p:clrMapOvr>
 </p:sld>
 </file>
 
@@ -9361,10 +10842,12 @@
         </p:nvSpPr>
         <p:spPr/>
         <p:txBody>
-          <a:bodyPr/>
+          <a:bodyPr>
+            <a:normAutofit fontScale="55000" lnSpcReduction="20000"/>
+          </a:bodyPr>
           <a:lstStyle/>
           <a:p>
-            <a:pPr lvl="0" indent="0" marL="0">
+            <a:pPr marL="0" lvl="0" indent="0">
               <a:spcBef>
                 <a:spcPts val="3000"/>
               </a:spcBef>
@@ -9376,11 +10859,10 @@
             </a:r>
           </a:p>
           <a:p>
-            <a:pPr lvl="0" indent="0" marL="0">
+            <a:pPr marL="0" lvl="0" indent="0">
               <a:buNone/>
             </a:pPr>
             <a:r>
-              <a:rPr/>
               <a:t>CSP is the most powerful header — it whitelists allowed sources:</a:t>
             </a:r>
           </a:p>
@@ -10148,11 +11630,10 @@
             </a:r>
           </a:p>
           <a:p>
-            <a:pPr lvl="0" indent="0" marL="0">
+            <a:pPr marL="0" lvl="0" indent="0">
               <a:buNone/>
             </a:pPr>
             <a:r>
-              <a:rPr/>
               <a:t>If an XSS payload tries to load a script from </a:t>
             </a:r>
             <a:r>
@@ -10162,7 +11643,6 @@
               <a:t>evil.com</a:t>
             </a:r>
             <a:r>
-              <a:rPr/>
               <a:t>, CSP blocks it.</a:t>
             </a:r>
           </a:p>
@@ -10170,6 +11650,9 @@
       </p:sp>
     </p:spTree>
   </p:cSld>
+  <p:clrMapOvr>
+    <a:masterClrMapping/>
+  </p:clrMapOvr>
 </p:sld>
 </file>
 
@@ -10205,11 +11688,10 @@
           <a:bodyPr/>
           <a:lstStyle/>
           <a:p>
-            <a:pPr lvl="0" indent="0" marL="0">
+            <a:pPr marL="0" lvl="0" indent="0">
               <a:buNone/>
             </a:pPr>
             <a:r>
-              <a:rPr/>
               <a:t>Part 5: Infrastructure Hardening</a:t>
             </a:r>
           </a:p>
@@ -10217,6 +11699,9 @@
       </p:sp>
     </p:spTree>
   </p:cSld>
+  <p:clrMapOvr>
+    <a:masterClrMapping/>
+  </p:clrMapOvr>
 </p:sld>
 </file>
 
@@ -10249,10 +11734,12 @@
         </p:nvSpPr>
         <p:spPr/>
         <p:txBody>
-          <a:bodyPr/>
+          <a:bodyPr>
+            <a:normAutofit fontScale="92500"/>
+          </a:bodyPr>
           <a:lstStyle/>
           <a:p>
-            <a:pPr lvl="0" indent="0" marL="0">
+            <a:pPr marL="0" lvl="0" indent="0">
               <a:spcBef>
                 <a:spcPts val="3000"/>
               </a:spcBef>
@@ -10264,7 +11751,7 @@
             </a:r>
           </a:p>
           <a:p>
-            <a:pPr lvl="0" indent="0" marL="0">
+            <a:pPr marL="0" lvl="0" indent="0">
               <a:buNone/>
             </a:pPr>
             <a:r>
@@ -10273,11 +11760,10 @@
             </a:r>
           </a:p>
           <a:p>
-            <a:pPr lvl="0" indent="0" marL="0">
+            <a:pPr marL="0" lvl="0" indent="0">
               <a:buNone/>
             </a:pPr>
             <a:r>
-              <a:rPr/>
               <a:t>Client –HTTPS (TLS 1.3)–&gt; CDN/Load Balancer –HTTP (internal)–&gt; App Server</a:t>
             </a:r>
           </a:p>
@@ -10288,7 +11774,6 @@
               <a:t>Vercel / CloudFront:</a:t>
             </a:r>
             <a:r>
-              <a:rPr/>
               <a:t> Automatic HTTPS, no config needed</a:t>
             </a:r>
           </a:p>
@@ -10299,7 +11784,6 @@
               <a:t>Self-hosted:</a:t>
             </a:r>
             <a:r>
-              <a:rPr/>
               <a:t> Use Let’s Encrypt (free) + Nginx/Caddy as reverse proxy</a:t>
             </a:r>
           </a:p>
@@ -10310,7 +11794,6 @@
               <a:t>HSTS header:</a:t>
             </a:r>
             <a:r>
-              <a:rPr/>
               <a:t> Tells browsers to </a:t>
             </a:r>
             <a:r>
@@ -10318,7 +11801,6 @@
               <a:t>always</a:t>
             </a:r>
             <a:r>
-              <a:rPr/>
               <a:t> use HTTPS for your domain</a:t>
             </a:r>
           </a:p>
@@ -10326,6 +11808,9 @@
       </p:sp>
     </p:spTree>
   </p:cSld>
+  <p:clrMapOvr>
+    <a:masterClrMapping/>
+  </p:clrMapOvr>
 </p:sld>
 </file>
 
@@ -10353,7 +11838,7 @@
             <a:spLocks noGrp="1"/>
           </p:cNvSpPr>
           <p:nvPr>
-            <p:ph idx="2" sz="half" type="body"/>
+            <p:ph type="body" sz="half" idx="2"/>
           </p:nvPr>
         </p:nvSpPr>
         <p:spPr/>
@@ -10361,7 +11846,7 @@
           <a:bodyPr/>
           <a:lstStyle/>
           <a:p>
-            <a:pPr lvl="0" indent="0" marL="0">
+            <a:pPr marL="0" lvl="0" indent="0">
               <a:spcBef>
                 <a:spcPts val="3000"/>
               </a:spcBef>
@@ -10607,7 +12092,7 @@
         </p:nvGraphicFramePr>
         <p:xfrm>
           <a:off x="3568700" y="203200"/>
-          <a:ext cx="5105400" cy="4381500"/>
+          <a:ext cx="5105400" cy="2103120"/>
         </p:xfrm>
         <a:graphic>
           <a:graphicData uri="http://schemas.openxmlformats.org/drawingml/2006/table">
@@ -10616,8 +12101,20 @@
                 <a:tableStyleId>{5C22544A-7EE6-4342-B048-85BDC9FD1C3A}</a:tableStyleId>
               </a:tblPr>
               <a:tblGrid>
-                <a:gridCol w="2552700"/>
-                <a:gridCol w="2552700"/>
+                <a:gridCol w="2552700">
+                  <a:extLst>
+                    <a:ext uri="{9D8B030D-6E8A-4147-A177-3AD203B41FA5}">
+                      <a16:colId xmlns:a16="http://schemas.microsoft.com/office/drawing/2014/main" val="20000"/>
+                    </a:ext>
+                  </a:extLst>
+                </a:gridCol>
+                <a:gridCol w="2552700">
+                  <a:extLst>
+                    <a:ext uri="{9D8B030D-6E8A-4147-A177-3AD203B41FA5}">
+                      <a16:colId xmlns:a16="http://schemas.microsoft.com/office/drawing/2014/main" val="20001"/>
+                    </a:ext>
+                  </a:extLst>
+                </a:gridCol>
               </a:tblGrid>
               <a:tr h="0">
                 <a:tc>
@@ -10625,11 +12122,10 @@
                     <a:bodyPr/>
                     <a:lstStyle/>
                     <a:p>
-                      <a:pPr lvl="0" indent="0" marL="0">
+                      <a:pPr marL="0" lvl="0" indent="0">
                         <a:buNone/>
                       </a:pPr>
                       <a:r>
-                        <a:rPr/>
                         <a:t>Environment</a:t>
                       </a:r>
                     </a:p>
@@ -10641,17 +12137,21 @@
                     <a:bodyPr/>
                     <a:lstStyle/>
                     <a:p>
-                      <a:pPr lvl="0" indent="0" marL="0">
+                      <a:pPr marL="0" lvl="0" indent="0">
                         <a:buNone/>
                       </a:pPr>
                       <a:r>
-                        <a:rPr/>
                         <a:t>How to manage secrets</a:t>
                       </a:r>
                     </a:p>
                   </a:txBody>
                   <a:tcPr/>
                 </a:tc>
+                <a:extLst>
+                  <a:ext uri="{0D108BD9-81ED-4DB2-BD59-A6C34878D82A}">
+                    <a16:rowId xmlns:a16="http://schemas.microsoft.com/office/drawing/2014/main" val="10000"/>
+                  </a:ext>
+                </a:extLst>
               </a:tr>
               <a:tr h="0">
                 <a:tc>
@@ -10659,22 +12159,22 @@
                     <a:bodyPr/>
                     <a:lstStyle/>
                     <a:p>
-                      <a:pPr lvl="0" indent="0" marL="0">
+                      <a:pPr marL="0" lvl="0" indent="0">
                         <a:buNone/>
                       </a:pPr>
                       <a:r>
-                        <a:rPr/>
                         <a:t>Local dev</a:t>
                       </a:r>
                     </a:p>
                   </a:txBody>
+                  <a:tcPr/>
                 </a:tc>
                 <a:tc>
                   <a:txBody>
                     <a:bodyPr/>
                     <a:lstStyle/>
                     <a:p>
-                      <a:pPr lvl="0" indent="0" marL="0">
+                      <a:pPr marL="0" lvl="0" indent="0">
                         <a:buNone/>
                       </a:pPr>
                       <a:r>
@@ -10684,12 +12184,17 @@
                         <a:t>.env</a:t>
                       </a:r>
                       <a:r>
-                        <a:rPr/>
                         <a:t> file (gitignored)</a:t>
                       </a:r>
                     </a:p>
                   </a:txBody>
+                  <a:tcPr/>
                 </a:tc>
+                <a:extLst>
+                  <a:ext uri="{0D108BD9-81ED-4DB2-BD59-A6C34878D82A}">
+                    <a16:rowId xmlns:a16="http://schemas.microsoft.com/office/drawing/2014/main" val="10001"/>
+                  </a:ext>
+                </a:extLst>
               </a:tr>
               <a:tr h="0">
                 <a:tc>
@@ -10697,31 +12202,36 @@
                     <a:bodyPr/>
                     <a:lstStyle/>
                     <a:p>
-                      <a:pPr lvl="0" indent="0" marL="0">
+                      <a:pPr marL="0" lvl="0" indent="0">
                         <a:buNone/>
                       </a:pPr>
                       <a:r>
-                        <a:rPr/>
                         <a:t>Vercel</a:t>
                       </a:r>
                     </a:p>
                   </a:txBody>
+                  <a:tcPr/>
                 </a:tc>
                 <a:tc>
                   <a:txBody>
                     <a:bodyPr/>
                     <a:lstStyle/>
                     <a:p>
-                      <a:pPr lvl="0" indent="0" marL="0">
+                      <a:pPr marL="0" lvl="0" indent="0">
                         <a:buNone/>
                       </a:pPr>
                       <a:r>
-                        <a:rPr/>
                         <a:t>Dashboard &gt; Settings &gt; Environment Variables</a:t>
                       </a:r>
                     </a:p>
                   </a:txBody>
+                  <a:tcPr/>
                 </a:tc>
+                <a:extLst>
+                  <a:ext uri="{0D108BD9-81ED-4DB2-BD59-A6C34878D82A}">
+                    <a16:rowId xmlns:a16="http://schemas.microsoft.com/office/drawing/2014/main" val="10002"/>
+                  </a:ext>
+                </a:extLst>
               </a:tr>
               <a:tr h="0">
                 <a:tc>
@@ -10729,31 +12239,36 @@
                     <a:bodyPr/>
                     <a:lstStyle/>
                     <a:p>
-                      <a:pPr lvl="0" indent="0" marL="0">
+                      <a:pPr marL="0" lvl="0" indent="0">
                         <a:buNone/>
                       </a:pPr>
                       <a:r>
-                        <a:rPr/>
                         <a:t>AWS Lambda</a:t>
                       </a:r>
                     </a:p>
                   </a:txBody>
+                  <a:tcPr/>
                 </a:tc>
                 <a:tc>
                   <a:txBody>
                     <a:bodyPr/>
                     <a:lstStyle/>
                     <a:p>
-                      <a:pPr lvl="0" indent="0" marL="0">
+                      <a:pPr marL="0" lvl="0" indent="0">
                         <a:buNone/>
                       </a:pPr>
                       <a:r>
-                        <a:rPr/>
                         <a:t>Parameter Store / Secrets Manager</a:t>
                       </a:r>
                     </a:p>
                   </a:txBody>
+                  <a:tcPr/>
                 </a:tc>
+                <a:extLst>
+                  <a:ext uri="{0D108BD9-81ED-4DB2-BD59-A6C34878D82A}">
+                    <a16:rowId xmlns:a16="http://schemas.microsoft.com/office/drawing/2014/main" val="10003"/>
+                  </a:ext>
+                </a:extLst>
               </a:tr>
               <a:tr h="0">
                 <a:tc>
@@ -10761,22 +12276,22 @@
                     <a:bodyPr/>
                     <a:lstStyle/>
                     <a:p>
-                      <a:pPr lvl="0" indent="0" marL="0">
+                      <a:pPr marL="0" lvl="0" indent="0">
                         <a:buNone/>
                       </a:pPr>
                       <a:r>
-                        <a:rPr/>
                         <a:t>Docker</a:t>
                       </a:r>
                     </a:p>
                   </a:txBody>
+                  <a:tcPr/>
                 </a:tc>
                 <a:tc>
                   <a:txBody>
                     <a:bodyPr/>
                     <a:lstStyle/>
                     <a:p>
-                      <a:pPr lvl="0" indent="0" marL="0">
+                      <a:pPr marL="0" lvl="0" indent="0">
                         <a:buNone/>
                       </a:pPr>
                       <a:r>
@@ -10786,12 +12301,17 @@
                         <a:t>docker-compose.yml</a:t>
                       </a:r>
                       <a:r>
-                        <a:rPr/>
                         <a:t> env_file or Docker secrets</a:t>
                       </a:r>
                     </a:p>
                   </a:txBody>
+                  <a:tcPr/>
                 </a:tc>
+                <a:extLst>
+                  <a:ext uri="{0D108BD9-81ED-4DB2-BD59-A6C34878D82A}">
+                    <a16:rowId xmlns:a16="http://schemas.microsoft.com/office/drawing/2014/main" val="10004"/>
+                  </a:ext>
+                </a:extLst>
               </a:tr>
             </a:tbl>
           </a:graphicData>
@@ -10799,6 +12319,9 @@
       </p:graphicFrame>
     </p:spTree>
   </p:cSld>
+  <p:clrMapOvr>
+    <a:masterClrMapping/>
+  </p:clrMapOvr>
 </p:sld>
 </file>
 
@@ -10834,11 +12357,10 @@
           <a:bodyPr/>
           <a:lstStyle/>
           <a:p>
-            <a:pPr lvl="0" indent="0" marL="0">
+            <a:pPr marL="0" lvl="0" indent="0">
               <a:buNone/>
             </a:pPr>
             <a:r>
-              <a:rPr/>
               <a:t>Today’s Agenda</a:t>
             </a:r>
           </a:p>
@@ -10856,23 +12378,23 @@
         </p:nvSpPr>
         <p:spPr/>
         <p:txBody>
-          <a:bodyPr/>
+          <a:bodyPr>
+            <a:normAutofit fontScale="92500" lnSpcReduction="10000"/>
+          </a:bodyPr>
           <a:lstStyle/>
           <a:p>
-            <a:pPr lvl="0" indent="-342900" marL="342900">
+            <a:pPr marL="342900" lvl="0" indent="-342900">
               <a:buAutoNum type="arabicPeriod"/>
             </a:pPr>
             <a:r>
-              <a:rPr/>
               <a:t>What “production hardening” means and why it matters</a:t>
             </a:r>
           </a:p>
           <a:p>
-            <a:pPr lvl="0" indent="-342900" marL="342900">
+            <a:pPr marL="342900" lvl="0" indent="-342900">
               <a:buAutoNum type="arabicPeriod"/>
             </a:pPr>
             <a:r>
-              <a:rPr/>
               <a:t>OWASP Top 10 — the threats you </a:t>
             </a:r>
             <a:r>
@@ -10880,70 +12402,62 @@
               <a:t>will</a:t>
             </a:r>
             <a:r>
-              <a:rPr/>
               <a:t> face</a:t>
             </a:r>
           </a:p>
           <a:p>
-            <a:pPr lvl="0" indent="-342900" marL="342900">
+            <a:pPr marL="342900" lvl="0" indent="-342900">
               <a:buAutoNum type="arabicPeriod"/>
             </a:pPr>
             <a:r>
-              <a:rPr/>
               <a:t>Authentication &amp; session hardening</a:t>
             </a:r>
           </a:p>
           <a:p>
-            <a:pPr lvl="0" indent="-342900" marL="342900">
+            <a:pPr marL="342900" lvl="0" indent="-342900">
               <a:buAutoNum type="arabicPeriod"/>
             </a:pPr>
             <a:r>
-              <a:rPr/>
               <a:t>Input validation &amp; injection prevention</a:t>
             </a:r>
           </a:p>
           <a:p>
-            <a:pPr lvl="0" indent="-342900" marL="342900">
+            <a:pPr marL="342900" lvl="0" indent="-342900">
               <a:buAutoNum type="arabicPeriod"/>
             </a:pPr>
             <a:r>
-              <a:rPr/>
               <a:t>HTTP security headers</a:t>
             </a:r>
           </a:p>
           <a:p>
-            <a:pPr lvl="0" indent="-342900" marL="342900">
+            <a:pPr marL="342900" lvl="0" indent="-342900">
               <a:buAutoNum type="arabicPeriod"/>
             </a:pPr>
             <a:r>
-              <a:rPr/>
               <a:t>Infrastructure hardening (HTTPS, CORS, env vars)</a:t>
             </a:r>
           </a:p>
           <a:p>
-            <a:pPr lvl="0" indent="-342900" marL="342900">
+            <a:pPr marL="342900" lvl="0" indent="-342900">
               <a:buAutoNum type="arabicPeriod"/>
             </a:pPr>
             <a:r>
-              <a:rPr/>
               <a:t>Performance &amp; reliability</a:t>
             </a:r>
           </a:p>
           <a:p>
-            <a:pPr lvl="0" indent="-342900" marL="342900">
+            <a:pPr marL="342900" lvl="0" indent="-342900">
               <a:buAutoNum type="arabicPeriod"/>
             </a:pPr>
             <a:r>
-              <a:rPr/>
               <a:t>Monitoring &amp; observability</a:t>
             </a:r>
           </a:p>
           <a:p>
-            <a:pPr lvl="0" indent="-342900" marL="342900">
+            <a:pPr marL="342900" lvl="0" indent="-342900">
               <a:buAutoNum type="arabicPeriod"/>
             </a:pPr>
             <a:r>
-              <a:rPr/>
               <a:t>Hardening checklist for your capstone</a:t>
             </a:r>
           </a:p>
@@ -10951,6 +12465,9 @@
       </p:sp>
     </p:spTree>
   </p:cSld>
+  <p:clrMapOvr>
+    <a:masterClrMapping/>
+  </p:clrMapOvr>
 </p:sld>
 </file>
 
@@ -10986,7 +12503,7 @@
           <a:bodyPr/>
           <a:lstStyle/>
           <a:p>
-            <a:pPr lvl="0" indent="0" marL="0">
+            <a:pPr marL="0" lvl="0" indent="0">
               <a:buNone/>
             </a:pPr>
             <a:r>
@@ -10994,7 +12511,6 @@
               <a:t>Audit now:</a:t>
             </a:r>
             <a:r>
-              <a:rPr/>
               <a:t> </a:t>
             </a:r>
             <a:r>
@@ -11004,7 +12520,6 @@
               <a:t>git log --all -p -- '*.env'</a:t>
             </a:r>
             <a:r>
-              <a:rPr/>
               <a:t> — if secrets were ever committed, rotate them immediately.</a:t>
             </a:r>
           </a:p>
@@ -11012,6 +12527,9 @@
       </p:sp>
     </p:spTree>
   </p:cSld>
+  <p:clrMapOvr>
+    <a:masterClrMapping/>
+  </p:clrMapOvr>
 </p:sld>
 </file>
 
@@ -11044,10 +12562,12 @@
         </p:nvSpPr>
         <p:spPr/>
         <p:txBody>
-          <a:bodyPr/>
+          <a:bodyPr>
+            <a:normAutofit fontScale="62500" lnSpcReduction="20000"/>
+          </a:bodyPr>
           <a:lstStyle/>
           <a:p>
-            <a:pPr lvl="0" indent="0" marL="0">
+            <a:pPr marL="0" lvl="0" indent="0">
               <a:spcBef>
                 <a:spcPts val="3000"/>
               </a:spcBef>
@@ -11629,7 +13149,6 @@
           <a:p>
             <a:pPr lvl="0"/>
             <a:r>
-              <a:rPr/>
               <a:t>In production, </a:t>
             </a:r>
             <a:r>
@@ -11637,7 +13156,6 @@
               <a:t>never</a:t>
             </a:r>
             <a:r>
-              <a:rPr/>
               <a:t> use </a:t>
             </a:r>
             <a:r>
@@ -11647,7 +13165,6 @@
               <a:t>origin: '*'</a:t>
             </a:r>
             <a:r>
-              <a:rPr/>
               <a:t> with </a:t>
             </a:r>
             <a:r>
@@ -11660,7 +13177,6 @@
           <a:p>
             <a:pPr lvl="0"/>
             <a:r>
-              <a:rPr/>
               <a:t>List exact origins; don’t use regex that can be bypassed</a:t>
             </a:r>
           </a:p>
@@ -11668,6 +13184,9 @@
       </p:sp>
     </p:spTree>
   </p:cSld>
+  <p:clrMapOvr>
+    <a:masterClrMapping/>
+  </p:clrMapOvr>
 </p:sld>
 </file>
 
@@ -11703,11 +13222,10 @@
           <a:bodyPr/>
           <a:lstStyle/>
           <a:p>
-            <a:pPr lvl="0" indent="0" marL="0">
+            <a:pPr marL="0" lvl="0" indent="0">
               <a:buNone/>
             </a:pPr>
             <a:r>
-              <a:rPr/>
               <a:t>Part 6: Input Validation</a:t>
             </a:r>
           </a:p>
@@ -11715,6 +13233,9 @@
       </p:sp>
     </p:spTree>
   </p:cSld>
+  <p:clrMapOvr>
+    <a:masterClrMapping/>
+  </p:clrMapOvr>
 </p:sld>
 </file>
 
@@ -11750,7 +13271,7 @@
           <a:bodyPr/>
           <a:lstStyle/>
           <a:p>
-            <a:pPr lvl="0" indent="0" marL="0">
+            <a:pPr marL="0" lvl="0" indent="0">
               <a:spcBef>
                 <a:spcPts val="3000"/>
               </a:spcBef>
@@ -11762,7 +13283,7 @@
             </a:r>
           </a:p>
           <a:p>
-            <a:pPr lvl="0" indent="0" marL="0">
+            <a:pPr marL="0" lvl="0" indent="0">
               <a:buNone/>
             </a:pPr>
             <a:r>
@@ -11771,11 +13292,10 @@
             </a:r>
           </a:p>
           <a:p>
-            <a:pPr lvl="0" indent="0" marL="0">
+            <a:pPr marL="0" lvl="0" indent="0">
               <a:buNone/>
             </a:pPr>
             <a:r>
-              <a:rPr/>
               <a:t>User Input → Client Validation (UX feedback) → API Validation (Security gate) → Database Constraints (Last defense)</a:t>
             </a:r>
           </a:p>
@@ -11786,7 +13306,6 @@
               <a:t>Client-side:</a:t>
             </a:r>
             <a:r>
-              <a:rPr/>
               <a:t> For UX only — never trust it for security</a:t>
             </a:r>
           </a:p>
@@ -11797,7 +13316,6 @@
               <a:t>Server-side:</a:t>
             </a:r>
             <a:r>
-              <a:rPr/>
               <a:t> The real security gate — validate type, length, format, range</a:t>
             </a:r>
           </a:p>
@@ -11808,7 +13326,6 @@
               <a:t>Database:</a:t>
             </a:r>
             <a:r>
-              <a:rPr/>
               <a:t> Schema constraints as the final safety net</a:t>
             </a:r>
           </a:p>
@@ -11816,6 +13333,9 @@
       </p:sp>
     </p:spTree>
   </p:cSld>
+  <p:clrMapOvr>
+    <a:masterClrMapping/>
+  </p:clrMapOvr>
 </p:sld>
 </file>
 
@@ -11848,10 +13368,12 @@
         </p:nvSpPr>
         <p:spPr/>
         <p:txBody>
-          <a:bodyPr/>
+          <a:bodyPr>
+            <a:normAutofit fontScale="47500" lnSpcReduction="20000"/>
+          </a:bodyPr>
           <a:lstStyle/>
           <a:p>
-            <a:pPr lvl="0" indent="0" marL="0">
+            <a:pPr marL="0" lvl="0" indent="0">
               <a:spcBef>
                 <a:spcPts val="3000"/>
               </a:spcBef>
@@ -13048,6 +14570,9 @@
       </p:sp>
     </p:spTree>
   </p:cSld>
+  <p:clrMapOvr>
+    <a:masterClrMapping/>
+  </p:clrMapOvr>
 </p:sld>
 </file>
 
@@ -13083,11 +14608,10 @@
           <a:bodyPr/>
           <a:lstStyle/>
           <a:p>
-            <a:pPr lvl="0" indent="0" marL="0">
+            <a:pPr marL="0" lvl="0" indent="0">
               <a:buNone/>
             </a:pPr>
             <a:r>
-              <a:rPr/>
               <a:t>Part 7: Dependency Security</a:t>
             </a:r>
           </a:p>
@@ -13095,6 +14619,9 @@
       </p:sp>
     </p:spTree>
   </p:cSld>
+  <p:clrMapOvr>
+    <a:masterClrMapping/>
+  </p:clrMapOvr>
 </p:sld>
 </file>
 
@@ -13122,7 +14649,7 @@
             <a:spLocks noGrp="1"/>
           </p:cNvSpPr>
           <p:nvPr>
-            <p:ph idx="2" sz="half" type="body"/>
+            <p:ph type="body" sz="half" idx="2"/>
           </p:nvPr>
         </p:nvSpPr>
         <p:spPr/>
@@ -13130,7 +14657,7 @@
           <a:bodyPr/>
           <a:lstStyle/>
           <a:p>
-            <a:pPr lvl="0" indent="0" marL="0">
+            <a:pPr marL="0" lvl="0" indent="0">
               <a:spcBef>
                 <a:spcPts val="3000"/>
               </a:spcBef>
@@ -13142,11 +14669,10 @@
             </a:r>
           </a:p>
           <a:p>
-            <a:pPr lvl="0" indent="0" marL="0">
+            <a:pPr marL="0" lvl="0" indent="0">
               <a:buNone/>
             </a:pPr>
             <a:r>
-              <a:rPr/>
               <a:t>A typical Node.js app has </a:t>
             </a:r>
             <a:r>
@@ -13154,7 +14680,6 @@
               <a:t>hundreds</a:t>
             </a:r>
             <a:r>
-              <a:rPr/>
               <a:t> of transitive dependencies.</a:t>
             </a:r>
           </a:p>
@@ -13216,7 +14741,7 @@
             </a:r>
           </a:p>
           <a:p>
-            <a:pPr lvl="0" indent="0" marL="0">
+            <a:pPr marL="0" lvl="0" indent="0">
               <a:buNone/>
             </a:pPr>
             <a:r>
@@ -13238,7 +14763,7 @@
         </p:nvGraphicFramePr>
         <p:xfrm>
           <a:off x="3568700" y="203200"/>
-          <a:ext cx="5105400" cy="4381500"/>
+          <a:ext cx="5105400" cy="2103120"/>
         </p:xfrm>
         <a:graphic>
           <a:graphicData uri="http://schemas.openxmlformats.org/drawingml/2006/table">
@@ -13247,8 +14772,20 @@
                 <a:tableStyleId>{5C22544A-7EE6-4342-B048-85BDC9FD1C3A}</a:tableStyleId>
               </a:tblPr>
               <a:tblGrid>
-                <a:gridCol w="2552700"/>
-                <a:gridCol w="2552700"/>
+                <a:gridCol w="2552700">
+                  <a:extLst>
+                    <a:ext uri="{9D8B030D-6E8A-4147-A177-3AD203B41FA5}">
+                      <a16:colId xmlns:a16="http://schemas.microsoft.com/office/drawing/2014/main" val="20000"/>
+                    </a:ext>
+                  </a:extLst>
+                </a:gridCol>
+                <a:gridCol w="2552700">
+                  <a:extLst>
+                    <a:ext uri="{9D8B030D-6E8A-4147-A177-3AD203B41FA5}">
+                      <a16:colId xmlns:a16="http://schemas.microsoft.com/office/drawing/2014/main" val="20001"/>
+                    </a:ext>
+                  </a:extLst>
+                </a:gridCol>
               </a:tblGrid>
               <a:tr h="0">
                 <a:tc>
@@ -13256,11 +14793,10 @@
                     <a:bodyPr/>
                     <a:lstStyle/>
                     <a:p>
-                      <a:pPr lvl="0" indent="0" marL="0">
+                      <a:pPr marL="0" lvl="0" indent="0">
                         <a:buNone/>
                       </a:pPr>
                       <a:r>
-                        <a:rPr/>
                         <a:t>Tool</a:t>
                       </a:r>
                     </a:p>
@@ -13272,17 +14808,21 @@
                     <a:bodyPr/>
                     <a:lstStyle/>
                     <a:p>
-                      <a:pPr lvl="0" indent="0" marL="0">
+                      <a:pPr marL="0" lvl="0" indent="0">
                         <a:buNone/>
                       </a:pPr>
                       <a:r>
-                        <a:rPr/>
                         <a:t>What it does</a:t>
                       </a:r>
                     </a:p>
                   </a:txBody>
                   <a:tcPr/>
                 </a:tc>
+                <a:extLst>
+                  <a:ext uri="{0D108BD9-81ED-4DB2-BD59-A6C34878D82A}">
+                    <a16:rowId xmlns:a16="http://schemas.microsoft.com/office/drawing/2014/main" val="10000"/>
+                  </a:ext>
+                </a:extLst>
               </a:tr>
               <a:tr h="0">
                 <a:tc>
@@ -13290,7 +14830,7 @@
                     <a:bodyPr/>
                     <a:lstStyle/>
                     <a:p>
-                      <a:pPr lvl="0" indent="0" marL="0">
+                      <a:pPr marL="0" lvl="0" indent="0">
                         <a:buNone/>
                       </a:pPr>
                       <a:r>
@@ -13301,22 +14841,28 @@
                       </a:r>
                     </a:p>
                   </a:txBody>
+                  <a:tcPr/>
                 </a:tc>
                 <a:tc>
                   <a:txBody>
                     <a:bodyPr/>
                     <a:lstStyle/>
                     <a:p>
-                      <a:pPr lvl="0" indent="0" marL="0">
+                      <a:pPr marL="0" lvl="0" indent="0">
                         <a:buNone/>
                       </a:pPr>
                       <a:r>
-                        <a:rPr/>
                         <a:t>Built-in vulnerability scanner</a:t>
                       </a:r>
                     </a:p>
                   </a:txBody>
+                  <a:tcPr/>
                 </a:tc>
+                <a:extLst>
+                  <a:ext uri="{0D108BD9-81ED-4DB2-BD59-A6C34878D82A}">
+                    <a16:rowId xmlns:a16="http://schemas.microsoft.com/office/drawing/2014/main" val="10001"/>
+                  </a:ext>
+                </a:extLst>
               </a:tr>
               <a:tr h="0">
                 <a:tc>
@@ -13324,31 +14870,36 @@
                     <a:bodyPr/>
                     <a:lstStyle/>
                     <a:p>
-                      <a:pPr lvl="0" indent="0" marL="0">
+                      <a:pPr marL="0" lvl="0" indent="0">
                         <a:buNone/>
                       </a:pPr>
                       <a:r>
-                        <a:rPr/>
                         <a:t>Dependabot (GitHub)</a:t>
                       </a:r>
                     </a:p>
                   </a:txBody>
+                  <a:tcPr/>
                 </a:tc>
                 <a:tc>
                   <a:txBody>
                     <a:bodyPr/>
                     <a:lstStyle/>
                     <a:p>
-                      <a:pPr lvl="0" indent="0" marL="0">
+                      <a:pPr marL="0" lvl="0" indent="0">
                         <a:buNone/>
                       </a:pPr>
                       <a:r>
-                        <a:rPr/>
                         <a:t>Auto-creates PRs for vulnerable deps</a:t>
                       </a:r>
                     </a:p>
                   </a:txBody>
+                  <a:tcPr/>
                 </a:tc>
+                <a:extLst>
+                  <a:ext uri="{0D108BD9-81ED-4DB2-BD59-A6C34878D82A}">
+                    <a16:rowId xmlns:a16="http://schemas.microsoft.com/office/drawing/2014/main" val="10002"/>
+                  </a:ext>
+                </a:extLst>
               </a:tr>
               <a:tr h="0">
                 <a:tc>
@@ -13356,31 +14907,36 @@
                     <a:bodyPr/>
                     <a:lstStyle/>
                     <a:p>
-                      <a:pPr lvl="0" indent="0" marL="0">
+                      <a:pPr marL="0" lvl="0" indent="0">
                         <a:buNone/>
                       </a:pPr>
                       <a:r>
-                        <a:rPr/>
                         <a:t>Snyk</a:t>
                       </a:r>
                     </a:p>
                   </a:txBody>
+                  <a:tcPr/>
                 </a:tc>
                 <a:tc>
                   <a:txBody>
                     <a:bodyPr/>
                     <a:lstStyle/>
                     <a:p>
-                      <a:pPr lvl="0" indent="0" marL="0">
+                      <a:pPr marL="0" lvl="0" indent="0">
                         <a:buNone/>
                       </a:pPr>
                       <a:r>
-                        <a:rPr/>
                         <a:t>Deep scanning + container images</a:t>
                       </a:r>
                     </a:p>
                   </a:txBody>
+                  <a:tcPr/>
                 </a:tc>
+                <a:extLst>
+                  <a:ext uri="{0D108BD9-81ED-4DB2-BD59-A6C34878D82A}">
+                    <a16:rowId xmlns:a16="http://schemas.microsoft.com/office/drawing/2014/main" val="10003"/>
+                  </a:ext>
+                </a:extLst>
               </a:tr>
               <a:tr h="0">
                 <a:tc>
@@ -13388,31 +14944,36 @@
                     <a:bodyPr/>
                     <a:lstStyle/>
                     <a:p>
-                      <a:pPr lvl="0" indent="0" marL="0">
+                      <a:pPr marL="0" lvl="0" indent="0">
                         <a:buNone/>
                       </a:pPr>
                       <a:r>
-                        <a:rPr/>
                         <a:t>Socket.dev</a:t>
                       </a:r>
                     </a:p>
                   </a:txBody>
+                  <a:tcPr/>
                 </a:tc>
                 <a:tc>
                   <a:txBody>
                     <a:bodyPr/>
                     <a:lstStyle/>
                     <a:p>
-                      <a:pPr lvl="0" indent="0" marL="0">
+                      <a:pPr marL="0" lvl="0" indent="0">
                         <a:buNone/>
                       </a:pPr>
                       <a:r>
-                        <a:rPr/>
                         <a:t>Detects supply-chain attacks in new packages</a:t>
                       </a:r>
                     </a:p>
                   </a:txBody>
+                  <a:tcPr/>
                 </a:tc>
+                <a:extLst>
+                  <a:ext uri="{0D108BD9-81ED-4DB2-BD59-A6C34878D82A}">
+                    <a16:rowId xmlns:a16="http://schemas.microsoft.com/office/drawing/2014/main" val="10004"/>
+                  </a:ext>
+                </a:extLst>
               </a:tr>
             </a:tbl>
           </a:graphicData>
@@ -13420,6 +14981,9 @@
       </p:graphicFrame>
     </p:spTree>
   </p:cSld>
+  <p:clrMapOvr>
+    <a:masterClrMapping/>
+  </p:clrMapOvr>
 </p:sld>
 </file>
 
@@ -13455,7 +15019,7 @@
           <a:bodyPr/>
           <a:lstStyle/>
           <a:p>
-            <a:pPr lvl="0" indent="0" marL="0">
+            <a:pPr marL="0" lvl="0" indent="0">
               <a:buNone/>
             </a:pPr>
             <a:r>
@@ -13463,7 +15027,6 @@
               <a:t>Rule:</a:t>
             </a:r>
             <a:r>
-              <a:rPr/>
               <a:t> Run </a:t>
             </a:r>
             <a:r>
@@ -13473,7 +15036,6 @@
               <a:t>npm audit</a:t>
             </a:r>
             <a:r>
-              <a:rPr/>
               <a:t> before every deploy. Zero critical/high vulnerabilities in production.</a:t>
             </a:r>
           </a:p>
@@ -13481,6 +15043,9 @@
       </p:sp>
     </p:spTree>
   </p:cSld>
+  <p:clrMapOvr>
+    <a:masterClrMapping/>
+  </p:clrMapOvr>
 </p:sld>
 </file>
 
@@ -13513,10 +15078,12 @@
         </p:nvSpPr>
         <p:spPr/>
         <p:txBody>
-          <a:bodyPr/>
+          <a:bodyPr>
+            <a:normAutofit fontScale="92500" lnSpcReduction="10000"/>
+          </a:bodyPr>
           <a:lstStyle/>
           <a:p>
-            <a:pPr lvl="0" indent="0" marL="0">
+            <a:pPr marL="0" lvl="0" indent="0">
               <a:spcBef>
                 <a:spcPts val="3000"/>
               </a:spcBef>
@@ -13547,14 +15114,12 @@
               <a:t>Always commit your lock file</a:t>
             </a:r>
             <a:r>
-              <a:rPr/>
               <a:t> — it pins exact dependency versions</a:t>
             </a:r>
           </a:p>
           <a:p>
             <a:pPr lvl="0"/>
             <a:r>
-              <a:rPr/>
               <a:t>Without it, </a:t>
             </a:r>
             <a:r>
@@ -13564,7 +15129,6 @@
               <a:t>npm install</a:t>
             </a:r>
             <a:r>
-              <a:rPr/>
               <a:t> on the server may pull different (possibly vulnerable) versions</a:t>
             </a:r>
           </a:p>
@@ -13577,7 +15141,6 @@
               <a:t>npm ci</a:t>
             </a:r>
             <a:r>
-              <a:rPr/>
               <a:t> (not </a:t>
             </a:r>
             <a:r>
@@ -13587,7 +15150,6 @@
               <a:t>npm install</a:t>
             </a:r>
             <a:r>
-              <a:rPr/>
               <a:t>) in CI/CD — installs exactly what the lock file specifies</a:t>
             </a:r>
           </a:p>
@@ -13595,6 +15157,9 @@
       </p:sp>
     </p:spTree>
   </p:cSld>
+  <p:clrMapOvr>
+    <a:masterClrMapping/>
+  </p:clrMapOvr>
 </p:sld>
 </file>
 
@@ -13630,11 +15195,10 @@
           <a:bodyPr/>
           <a:lstStyle/>
           <a:p>
-            <a:pPr lvl="0" indent="0" marL="0">
+            <a:pPr marL="0" lvl="0" indent="0">
               <a:buNone/>
             </a:pPr>
             <a:r>
-              <a:rPr/>
               <a:t>Part 8: Performance &amp; Reliability</a:t>
             </a:r>
           </a:p>
@@ -13642,6 +15206,9 @@
       </p:sp>
     </p:spTree>
   </p:cSld>
+  <p:clrMapOvr>
+    <a:masterClrMapping/>
+  </p:clrMapOvr>
 </p:sld>
 </file>
 
@@ -13672,23 +15239,43 @@
             <p:ph type="title"/>
           </p:nvPr>
         </p:nvSpPr>
-        <p:spPr/>
+        <p:spPr>
+          <a:xfrm>
+            <a:off x="365760" y="1554719"/>
+            <a:ext cx="8229600" cy="857250"/>
+          </a:xfrm>
+        </p:spPr>
         <p:txBody>
-          <a:bodyPr/>
+          <a:bodyPr>
+            <a:normAutofit fontScale="90000"/>
+          </a:bodyPr>
           <a:lstStyle/>
           <a:p>
-            <a:pPr lvl="0" indent="0" marL="0">
+            <a:pPr marL="0" lvl="0" indent="0">
               <a:buNone/>
             </a:pPr>
             <a:r>
-              <a:rPr/>
+              <a:rPr dirty="0"/>
               <a:t>Part 1: What Is Hardening?</a:t>
             </a:r>
+            <a:br>
+              <a:rPr lang="en-US" dirty="0"/>
+            </a:br>
+            <a:br>
+              <a:rPr lang="en-US" dirty="0"/>
+            </a:br>
+            <a:br>
+              <a:rPr lang="en-US" dirty="0"/>
+            </a:br>
+            <a:endParaRPr dirty="0"/>
           </a:p>
         </p:txBody>
       </p:sp>
     </p:spTree>
   </p:cSld>
+  <p:clrMapOvr>
+    <a:masterClrMapping/>
+  </p:clrMapOvr>
 </p:sld>
 </file>
 
@@ -13716,7 +15303,7 @@
             <a:spLocks noGrp="1"/>
           </p:cNvSpPr>
           <p:nvPr>
-            <p:ph idx="2" sz="half" type="body"/>
+            <p:ph type="body" sz="half" idx="2"/>
           </p:nvPr>
         </p:nvSpPr>
         <p:spPr/>
@@ -13724,7 +15311,7 @@
           <a:bodyPr/>
           <a:lstStyle/>
           <a:p>
-            <a:pPr lvl="0" indent="0" marL="0">
+            <a:pPr marL="0" lvl="0" indent="0">
               <a:spcBef>
                 <a:spcPts val="3000"/>
               </a:spcBef>
@@ -13749,7 +15336,7 @@
         </p:nvGraphicFramePr>
         <p:xfrm>
           <a:off x="3568700" y="203200"/>
-          <a:ext cx="5105400" cy="4381500"/>
+          <a:ext cx="5105400" cy="3817620"/>
         </p:xfrm>
         <a:graphic>
           <a:graphicData uri="http://schemas.openxmlformats.org/drawingml/2006/table">
@@ -13758,8 +15345,20 @@
                 <a:tableStyleId>{5C22544A-7EE6-4342-B048-85BDC9FD1C3A}</a:tableStyleId>
               </a:tblPr>
               <a:tblGrid>
-                <a:gridCol w="2552700"/>
-                <a:gridCol w="2552700"/>
+                <a:gridCol w="2552700">
+                  <a:extLst>
+                    <a:ext uri="{9D8B030D-6E8A-4147-A177-3AD203B41FA5}">
+                      <a16:colId xmlns:a16="http://schemas.microsoft.com/office/drawing/2014/main" val="20000"/>
+                    </a:ext>
+                  </a:extLst>
+                </a:gridCol>
+                <a:gridCol w="2552700">
+                  <a:extLst>
+                    <a:ext uri="{9D8B030D-6E8A-4147-A177-3AD203B41FA5}">
+                      <a16:colId xmlns:a16="http://schemas.microsoft.com/office/drawing/2014/main" val="20001"/>
+                    </a:ext>
+                  </a:extLst>
+                </a:gridCol>
               </a:tblGrid>
               <a:tr h="0">
                 <a:tc>
@@ -13767,11 +15366,10 @@
                     <a:bodyPr/>
                     <a:lstStyle/>
                     <a:p>
-                      <a:pPr lvl="0" indent="0" marL="0">
+                      <a:pPr marL="0" lvl="0" indent="0">
                         <a:buNone/>
                       </a:pPr>
                       <a:r>
-                        <a:rPr/>
                         <a:t>Area</a:t>
                       </a:r>
                     </a:p>
@@ -13783,17 +15381,21 @@
                     <a:bodyPr/>
                     <a:lstStyle/>
                     <a:p>
-                      <a:pPr lvl="0" indent="0" marL="0">
+                      <a:pPr marL="0" lvl="0" indent="0">
                         <a:buNone/>
                       </a:pPr>
                       <a:r>
-                        <a:rPr/>
                         <a:t>Action</a:t>
                       </a:r>
                     </a:p>
                   </a:txBody>
                   <a:tcPr/>
                 </a:tc>
+                <a:extLst>
+                  <a:ext uri="{0D108BD9-81ED-4DB2-BD59-A6C34878D82A}">
+                    <a16:rowId xmlns:a16="http://schemas.microsoft.com/office/drawing/2014/main" val="10000"/>
+                  </a:ext>
+                </a:extLst>
               </a:tr>
               <a:tr h="0">
                 <a:tc>
@@ -13801,7 +15403,7 @@
                     <a:bodyPr/>
                     <a:lstStyle/>
                     <a:p>
-                      <a:pPr lvl="0" indent="0" marL="0">
+                      <a:pPr marL="0" lvl="0" indent="0">
                         <a:buNone/>
                       </a:pPr>
                       <a:r>
@@ -13810,22 +15412,28 @@
                       </a:r>
                     </a:p>
                   </a:txBody>
+                  <a:tcPr/>
                 </a:tc>
                 <a:tc>
                   <a:txBody>
                     <a:bodyPr/>
                     <a:lstStyle/>
                     <a:p>
-                      <a:pPr lvl="0" indent="0" marL="0">
+                      <a:pPr marL="0" lvl="0" indent="0">
                         <a:buNone/>
                       </a:pPr>
                       <a:r>
-                        <a:rPr/>
                         <a:t>Serve via CDN (CloudFront, Vercel Edge)</a:t>
                       </a:r>
                     </a:p>
                   </a:txBody>
+                  <a:tcPr/>
                 </a:tc>
+                <a:extLst>
+                  <a:ext uri="{0D108BD9-81ED-4DB2-BD59-A6C34878D82A}">
+                    <a16:rowId xmlns:a16="http://schemas.microsoft.com/office/drawing/2014/main" val="10001"/>
+                  </a:ext>
+                </a:extLst>
               </a:tr>
               <a:tr h="0">
                 <a:tc>
@@ -13833,7 +15441,7 @@
                     <a:bodyPr/>
                     <a:lstStyle/>
                     <a:p>
-                      <a:pPr lvl="0" indent="0" marL="0">
+                      <a:pPr marL="0" lvl="0" indent="0">
                         <a:buNone/>
                       </a:pPr>
                       <a:r>
@@ -13842,17 +15450,17 @@
                       </a:r>
                     </a:p>
                   </a:txBody>
+                  <a:tcPr/>
                 </a:tc>
                 <a:tc>
                   <a:txBody>
                     <a:bodyPr/>
                     <a:lstStyle/>
                     <a:p>
-                      <a:pPr lvl="0" indent="0" marL="0">
+                      <a:pPr marL="0" lvl="0" indent="0">
                         <a:buNone/>
                       </a:pPr>
                       <a:r>
-                        <a:rPr/>
                         <a:t>Use Next.js </a:t>
                       </a:r>
                       <a:r>
@@ -13862,12 +15470,17 @@
                         <a:t>&lt;Image&gt;</a:t>
                       </a:r>
                       <a:r>
-                        <a:rPr/>
                         <a:t>, WebP format, lazy loading</a:t>
                       </a:r>
                     </a:p>
                   </a:txBody>
+                  <a:tcPr/>
                 </a:tc>
+                <a:extLst>
+                  <a:ext uri="{0D108BD9-81ED-4DB2-BD59-A6C34878D82A}">
+                    <a16:rowId xmlns:a16="http://schemas.microsoft.com/office/drawing/2014/main" val="10002"/>
+                  </a:ext>
+                </a:extLst>
               </a:tr>
               <a:tr h="0">
                 <a:tc>
@@ -13875,7 +15488,7 @@
                     <a:bodyPr/>
                     <a:lstStyle/>
                     <a:p>
-                      <a:pPr lvl="0" indent="0" marL="0">
+                      <a:pPr marL="0" lvl="0" indent="0">
                         <a:buNone/>
                       </a:pPr>
                       <a:r>
@@ -13884,22 +15497,28 @@
                       </a:r>
                     </a:p>
                   </a:txBody>
+                  <a:tcPr/>
                 </a:tc>
                 <a:tc>
                   <a:txBody>
                     <a:bodyPr/>
                     <a:lstStyle/>
                     <a:p>
-                      <a:pPr lvl="0" indent="0" marL="0">
+                      <a:pPr marL="0" lvl="0" indent="0">
                         <a:buNone/>
                       </a:pPr>
                       <a:r>
-                        <a:rPr/>
                         <a:t>Cache with Redis (cache-aside, TTL)</a:t>
                       </a:r>
                     </a:p>
                   </a:txBody>
+                  <a:tcPr/>
                 </a:tc>
+                <a:extLst>
+                  <a:ext uri="{0D108BD9-81ED-4DB2-BD59-A6C34878D82A}">
+                    <a16:rowId xmlns:a16="http://schemas.microsoft.com/office/drawing/2014/main" val="10003"/>
+                  </a:ext>
+                </a:extLst>
               </a:tr>
               <a:tr h="0">
                 <a:tc>
@@ -13907,7 +15526,7 @@
                     <a:bodyPr/>
                     <a:lstStyle/>
                     <a:p>
-                      <a:pPr lvl="0" indent="0" marL="0">
+                      <a:pPr marL="0" lvl="0" indent="0">
                         <a:buNone/>
                       </a:pPr>
                       <a:r>
@@ -13916,22 +15535,28 @@
                       </a:r>
                     </a:p>
                   </a:txBody>
+                  <a:tcPr/>
                 </a:tc>
                 <a:tc>
                   <a:txBody>
                     <a:bodyPr/>
                     <a:lstStyle/>
                     <a:p>
-                      <a:pPr lvl="0" indent="0" marL="0">
+                      <a:pPr marL="0" lvl="0" indent="0">
                         <a:buNone/>
                       </a:pPr>
                       <a:r>
-                        <a:rPr/>
                         <a:t>Add indexes on frequently queried fields</a:t>
                       </a:r>
                     </a:p>
                   </a:txBody>
+                  <a:tcPr/>
                 </a:tc>
+                <a:extLst>
+                  <a:ext uri="{0D108BD9-81ED-4DB2-BD59-A6C34878D82A}">
+                    <a16:rowId xmlns:a16="http://schemas.microsoft.com/office/drawing/2014/main" val="10004"/>
+                  </a:ext>
+                </a:extLst>
               </a:tr>
               <a:tr h="0">
                 <a:tc>
@@ -13939,7 +15564,7 @@
                     <a:bodyPr/>
                     <a:lstStyle/>
                     <a:p>
-                      <a:pPr lvl="0" indent="0" marL="0">
+                      <a:pPr marL="0" lvl="0" indent="0">
                         <a:buNone/>
                       </a:pPr>
                       <a:r>
@@ -13948,22 +15573,28 @@
                       </a:r>
                     </a:p>
                   </a:txBody>
+                  <a:tcPr/>
                 </a:tc>
                 <a:tc>
                   <a:txBody>
                     <a:bodyPr/>
                     <a:lstStyle/>
                     <a:p>
-                      <a:pPr lvl="0" indent="0" marL="0">
+                      <a:pPr marL="0" lvl="0" indent="0">
                         <a:buNone/>
                       </a:pPr>
                       <a:r>
-                        <a:rPr/>
                         <a:t>Code splitting, tree shaking, dynamic imports</a:t>
                       </a:r>
                     </a:p>
                   </a:txBody>
+                  <a:tcPr/>
                 </a:tc>
+                <a:extLst>
+                  <a:ext uri="{0D108BD9-81ED-4DB2-BD59-A6C34878D82A}">
+                    <a16:rowId xmlns:a16="http://schemas.microsoft.com/office/drawing/2014/main" val="10005"/>
+                  </a:ext>
+                </a:extLst>
               </a:tr>
               <a:tr h="0">
                 <a:tc>
@@ -13971,7 +15602,7 @@
                     <a:bodyPr/>
                     <a:lstStyle/>
                     <a:p>
-                      <a:pPr lvl="0" indent="0" marL="0">
+                      <a:pPr marL="0" lvl="0" indent="0">
                         <a:buNone/>
                       </a:pPr>
                       <a:r>
@@ -13980,17 +15611,17 @@
                       </a:r>
                     </a:p>
                   </a:txBody>
+                  <a:tcPr/>
                 </a:tc>
                 <a:tc>
                   <a:txBody>
                     <a:bodyPr/>
                     <a:lstStyle/>
                     <a:p>
-                      <a:pPr lvl="0" indent="0" marL="0">
+                      <a:pPr marL="0" lvl="0" indent="0">
                         <a:buNone/>
                       </a:pPr>
                       <a:r>
-                        <a:rPr/>
                         <a:t>Enable gzip/brotli (</a:t>
                       </a:r>
                       <a:r>
@@ -14000,12 +15631,17 @@
                         <a:t>compression</a:t>
                       </a:r>
                       <a:r>
-                        <a:rPr/>
                         <a:t> middleware)</a:t>
                       </a:r>
                     </a:p>
                   </a:txBody>
+                  <a:tcPr/>
                 </a:tc>
+                <a:extLst>
+                  <a:ext uri="{0D108BD9-81ED-4DB2-BD59-A6C34878D82A}">
+                    <a16:rowId xmlns:a16="http://schemas.microsoft.com/office/drawing/2014/main" val="10006"/>
+                  </a:ext>
+                </a:extLst>
               </a:tr>
               <a:tr h="0">
                 <a:tc>
@@ -14013,7 +15649,7 @@
                     <a:bodyPr/>
                     <a:lstStyle/>
                     <a:p>
-                      <a:pPr lvl="0" indent="0" marL="0">
+                      <a:pPr marL="0" lvl="0" indent="0">
                         <a:buNone/>
                       </a:pPr>
                       <a:r>
@@ -14022,22 +15658,28 @@
                       </a:r>
                     </a:p>
                   </a:txBody>
+                  <a:tcPr/>
                 </a:tc>
                 <a:tc>
                   <a:txBody>
                     <a:bodyPr/>
                     <a:lstStyle/>
                     <a:p>
-                      <a:pPr lvl="0" indent="0" marL="0">
+                      <a:pPr marL="0" lvl="0" indent="0">
                         <a:buNone/>
                       </a:pPr>
                       <a:r>
-                        <a:rPr/>
                         <a:t>Reuse DB connections (critical for Lambda)</a:t>
                       </a:r>
                     </a:p>
                   </a:txBody>
+                  <a:tcPr/>
                 </a:tc>
+                <a:extLst>
+                  <a:ext uri="{0D108BD9-81ED-4DB2-BD59-A6C34878D82A}">
+                    <a16:rowId xmlns:a16="http://schemas.microsoft.com/office/drawing/2014/main" val="10007"/>
+                  </a:ext>
+                </a:extLst>
               </a:tr>
             </a:tbl>
           </a:graphicData>
@@ -14045,6 +15687,9 @@
       </p:graphicFrame>
     </p:spTree>
   </p:cSld>
+  <p:clrMapOvr>
+    <a:masterClrMapping/>
+  </p:clrMapOvr>
 </p:sld>
 </file>
 
@@ -14222,6 +15867,9 @@
       </p:sp>
     </p:spTree>
   </p:cSld>
+  <p:clrMapOvr>
+    <a:masterClrMapping/>
+  </p:clrMapOvr>
 </p:sld>
 </file>
 
@@ -14254,10 +15902,12 @@
         </p:nvSpPr>
         <p:spPr/>
         <p:txBody>
-          <a:bodyPr/>
+          <a:bodyPr>
+            <a:normAutofit fontScale="62500" lnSpcReduction="20000"/>
+          </a:bodyPr>
           <a:lstStyle/>
           <a:p>
-            <a:pPr lvl="0" indent="0" marL="0">
+            <a:pPr marL="0" lvl="0" indent="0">
               <a:spcBef>
                 <a:spcPts val="3000"/>
               </a:spcBef>
@@ -14941,7 +16591,7 @@
             </a:r>
           </a:p>
           <a:p>
-            <a:pPr lvl="0" indent="0" marL="0">
+            <a:pPr marL="0" lvl="0" indent="0">
               <a:buNone/>
             </a:pPr>
             <a:r>
@@ -14949,7 +16599,6 @@
               <a:t>Why:</a:t>
             </a:r>
             <a:r>
-              <a:rPr/>
               <a:t> Stack traces reveal file paths, framework versions, and internal logic — information that helps attackers.</a:t>
             </a:r>
           </a:p>
@@ -14957,6 +16606,9 @@
       </p:sp>
     </p:spTree>
   </p:cSld>
+  <p:clrMapOvr>
+    <a:masterClrMapping/>
+  </p:clrMapOvr>
 </p:sld>
 </file>
 
@@ -14989,10 +16641,12 @@
         </p:nvSpPr>
         <p:spPr/>
         <p:txBody>
-          <a:bodyPr/>
+          <a:bodyPr>
+            <a:normAutofit fontScale="55000" lnSpcReduction="20000"/>
+          </a:bodyPr>
           <a:lstStyle/>
           <a:p>
-            <a:pPr lvl="0" indent="0" marL="0">
+            <a:pPr marL="0" lvl="0" indent="0">
               <a:spcBef>
                 <a:spcPts val="3000"/>
               </a:spcBef>
@@ -15707,7 +17361,6 @@
           <a:p>
             <a:pPr lvl="0"/>
             <a:r>
-              <a:rPr/>
               <a:t>Set </a:t>
             </a:r>
             <a:r>
@@ -15715,14 +17368,12 @@
               <a:t>timeouts</a:t>
             </a:r>
             <a:r>
-              <a:rPr/>
               <a:t> on all external calls (DB, APIs, Redis)</a:t>
             </a:r>
           </a:p>
           <a:p>
             <a:pPr lvl="0"/>
             <a:r>
-              <a:rPr/>
               <a:t>Have </a:t>
             </a:r>
             <a:r>
@@ -15730,14 +17381,12 @@
               <a:t>fallback</a:t>
             </a:r>
             <a:r>
-              <a:rPr/>
               <a:t> behavior when dependencies are down</a:t>
             </a:r>
           </a:p>
           <a:p>
             <a:pPr lvl="0"/>
             <a:r>
-              <a:rPr/>
               <a:t>Use </a:t>
             </a:r>
             <a:r>
@@ -15745,7 +17394,6 @@
               <a:t>health check</a:t>
             </a:r>
             <a:r>
-              <a:rPr/>
               <a:t> endpoints (</a:t>
             </a:r>
             <a:r>
@@ -15755,7 +17403,6 @@
               <a:t>/api/health</a:t>
             </a:r>
             <a:r>
-              <a:rPr/>
               <a:t>) for monitoring</a:t>
             </a:r>
           </a:p>
@@ -15763,6 +17410,9 @@
       </p:sp>
     </p:spTree>
   </p:cSld>
+  <p:clrMapOvr>
+    <a:masterClrMapping/>
+  </p:clrMapOvr>
 </p:sld>
 </file>
 
@@ -15798,11 +17448,10 @@
           <a:bodyPr/>
           <a:lstStyle/>
           <a:p>
-            <a:pPr lvl="0" indent="0" marL="0">
+            <a:pPr marL="0" lvl="0" indent="0">
               <a:buNone/>
             </a:pPr>
             <a:r>
-              <a:rPr/>
               <a:t>Part 9: Monitoring &amp; Observability</a:t>
             </a:r>
           </a:p>
@@ -15810,6 +17459,9 @@
       </p:sp>
     </p:spTree>
   </p:cSld>
+  <p:clrMapOvr>
+    <a:masterClrMapping/>
+  </p:clrMapOvr>
 </p:sld>
 </file>
 
@@ -15840,166 +17492,202 @@
             <p:ph idx="1"/>
           </p:nvPr>
         </p:nvSpPr>
-        <p:spPr/>
+        <p:spPr>
+          <a:xfrm>
+            <a:off x="457200" y="1200151"/>
+            <a:ext cx="2502568" cy="3394472"/>
+          </a:xfrm>
+        </p:spPr>
         <p:txBody>
-          <a:bodyPr/>
+          <a:bodyPr>
+            <a:normAutofit/>
+          </a:bodyPr>
           <a:lstStyle/>
           <a:p>
-            <a:pPr lvl="0" indent="0" marL="0">
+            <a:pPr marL="0" lvl="0" indent="0">
               <a:spcBef>
                 <a:spcPts val="3000"/>
               </a:spcBef>
               <a:buNone/>
             </a:pPr>
             <a:r>
-              <a:rPr b="1"/>
+              <a:rPr sz="800" b="1" dirty="0"/>
               <a:t>The Three Pillars</a:t>
             </a:r>
           </a:p>
           <a:p>
-            <a:pPr lvl="0" indent="0" marL="0">
+            <a:pPr marL="0" lvl="0" indent="0">
               <a:spcBef>
                 <a:spcPts val="3000"/>
               </a:spcBef>
               <a:buNone/>
             </a:pPr>
             <a:r>
-              <a:rPr b="1"/>
+              <a:rPr sz="2000" b="1" dirty="0"/>
               <a:t>Logs</a:t>
             </a:r>
           </a:p>
           <a:p>
-            <a:pPr lvl="0" indent="0" marL="0">
+            <a:pPr marL="0" lvl="0" indent="0">
               <a:buNone/>
             </a:pPr>
             <a:r>
-              <a:rPr i="1"/>
+              <a:rPr sz="1600" i="1" dirty="0"/>
               <a:t>What happened?</a:t>
             </a:r>
           </a:p>
           <a:p>
             <a:pPr lvl="0"/>
             <a:r>
-              <a:rPr/>
+              <a:rPr sz="1600" dirty="0"/>
               <a:t>Structured JSON logging</a:t>
             </a:r>
           </a:p>
           <a:p>
             <a:pPr lvl="0"/>
             <a:r>
-              <a:rPr/>
+              <a:rPr sz="1600" dirty="0"/>
               <a:t>Request ID correlation</a:t>
             </a:r>
           </a:p>
           <a:p>
             <a:pPr lvl="0"/>
             <a:r>
-              <a:rPr/>
+              <a:rPr sz="1600" dirty="0"/>
               <a:t>Don’t log sensitive data (passwords, tokens, PII)</a:t>
             </a:r>
           </a:p>
           <a:p>
             <a:pPr lvl="0"/>
             <a:r>
-              <a:rPr/>
+              <a:rPr sz="1600" dirty="0"/>
               <a:t>Centralize (CloudWatch, ELK, Datadog)</a:t>
             </a:r>
           </a:p>
-          <a:p>
-            <a:pPr lvl="0" indent="0" marL="0">
+        </p:txBody>
+      </p:sp>
+      <p:sp>
+        <p:nvSpPr>
+          <p:cNvPr id="4" name="TextBox 3">
+            <a:extLst>
+              <a:ext uri="{FF2B5EF4-FFF2-40B4-BE49-F238E27FC236}">
+                <a16:creationId xmlns:a16="http://schemas.microsoft.com/office/drawing/2014/main" id="{EE481053-74F9-F137-479B-C8170D418BE0}"/>
+              </a:ext>
+            </a:extLst>
+          </p:cNvPr>
+          <p:cNvSpPr txBox="1"/>
+          <p:nvPr/>
+        </p:nvSpPr>
+        <p:spPr>
+          <a:xfrm>
+            <a:off x="4339389" y="906849"/>
+            <a:ext cx="4572000" cy="3801041"/>
+          </a:xfrm>
+          <a:prstGeom prst="rect">
+            <a:avLst/>
+          </a:prstGeom>
+          <a:noFill/>
+        </p:spPr>
+        <p:txBody>
+          <a:bodyPr wrap="square">
+            <a:spAutoFit/>
+          </a:bodyPr>
+          <a:lstStyle/>
+          <a:p>
+            <a:pPr marL="0" lvl="0" indent="0">
               <a:spcBef>
                 <a:spcPts val="3000"/>
               </a:spcBef>
               <a:buNone/>
             </a:pPr>
             <a:r>
-              <a:rPr b="1"/>
+              <a:rPr lang="en-US" sz="1800" b="1" dirty="0"/>
               <a:t>Metrics</a:t>
             </a:r>
           </a:p>
           <a:p>
-            <a:pPr lvl="0" indent="0" marL="0">
+            <a:pPr marL="0" lvl="0" indent="0">
               <a:buNone/>
             </a:pPr>
             <a:r>
-              <a:rPr i="1"/>
+              <a:rPr lang="en-US" sz="1800" i="1" dirty="0"/>
               <a:t>How is it performing?</a:t>
             </a:r>
           </a:p>
           <a:p>
             <a:pPr lvl="0"/>
             <a:r>
-              <a:rPr/>
+              <a:rPr lang="en-US" sz="1800" dirty="0"/>
               <a:t>Request rate &amp; error rate</a:t>
             </a:r>
           </a:p>
           <a:p>
             <a:pPr lvl="0"/>
             <a:r>
-              <a:rPr/>
+              <a:rPr lang="en-US" sz="1800" dirty="0"/>
               <a:t>Response time (p50, p95, p99)</a:t>
             </a:r>
           </a:p>
           <a:p>
             <a:pPr lvl="0"/>
             <a:r>
-              <a:rPr/>
+              <a:rPr lang="en-US" sz="1800" dirty="0"/>
               <a:t>CPU / memory usage</a:t>
             </a:r>
           </a:p>
           <a:p>
             <a:pPr lvl="0"/>
             <a:r>
-              <a:rPr/>
+              <a:rPr lang="en-US" sz="1800" dirty="0"/>
               <a:t>Cache hit ratio</a:t>
             </a:r>
           </a:p>
           <a:p>
-            <a:pPr lvl="0" indent="0" marL="0">
+            <a:pPr marL="0" lvl="0" indent="0">
               <a:spcBef>
                 <a:spcPts val="3000"/>
               </a:spcBef>
               <a:buNone/>
             </a:pPr>
             <a:r>
-              <a:rPr b="1"/>
+              <a:rPr lang="en-US" sz="1800" b="1" dirty="0"/>
               <a:t>Traces</a:t>
             </a:r>
           </a:p>
           <a:p>
-            <a:pPr lvl="0" indent="0" marL="0">
+            <a:pPr marL="0" lvl="0" indent="0">
               <a:buNone/>
             </a:pPr>
             <a:r>
-              <a:rPr i="1"/>
+              <a:rPr lang="en-US" sz="1800" i="1" dirty="0"/>
               <a:t>Where is time spent?</a:t>
             </a:r>
           </a:p>
           <a:p>
             <a:pPr lvl="0"/>
             <a:r>
-              <a:rPr/>
+              <a:rPr lang="en-US" sz="1800" dirty="0"/>
               <a:t>End-to-end request flow</a:t>
             </a:r>
           </a:p>
           <a:p>
             <a:pPr lvl="0"/>
             <a:r>
-              <a:rPr/>
+              <a:rPr lang="en-US" sz="1800" dirty="0"/>
               <a:t>Per-service latency breakdown</a:t>
             </a:r>
           </a:p>
           <a:p>
             <a:pPr lvl="0"/>
             <a:r>
-              <a:rPr/>
+              <a:rPr lang="en-US" sz="1800" dirty="0"/>
               <a:t>Identify bottlenecks</a:t>
             </a:r>
           </a:p>
           <a:p>
             <a:pPr lvl="0"/>
             <a:r>
-              <a:rPr/>
+              <a:rPr lang="en-US" sz="1800" dirty="0"/>
               <a:t>Critical for microservices</a:t>
             </a:r>
           </a:p>
@@ -16007,6 +17695,9 @@
       </p:sp>
     </p:spTree>
   </p:cSld>
+  <p:clrMapOvr>
+    <a:masterClrMapping/>
+  </p:clrMapOvr>
 </p:sld>
 </file>
 
@@ -16039,10 +17730,12 @@
         </p:nvSpPr>
         <p:spPr/>
         <p:txBody>
-          <a:bodyPr/>
+          <a:bodyPr>
+            <a:normAutofit fontScale="55000" lnSpcReduction="20000"/>
+          </a:bodyPr>
           <a:lstStyle/>
           <a:p>
-            <a:pPr lvl="0" indent="0" marL="0">
+            <a:pPr marL="0" lvl="0" indent="0">
               <a:spcBef>
                 <a:spcPts val="3000"/>
               </a:spcBef>
@@ -16546,7 +18239,7 @@
             </a:r>
           </a:p>
           <a:p>
-            <a:pPr lvl="0" indent="0" marL="0">
+            <a:pPr marL="0" lvl="0" indent="0">
               <a:buNone/>
             </a:pPr>
             <a:r>
@@ -16557,7 +18250,6 @@
           <a:p>
             <a:pPr lvl="0"/>
             <a:r>
-              <a:rPr/>
               <a:t>Searchable: </a:t>
             </a:r>
             <a:r>
@@ -16570,14 +18262,12 @@
           <a:p>
             <a:pPr lvl="0"/>
             <a:r>
-              <a:rPr/>
               <a:t>Parseable by log aggregation tools</a:t>
             </a:r>
           </a:p>
           <a:p>
             <a:pPr lvl="0"/>
             <a:r>
-              <a:rPr/>
               <a:t>Consistent format across all services</a:t>
             </a:r>
           </a:p>
@@ -16585,6 +18275,9 @@
       </p:sp>
     </p:spTree>
   </p:cSld>
+  <p:clrMapOvr>
+    <a:masterClrMapping/>
+  </p:clrMapOvr>
 </p:sld>
 </file>
 
@@ -16617,10 +18310,12 @@
         </p:nvSpPr>
         <p:spPr/>
         <p:txBody>
-          <a:bodyPr/>
+          <a:bodyPr>
+            <a:normAutofit fontScale="62500" lnSpcReduction="20000"/>
+          </a:bodyPr>
           <a:lstStyle/>
           <a:p>
-            <a:pPr lvl="0" indent="0" marL="0">
+            <a:pPr marL="0" lvl="0" indent="0">
               <a:spcBef>
                 <a:spcPts val="3000"/>
               </a:spcBef>
@@ -17549,11 +19244,10 @@
             </a:r>
           </a:p>
           <a:p>
-            <a:pPr lvl="0" indent="0" marL="0">
+            <a:pPr marL="0" lvl="0" indent="0">
               <a:buNone/>
             </a:pPr>
             <a:r>
-              <a:rPr/>
               <a:t>OWASP #9: </a:t>
             </a:r>
             <a:r>
@@ -17561,7 +19255,6 @@
               <a:t>Logging &amp; Monitoring Failures</a:t>
             </a:r>
             <a:r>
-              <a:rPr/>
               <a:t> — if you can’t detect a breach, you can’t respond to it.</a:t>
             </a:r>
           </a:p>
@@ -17569,6 +19262,9 @@
       </p:sp>
     </p:spTree>
   </p:cSld>
+  <p:clrMapOvr>
+    <a:masterClrMapping/>
+  </p:clrMapOvr>
 </p:sld>
 </file>
 
@@ -17604,11 +19300,10 @@
           <a:bodyPr/>
           <a:lstStyle/>
           <a:p>
-            <a:pPr lvl="0" indent="0" marL="0">
+            <a:pPr marL="0" lvl="0" indent="0">
               <a:buNone/>
             </a:pPr>
             <a:r>
-              <a:rPr/>
               <a:t>Part 10: Your Hardening Checklist</a:t>
             </a:r>
           </a:p>
@@ -17629,11 +19324,10 @@
           <a:bodyPr/>
           <a:lstStyle/>
           <a:p>
-            <a:pPr lvl="0" indent="0" marL="0">
+            <a:pPr marL="0" lvl="0" indent="0">
               <a:buNone/>
             </a:pPr>
             <a:r>
-              <a:rPr/>
               <a:t>For your capstone project</a:t>
             </a:r>
           </a:p>
@@ -17641,6 +19335,9 @@
       </p:sp>
     </p:spTree>
   </p:cSld>
+  <p:clrMapOvr>
+    <a:masterClrMapping/>
+  </p:clrMapOvr>
 </p:sld>
 </file>
 
@@ -17673,264 +19370,188 @@
         </p:nvSpPr>
         <p:spPr/>
         <p:txBody>
-          <a:bodyPr/>
+          <a:bodyPr>
+            <a:normAutofit fontScale="62500" lnSpcReduction="20000"/>
+          </a:bodyPr>
           <a:lstStyle/>
           <a:p>
-            <a:pPr lvl="0" indent="0" marL="0">
+            <a:pPr marL="0" lvl="0" indent="0">
               <a:spcBef>
                 <a:spcPts val="3000"/>
               </a:spcBef>
               <a:buNone/>
             </a:pPr>
             <a:r>
-              <a:rPr b="1"/>
+              <a:rPr b="1" dirty="0"/>
               <a:t>Pre-Deployment Checklist</a:t>
             </a:r>
           </a:p>
           <a:p>
-            <a:pPr lvl="0" indent="0" marL="0">
+            <a:pPr marL="0" lvl="0" indent="0">
               <a:spcBef>
                 <a:spcPts val="3000"/>
               </a:spcBef>
               <a:buNone/>
             </a:pPr>
             <a:r>
-              <a:rPr b="1"/>
+              <a:rPr b="1" dirty="0"/>
               <a:t>Security</a:t>
             </a:r>
           </a:p>
           <a:p>
             <a:pPr lvl="0"/>
             <a:r>
-              <a:rPr/>
+              <a:rPr dirty="0"/>
               <a:t>☐ All secrets in environment variables (not code)</a:t>
             </a:r>
           </a:p>
           <a:p>
             <a:pPr lvl="0"/>
             <a:r>
-              <a:rPr/>
+              <a:rPr dirty="0"/>
               <a:t>☐ </a:t>
             </a:r>
             <a:r>
-              <a:rPr>
+              <a:rPr dirty="0">
                 <a:latin typeface="Courier"/>
               </a:rPr>
               <a:t>.env</a:t>
             </a:r>
             <a:r>
-              <a:rPr/>
+              <a:rPr dirty="0"/>
               <a:t> in </a:t>
             </a:r>
             <a:r>
-              <a:rPr>
-                <a:latin typeface="Courier"/>
-              </a:rPr>
-              <a:t>.gitignore</a:t>
-            </a:r>
+              <a:rPr dirty="0">
+                <a:latin typeface="Courier"/>
+              </a:rPr>
+              <a:t>.</a:t>
+            </a:r>
+            <a:r>
+              <a:rPr dirty="0" err="1">
+                <a:latin typeface="Courier"/>
+              </a:rPr>
+              <a:t>gitignore</a:t>
+            </a:r>
+            <a:endParaRPr dirty="0">
+              <a:latin typeface="Courier"/>
+            </a:endParaRPr>
           </a:p>
           <a:p>
             <a:pPr lvl="0"/>
             <a:r>
-              <a:rPr/>
-              <a:t>☐ Passwords hashed with bcrypt/Argon2</a:t>
+              <a:rPr dirty="0"/>
+              <a:t>☐ Passwords hashed with </a:t>
+            </a:r>
+            <a:r>
+              <a:rPr dirty="0" err="1"/>
+              <a:t>bcrypt</a:t>
+            </a:r>
+            <a:r>
+              <a:rPr dirty="0"/>
+              <a:t>/Argon2</a:t>
             </a:r>
           </a:p>
           <a:p>
             <a:pPr lvl="0"/>
             <a:r>
-              <a:rPr/>
+              <a:rPr dirty="0"/>
               <a:t>☐ JWT tokens have short TTL</a:t>
             </a:r>
           </a:p>
           <a:p>
             <a:pPr lvl="0"/>
             <a:r>
-              <a:rPr/>
+              <a:rPr dirty="0"/>
               <a:t>☐ Every API route checks ownership (</a:t>
             </a:r>
             <a:r>
-              <a:rPr>
+              <a:rPr dirty="0" err="1">
                 <a:latin typeface="Courier"/>
               </a:rPr>
               <a:t>userId</a:t>
             </a:r>
             <a:r>
-              <a:rPr/>
+              <a:rPr dirty="0"/>
               <a:t> filter)</a:t>
             </a:r>
           </a:p>
           <a:p>
             <a:pPr lvl="0"/>
             <a:r>
-              <a:rPr/>
+              <a:rPr dirty="0"/>
               <a:t>☐ Input validated server-side</a:t>
             </a:r>
           </a:p>
           <a:p>
             <a:pPr lvl="0"/>
             <a:r>
-              <a:rPr/>
+              <a:rPr dirty="0"/>
               <a:t>☐ </a:t>
             </a:r>
             <a:r>
-              <a:rPr>
+              <a:rPr dirty="0">
                 <a:latin typeface="Courier"/>
               </a:rPr>
               <a:t>helmet()</a:t>
             </a:r>
             <a:r>
-              <a:rPr/>
+              <a:rPr dirty="0"/>
               <a:t> middleware enabled</a:t>
             </a:r>
           </a:p>
           <a:p>
             <a:pPr lvl="0"/>
             <a:r>
-              <a:rPr/>
+              <a:rPr dirty="0"/>
               <a:t>☐ CORS configured with specific origins</a:t>
             </a:r>
           </a:p>
           <a:p>
             <a:pPr lvl="0"/>
             <a:r>
-              <a:rPr/>
+              <a:rPr dirty="0"/>
               <a:t>☐ </a:t>
             </a:r>
             <a:r>
-              <a:rPr>
-                <a:latin typeface="Courier"/>
-              </a:rPr>
-              <a:t>npm audit</a:t>
-            </a:r>
-            <a:r>
-              <a:rPr/>
+              <a:rPr dirty="0" err="1">
+                <a:latin typeface="Courier"/>
+              </a:rPr>
+              <a:t>npm</a:t>
+            </a:r>
+            <a:r>
+              <a:rPr dirty="0">
+                <a:latin typeface="Courier"/>
+              </a:rPr>
+              <a:t> audit</a:t>
+            </a:r>
+            <a:r>
+              <a:rPr dirty="0"/>
               <a:t> shows zero critical vulnerabilities</a:t>
             </a:r>
           </a:p>
           <a:p>
             <a:pPr lvl="0"/>
             <a:r>
-              <a:rPr/>
-              <a:t>☐ HTTPS enabled (automatic on Vercel/CloudFront)</a:t>
-            </a:r>
-          </a:p>
-          <a:p>
-            <a:pPr lvl="0" indent="0" marL="0">
-              <a:spcBef>
-                <a:spcPts val="3000"/>
-              </a:spcBef>
-              <a:buNone/>
-            </a:pPr>
-            <a:r>
-              <a:rPr b="1"/>
-              <a:t>Reliability</a:t>
-            </a:r>
-          </a:p>
-          <a:p>
-            <a:pPr lvl="0"/>
-            <a:r>
-              <a:rPr/>
-              <a:t>☐ Error handler returns generic messages in prod</a:t>
-            </a:r>
-          </a:p>
-          <a:p>
-            <a:pPr lvl="0"/>
-            <a:r>
-              <a:rPr/>
-              <a:t>☐ Timeouts on all external calls</a:t>
-            </a:r>
-          </a:p>
-          <a:p>
-            <a:pPr lvl="0"/>
-            <a:r>
-              <a:rPr/>
-              <a:t>☐ Health check endpoint (</a:t>
-            </a:r>
-            <a:r>
-              <a:rPr>
-                <a:latin typeface="Courier"/>
-              </a:rPr>
-              <a:t>/api/health</a:t>
-            </a:r>
-            <a:r>
-              <a:rPr/>
-              <a:t>)</a:t>
-            </a:r>
-          </a:p>
-          <a:p>
-            <a:pPr lvl="0"/>
-            <a:r>
-              <a:rPr/>
-              <a:t>☐ Database connection pooling / caching</a:t>
-            </a:r>
-          </a:p>
-          <a:p>
-            <a:pPr lvl="0"/>
-            <a:r>
-              <a:rPr/>
-              <a:t>☐ Lock file committed</a:t>
-            </a:r>
-          </a:p>
-          <a:p>
-            <a:pPr lvl="0"/>
-            <a:r>
-              <a:rPr/>
-              <a:t>☐ </a:t>
-            </a:r>
-            <a:r>
-              <a:rPr>
-                <a:latin typeface="Courier"/>
-              </a:rPr>
-              <a:t>npm ci</a:t>
-            </a:r>
-            <a:r>
-              <a:rPr/>
-              <a:t> used in CI/CD (not </a:t>
-            </a:r>
-            <a:r>
-              <a:rPr>
-                <a:latin typeface="Courier"/>
-              </a:rPr>
-              <a:t>npm install</a:t>
-            </a:r>
-            <a:r>
-              <a:rPr/>
-              <a:t>)</a:t>
-            </a:r>
-          </a:p>
-          <a:p>
-            <a:pPr lvl="0"/>
-            <a:r>
-              <a:rPr/>
-              <a:t>☐ Compression middleware enabled</a:t>
-            </a:r>
-          </a:p>
-          <a:p>
-            <a:pPr lvl="0"/>
-            <a:r>
-              <a:rPr/>
-              <a:t>☐ Static assets served via CDN</a:t>
-            </a:r>
-          </a:p>
-          <a:p>
-            <a:pPr lvl="0"/>
-            <a:r>
-              <a:rPr/>
-              <a:t>☐ Structured logging (no sensitive data)</a:t>
-            </a:r>
-          </a:p>
-          <a:p>
-            <a:pPr lvl="0"/>
-            <a:r>
-              <a:rPr/>
-              <a:t>☐ README with setup and deploy instructions</a:t>
+              <a:rPr dirty="0"/>
+              <a:t>☐ HTTPS enabled (automatic on </a:t>
+            </a:r>
+            <a:r>
+              <a:rPr dirty="0" err="1"/>
+              <a:t>Vercel</a:t>
+            </a:r>
+            <a:r>
+              <a:rPr dirty="0"/>
+              <a:t>/CloudFront)</a:t>
             </a:r>
           </a:p>
         </p:txBody>
       </p:sp>
     </p:spTree>
   </p:cSld>
+  <p:clrMapOvr>
+    <a:masterClrMapping/>
+  </p:clrMapOvr>
 </p:sld>
 </file>
 
@@ -17958,7 +19579,7 @@
             <a:spLocks noGrp="1"/>
           </p:cNvSpPr>
           <p:nvPr>
-            <p:ph idx="2" sz="half" type="body"/>
+            <p:ph type="body" sz="half" idx="2"/>
           </p:nvPr>
         </p:nvSpPr>
         <p:spPr/>
@@ -17966,7 +19587,7 @@
           <a:bodyPr/>
           <a:lstStyle/>
           <a:p>
-            <a:pPr lvl="0" indent="0" marL="0">
+            <a:pPr marL="0" lvl="0" indent="0">
               <a:spcBef>
                 <a:spcPts val="3000"/>
               </a:spcBef>
@@ -17991,7 +19612,7 @@
         </p:nvGraphicFramePr>
         <p:xfrm>
           <a:off x="3568700" y="203200"/>
-          <a:ext cx="5105400" cy="4381500"/>
+          <a:ext cx="5105400" cy="2903220"/>
         </p:xfrm>
         <a:graphic>
           <a:graphicData uri="http://schemas.openxmlformats.org/drawingml/2006/table">
@@ -18000,8 +19621,20 @@
                 <a:tableStyleId>{5C22544A-7EE6-4342-B048-85BDC9FD1C3A}</a:tableStyleId>
               </a:tblPr>
               <a:tblGrid>
-                <a:gridCol w="2552700"/>
-                <a:gridCol w="2552700"/>
+                <a:gridCol w="2552700">
+                  <a:extLst>
+                    <a:ext uri="{9D8B030D-6E8A-4147-A177-3AD203B41FA5}">
+                      <a16:colId xmlns:a16="http://schemas.microsoft.com/office/drawing/2014/main" val="20000"/>
+                    </a:ext>
+                  </a:extLst>
+                </a:gridCol>
+                <a:gridCol w="2552700">
+                  <a:extLst>
+                    <a:ext uri="{9D8B030D-6E8A-4147-A177-3AD203B41FA5}">
+                      <a16:colId xmlns:a16="http://schemas.microsoft.com/office/drawing/2014/main" val="20001"/>
+                    </a:ext>
+                  </a:extLst>
+                </a:gridCol>
               </a:tblGrid>
               <a:tr h="0">
                 <a:tc>
@@ -18009,11 +19642,10 @@
                     <a:bodyPr/>
                     <a:lstStyle/>
                     <a:p>
-                      <a:pPr lvl="0" indent="0" marL="0">
+                      <a:pPr marL="0" lvl="0" indent="0">
                         <a:buNone/>
                       </a:pPr>
                       <a:r>
-                        <a:rPr/>
                         <a:t>Development</a:t>
                       </a:r>
                     </a:p>
@@ -18025,17 +19657,21 @@
                     <a:bodyPr/>
                     <a:lstStyle/>
                     <a:p>
-                      <a:pPr lvl="0" indent="0" marL="0">
+                      <a:pPr marL="0" lvl="0" indent="0">
                         <a:buNone/>
                       </a:pPr>
                       <a:r>
-                        <a:rPr/>
                         <a:t>Production</a:t>
                       </a:r>
                     </a:p>
                   </a:txBody>
                   <a:tcPr/>
                 </a:tc>
+                <a:extLst>
+                  <a:ext uri="{0D108BD9-81ED-4DB2-BD59-A6C34878D82A}">
+                    <a16:rowId xmlns:a16="http://schemas.microsoft.com/office/drawing/2014/main" val="10000"/>
+                  </a:ext>
+                </a:extLst>
               </a:tr>
               <a:tr h="0">
                 <a:tc>
@@ -18043,7 +19679,7 @@
                     <a:bodyPr/>
                     <a:lstStyle/>
                     <a:p>
-                      <a:pPr lvl="0" indent="0" marL="0">
+                      <a:pPr marL="0" lvl="0" indent="0">
                         <a:buNone/>
                       </a:pPr>
                       <a:r>
@@ -18053,27 +19689,32 @@
                         <a:t>localhost</a:t>
                       </a:r>
                       <a:r>
-                        <a:rPr/>
                         <a:t>, no HTTPS</a:t>
                       </a:r>
                     </a:p>
                   </a:txBody>
+                  <a:tcPr/>
                 </a:tc>
                 <a:tc>
                   <a:txBody>
                     <a:bodyPr/>
                     <a:lstStyle/>
                     <a:p>
-                      <a:pPr lvl="0" indent="0" marL="0">
+                      <a:pPr marL="0" lvl="0" indent="0">
                         <a:buNone/>
                       </a:pPr>
                       <a:r>
-                        <a:rPr/>
                         <a:t>Public internet, TLS required</a:t>
                       </a:r>
                     </a:p>
                   </a:txBody>
+                  <a:tcPr/>
                 </a:tc>
+                <a:extLst>
+                  <a:ext uri="{0D108BD9-81ED-4DB2-BD59-A6C34878D82A}">
+                    <a16:rowId xmlns:a16="http://schemas.microsoft.com/office/drawing/2014/main" val="10001"/>
+                  </a:ext>
+                </a:extLst>
               </a:tr>
               <a:tr h="0">
                 <a:tc>
@@ -18081,11 +19722,10 @@
                     <a:bodyPr/>
                     <a:lstStyle/>
                     <a:p>
-                      <a:pPr lvl="0" indent="0" marL="0">
+                      <a:pPr marL="0" lvl="0" indent="0">
                         <a:buNone/>
                       </a:pPr>
                       <a:r>
-                        <a:rPr/>
                         <a:t>Secrets in </a:t>
                       </a:r>
                       <a:r>
@@ -18095,27 +19735,32 @@
                         <a:t>.env</a:t>
                       </a:r>
                       <a:r>
-                        <a:rPr/>
                         <a:t> files</a:t>
                       </a:r>
                     </a:p>
                   </a:txBody>
+                  <a:tcPr/>
                 </a:tc>
                 <a:tc>
                   <a:txBody>
                     <a:bodyPr/>
                     <a:lstStyle/>
                     <a:p>
-                      <a:pPr lvl="0" indent="0" marL="0">
+                      <a:pPr marL="0" lvl="0" indent="0">
                         <a:buNone/>
                       </a:pPr>
                       <a:r>
-                        <a:rPr/>
                         <a:t>Secrets in vault / env management</a:t>
                       </a:r>
                     </a:p>
                   </a:txBody>
+                  <a:tcPr/>
                 </a:tc>
+                <a:extLst>
+                  <a:ext uri="{0D108BD9-81ED-4DB2-BD59-A6C34878D82A}">
+                    <a16:rowId xmlns:a16="http://schemas.microsoft.com/office/drawing/2014/main" val="10002"/>
+                  </a:ext>
+                </a:extLst>
               </a:tr>
               <a:tr h="0">
                 <a:tc>
@@ -18123,31 +19768,36 @@
                     <a:bodyPr/>
                     <a:lstStyle/>
                     <a:p>
-                      <a:pPr lvl="0" indent="0" marL="0">
+                      <a:pPr marL="0" lvl="0" indent="0">
                         <a:buNone/>
                       </a:pPr>
                       <a:r>
-                        <a:rPr/>
                         <a:t>Errors shown in browser</a:t>
                       </a:r>
                     </a:p>
                   </a:txBody>
+                  <a:tcPr/>
                 </a:tc>
                 <a:tc>
                   <a:txBody>
                     <a:bodyPr/>
                     <a:lstStyle/>
                     <a:p>
-                      <a:pPr lvl="0" indent="0" marL="0">
+                      <a:pPr marL="0" lvl="0" indent="0">
                         <a:buNone/>
                       </a:pPr>
                       <a:r>
-                        <a:rPr/>
                         <a:t>Errors logged, generic message to user</a:t>
                       </a:r>
                     </a:p>
                   </a:txBody>
+                  <a:tcPr/>
                 </a:tc>
+                <a:extLst>
+                  <a:ext uri="{0D108BD9-81ED-4DB2-BD59-A6C34878D82A}">
+                    <a16:rowId xmlns:a16="http://schemas.microsoft.com/office/drawing/2014/main" val="10003"/>
+                  </a:ext>
+                </a:extLst>
               </a:tr>
               <a:tr h="0">
                 <a:tc>
@@ -18155,31 +19805,36 @@
                     <a:bodyPr/>
                     <a:lstStyle/>
                     <a:p>
-                      <a:pPr lvl="0" indent="0" marL="0">
+                      <a:pPr marL="0" lvl="0" indent="0">
                         <a:buNone/>
                       </a:pPr>
                       <a:r>
-                        <a:rPr/>
                         <a:t>Single user (you)</a:t>
                       </a:r>
                     </a:p>
                   </a:txBody>
+                  <a:tcPr/>
                 </a:tc>
                 <a:tc>
                   <a:txBody>
                     <a:bodyPr/>
                     <a:lstStyle/>
                     <a:p>
-                      <a:pPr lvl="0" indent="0" marL="0">
+                      <a:pPr marL="0" lvl="0" indent="0">
                         <a:buNone/>
                       </a:pPr>
                       <a:r>
-                        <a:rPr/>
                         <a:t>Thousands of concurrent users</a:t>
                       </a:r>
                     </a:p>
                   </a:txBody>
+                  <a:tcPr/>
                 </a:tc>
+                <a:extLst>
+                  <a:ext uri="{0D108BD9-81ED-4DB2-BD59-A6C34878D82A}">
+                    <a16:rowId xmlns:a16="http://schemas.microsoft.com/office/drawing/2014/main" val="10004"/>
+                  </a:ext>
+                </a:extLst>
               </a:tr>
               <a:tr h="0">
                 <a:tc>
@@ -18187,31 +19842,36 @@
                     <a:bodyPr/>
                     <a:lstStyle/>
                     <a:p>
-                      <a:pPr lvl="0" indent="0" marL="0">
+                      <a:pPr marL="0" lvl="0" indent="0">
                         <a:buNone/>
                       </a:pPr>
                       <a:r>
-                        <a:rPr/>
                         <a:t>No attackers</a:t>
                       </a:r>
                     </a:p>
                   </a:txBody>
+                  <a:tcPr/>
                 </a:tc>
                 <a:tc>
                   <a:txBody>
                     <a:bodyPr/>
                     <a:lstStyle/>
                     <a:p>
-                      <a:pPr lvl="0" indent="0" marL="0">
+                      <a:pPr marL="0" lvl="0" indent="0">
                         <a:buNone/>
                       </a:pPr>
                       <a:r>
-                        <a:rPr/>
                         <a:t>Bots scanning within minutes of deploy</a:t>
                       </a:r>
                     </a:p>
                   </a:txBody>
+                  <a:tcPr/>
                 </a:tc>
+                <a:extLst>
+                  <a:ext uri="{0D108BD9-81ED-4DB2-BD59-A6C34878D82A}">
+                    <a16:rowId xmlns:a16="http://schemas.microsoft.com/office/drawing/2014/main" val="10005"/>
+                  </a:ext>
+                </a:extLst>
               </a:tr>
               <a:tr h="0">
                 <a:tc>
@@ -18219,31 +19879,36 @@
                     <a:bodyPr/>
                     <a:lstStyle/>
                     <a:p>
-                      <a:pPr lvl="0" indent="0" marL="0">
+                      <a:pPr marL="0" lvl="0" indent="0">
                         <a:buNone/>
                       </a:pPr>
                       <a:r>
-                        <a:rPr/>
                         <a:t>“It works on my machine”</a:t>
                       </a:r>
                     </a:p>
                   </a:txBody>
+                  <a:tcPr/>
                 </a:tc>
                 <a:tc>
                   <a:txBody>
                     <a:bodyPr/>
                     <a:lstStyle/>
                     <a:p>
-                      <a:pPr lvl="0" indent="0" marL="0">
+                      <a:pPr marL="0" lvl="0" indent="0">
                         <a:buNone/>
                       </a:pPr>
                       <a:r>
-                        <a:rPr/>
                         <a:t>Must work everywhere, all the time</a:t>
                       </a:r>
                     </a:p>
                   </a:txBody>
+                  <a:tcPr/>
                 </a:tc>
+                <a:extLst>
+                  <a:ext uri="{0D108BD9-81ED-4DB2-BD59-A6C34878D82A}">
+                    <a16:rowId xmlns:a16="http://schemas.microsoft.com/office/drawing/2014/main" val="10006"/>
+                  </a:ext>
+                </a:extLst>
               </a:tr>
             </a:tbl>
           </a:graphicData>
@@ -18251,6 +19916,9 @@
       </p:graphicFrame>
     </p:spTree>
   </p:cSld>
+  <p:clrMapOvr>
+    <a:masterClrMapping/>
+  </p:clrMapOvr>
 </p:sld>
 </file>
 
@@ -18278,7 +19946,7 @@
             <a:spLocks noGrp="1"/>
           </p:cNvSpPr>
           <p:nvPr>
-            <p:ph idx="2" sz="half" type="body"/>
+            <p:ph type="body" sz="half" idx="2"/>
           </p:nvPr>
         </p:nvSpPr>
         <p:spPr/>
@@ -18286,7 +19954,7 @@
           <a:bodyPr/>
           <a:lstStyle/>
           <a:p>
-            <a:pPr lvl="0" indent="0" marL="0">
+            <a:pPr marL="0" lvl="0" indent="0">
               <a:spcBef>
                 <a:spcPts val="3000"/>
               </a:spcBef>
@@ -18298,11 +19966,10 @@
             </a:r>
           </a:p>
           <a:p>
-            <a:pPr lvl="0" indent="0" marL="0">
+            <a:pPr marL="0" lvl="0" indent="0">
               <a:buNone/>
             </a:pPr>
             <a:r>
-              <a:rPr/>
               <a:t>Run these against your deployed app:</a:t>
             </a:r>
           </a:p>
@@ -18320,7 +19987,7 @@
         </p:nvGraphicFramePr>
         <p:xfrm>
           <a:off x="3568700" y="203200"/>
-          <a:ext cx="5105400" cy="4381500"/>
+          <a:ext cx="5105400" cy="3017520"/>
         </p:xfrm>
         <a:graphic>
           <a:graphicData uri="http://schemas.openxmlformats.org/drawingml/2006/table">
@@ -18329,9 +19996,27 @@
                 <a:tableStyleId>{5C22544A-7EE6-4342-B048-85BDC9FD1C3A}</a:tableStyleId>
               </a:tblPr>
               <a:tblGrid>
-                <a:gridCol w="1181100"/>
-                <a:gridCol w="2946400"/>
-                <a:gridCol w="977900"/>
+                <a:gridCol w="1181100">
+                  <a:extLst>
+                    <a:ext uri="{9D8B030D-6E8A-4147-A177-3AD203B41FA5}">
+                      <a16:colId xmlns:a16="http://schemas.microsoft.com/office/drawing/2014/main" val="20000"/>
+                    </a:ext>
+                  </a:extLst>
+                </a:gridCol>
+                <a:gridCol w="2946400">
+                  <a:extLst>
+                    <a:ext uri="{9D8B030D-6E8A-4147-A177-3AD203B41FA5}">
+                      <a16:colId xmlns:a16="http://schemas.microsoft.com/office/drawing/2014/main" val="20001"/>
+                    </a:ext>
+                  </a:extLst>
+                </a:gridCol>
+                <a:gridCol w="977900">
+                  <a:extLst>
+                    <a:ext uri="{9D8B030D-6E8A-4147-A177-3AD203B41FA5}">
+                      <a16:colId xmlns:a16="http://schemas.microsoft.com/office/drawing/2014/main" val="20002"/>
+                    </a:ext>
+                  </a:extLst>
+                </a:gridCol>
               </a:tblGrid>
               <a:tr h="0">
                 <a:tc>
@@ -18339,11 +20024,10 @@
                     <a:bodyPr/>
                     <a:lstStyle/>
                     <a:p>
-                      <a:pPr lvl="0" indent="0" marL="0">
+                      <a:pPr marL="0" lvl="0" indent="0">
                         <a:buNone/>
                       </a:pPr>
                       <a:r>
-                        <a:rPr/>
                         <a:t>Tool</a:t>
                       </a:r>
                     </a:p>
@@ -18355,11 +20039,10 @@
                     <a:bodyPr/>
                     <a:lstStyle/>
                     <a:p>
-                      <a:pPr lvl="0" indent="0" marL="0">
+                      <a:pPr marL="0" lvl="0" indent="0">
                         <a:buNone/>
                       </a:pPr>
                       <a:r>
-                        <a:rPr/>
                         <a:t>What it checks</a:t>
                       </a:r>
                     </a:p>
@@ -18371,17 +20054,21 @@
                     <a:bodyPr/>
                     <a:lstStyle/>
                     <a:p>
-                      <a:pPr lvl="0" indent="0" marL="0">
+                      <a:pPr marL="0" lvl="0" indent="0">
                         <a:buNone/>
                       </a:pPr>
                       <a:r>
-                        <a:rPr/>
                         <a:t>URL</a:t>
                       </a:r>
                     </a:p>
                   </a:txBody>
                   <a:tcPr/>
                 </a:tc>
+                <a:extLst>
+                  <a:ext uri="{0D108BD9-81ED-4DB2-BD59-A6C34878D82A}">
+                    <a16:rowId xmlns:a16="http://schemas.microsoft.com/office/drawing/2014/main" val="10000"/>
+                  </a:ext>
+                </a:extLst>
               </a:tr>
               <a:tr h="0">
                 <a:tc>
@@ -18389,7 +20076,7 @@
                     <a:bodyPr/>
                     <a:lstStyle/>
                     <a:p>
-                      <a:pPr lvl="0" indent="0" marL="0">
+                      <a:pPr marL="0" lvl="0" indent="0">
                         <a:buNone/>
                       </a:pPr>
                       <a:r>
@@ -18398,28 +20085,29 @@
                       </a:r>
                     </a:p>
                   </a:txBody>
+                  <a:tcPr/>
                 </a:tc>
                 <a:tc>
                   <a:txBody>
                     <a:bodyPr/>
                     <a:lstStyle/>
                     <a:p>
-                      <a:pPr lvl="0" indent="0" marL="0">
+                      <a:pPr marL="0" lvl="0" indent="0">
                         <a:buNone/>
                       </a:pPr>
                       <a:r>
-                        <a:rPr/>
                         <a:t>HTTP security headers</a:t>
                       </a:r>
                     </a:p>
                   </a:txBody>
+                  <a:tcPr/>
                 </a:tc>
                 <a:tc>
                   <a:txBody>
                     <a:bodyPr/>
                     <a:lstStyle/>
                     <a:p>
-                      <a:pPr lvl="0" indent="0" marL="0">
+                      <a:pPr marL="0" lvl="0" indent="0">
                         <a:buNone/>
                       </a:pPr>
                       <a:r>
@@ -18430,7 +20118,13 @@
                       </a:r>
                     </a:p>
                   </a:txBody>
+                  <a:tcPr/>
                 </a:tc>
+                <a:extLst>
+                  <a:ext uri="{0D108BD9-81ED-4DB2-BD59-A6C34878D82A}">
+                    <a16:rowId xmlns:a16="http://schemas.microsoft.com/office/drawing/2014/main" val="10001"/>
+                  </a:ext>
+                </a:extLst>
               </a:tr>
               <a:tr h="0">
                 <a:tc>
@@ -18438,7 +20132,7 @@
                     <a:bodyPr/>
                     <a:lstStyle/>
                     <a:p>
-                      <a:pPr lvl="0" indent="0" marL="0">
+                      <a:pPr marL="0" lvl="0" indent="0">
                         <a:buNone/>
                       </a:pPr>
                       <a:r>
@@ -18447,28 +20141,29 @@
                       </a:r>
                     </a:p>
                   </a:txBody>
+                  <a:tcPr/>
                 </a:tc>
                 <a:tc>
                   <a:txBody>
                     <a:bodyPr/>
                     <a:lstStyle/>
                     <a:p>
-                      <a:pPr lvl="0" indent="0" marL="0">
+                      <a:pPr marL="0" lvl="0" indent="0">
                         <a:buNone/>
                       </a:pPr>
                       <a:r>
-                        <a:rPr/>
                         <a:t>TLS configuration</a:t>
                       </a:r>
                     </a:p>
                   </a:txBody>
+                  <a:tcPr/>
                 </a:tc>
                 <a:tc>
                   <a:txBody>
                     <a:bodyPr/>
                     <a:lstStyle/>
                     <a:p>
-                      <a:pPr lvl="0" indent="0" marL="0">
+                      <a:pPr marL="0" lvl="0" indent="0">
                         <a:buNone/>
                       </a:pPr>
                       <a:r>
@@ -18479,7 +20174,13 @@
                       </a:r>
                     </a:p>
                   </a:txBody>
+                  <a:tcPr/>
                 </a:tc>
+                <a:extLst>
+                  <a:ext uri="{0D108BD9-81ED-4DB2-BD59-A6C34878D82A}">
+                    <a16:rowId xmlns:a16="http://schemas.microsoft.com/office/drawing/2014/main" val="10002"/>
+                  </a:ext>
+                </a:extLst>
               </a:tr>
               <a:tr h="0">
                 <a:tc>
@@ -18487,7 +20188,7 @@
                     <a:bodyPr/>
                     <a:lstStyle/>
                     <a:p>
-                      <a:pPr lvl="0" indent="0" marL="0">
+                      <a:pPr marL="0" lvl="0" indent="0">
                         <a:buNone/>
                       </a:pPr>
                       <a:r>
@@ -18496,32 +20197,32 @@
                       </a:r>
                     </a:p>
                   </a:txBody>
+                  <a:tcPr/>
                 </a:tc>
                 <a:tc>
                   <a:txBody>
                     <a:bodyPr/>
                     <a:lstStyle/>
                     <a:p>
-                      <a:pPr lvl="0" indent="0" marL="0">
+                      <a:pPr marL="0" lvl="0" indent="0">
                         <a:buNone/>
                       </a:pPr>
                       <a:r>
-                        <a:rPr/>
                         <a:t>Dependency vulnerabilities</a:t>
                       </a:r>
                     </a:p>
                   </a:txBody>
+                  <a:tcPr/>
                 </a:tc>
                 <a:tc>
                   <a:txBody>
                     <a:bodyPr/>
                     <a:lstStyle/>
                     <a:p>
-                      <a:pPr lvl="0" indent="0" marL="0">
+                      <a:pPr marL="0" lvl="0" indent="0">
                         <a:buNone/>
                       </a:pPr>
                       <a:r>
-                        <a:rPr/>
                         <a:t>CLI: </a:t>
                       </a:r>
                       <a:r>
@@ -18532,7 +20233,13 @@
                       </a:r>
                     </a:p>
                   </a:txBody>
+                  <a:tcPr/>
                 </a:tc>
+                <a:extLst>
+                  <a:ext uri="{0D108BD9-81ED-4DB2-BD59-A6C34878D82A}">
+                    <a16:rowId xmlns:a16="http://schemas.microsoft.com/office/drawing/2014/main" val="10003"/>
+                  </a:ext>
+                </a:extLst>
               </a:tr>
               <a:tr h="0">
                 <a:tc>
@@ -18540,7 +20247,7 @@
                     <a:bodyPr/>
                     <a:lstStyle/>
                     <a:p>
-                      <a:pPr lvl="0" indent="0" marL="0">
+                      <a:pPr marL="0" lvl="0" indent="0">
                         <a:buNone/>
                       </a:pPr>
                       <a:r>
@@ -18549,37 +20256,43 @@
                       </a:r>
                     </a:p>
                   </a:txBody>
+                  <a:tcPr/>
                 </a:tc>
                 <a:tc>
                   <a:txBody>
                     <a:bodyPr/>
                     <a:lstStyle/>
                     <a:p>
-                      <a:pPr lvl="0" indent="0" marL="0">
+                      <a:pPr marL="0" lvl="0" indent="0">
                         <a:buNone/>
                       </a:pPr>
                       <a:r>
-                        <a:rPr/>
                         <a:t>Performance, accessibility, SEO</a:t>
                       </a:r>
                     </a:p>
                   </a:txBody>
+                  <a:tcPr/>
                 </a:tc>
                 <a:tc>
                   <a:txBody>
                     <a:bodyPr/>
                     <a:lstStyle/>
                     <a:p>
-                      <a:pPr lvl="0" indent="0" marL="0">
+                      <a:pPr marL="0" lvl="0" indent="0">
                         <a:buNone/>
                       </a:pPr>
                       <a:r>
-                        <a:rPr/>
                         <a:t>Chrome DevTools &gt; Lighthouse</a:t>
                       </a:r>
                     </a:p>
                   </a:txBody>
+                  <a:tcPr/>
                 </a:tc>
+                <a:extLst>
+                  <a:ext uri="{0D108BD9-81ED-4DB2-BD59-A6C34878D82A}">
+                    <a16:rowId xmlns:a16="http://schemas.microsoft.com/office/drawing/2014/main" val="10004"/>
+                  </a:ext>
+                </a:extLst>
               </a:tr>
               <a:tr h="0">
                 <a:tc>
@@ -18587,7 +20300,7 @@
                     <a:bodyPr/>
                     <a:lstStyle/>
                     <a:p>
-                      <a:pPr lvl="0" indent="0" marL="0">
+                      <a:pPr marL="0" lvl="0" indent="0">
                         <a:buNone/>
                       </a:pPr>
                       <a:r>
@@ -18596,28 +20309,29 @@
                       </a:r>
                     </a:p>
                   </a:txBody>
+                  <a:tcPr/>
                 </a:tc>
                 <a:tc>
                   <a:txBody>
                     <a:bodyPr/>
                     <a:lstStyle/>
                     <a:p>
-                      <a:pPr lvl="0" indent="0" marL="0">
+                      <a:pPr marL="0" lvl="0" indent="0">
                         <a:buNone/>
                       </a:pPr>
                       <a:r>
-                        <a:rPr/>
                         <a:t>Automated vulnerability scanning</a:t>
                       </a:r>
                     </a:p>
                   </a:txBody>
+                  <a:tcPr/>
                 </a:tc>
                 <a:tc>
                   <a:txBody>
                     <a:bodyPr/>
                     <a:lstStyle/>
                     <a:p>
-                      <a:pPr lvl="0" indent="0" marL="0">
+                      <a:pPr marL="0" lvl="0" indent="0">
                         <a:buNone/>
                       </a:pPr>
                       <a:r>
@@ -18628,7 +20342,13 @@
                       </a:r>
                     </a:p>
                   </a:txBody>
+                  <a:tcPr/>
                 </a:tc>
+                <a:extLst>
+                  <a:ext uri="{0D108BD9-81ED-4DB2-BD59-A6C34878D82A}">
+                    <a16:rowId xmlns:a16="http://schemas.microsoft.com/office/drawing/2014/main" val="10005"/>
+                  </a:ext>
+                </a:extLst>
               </a:tr>
             </a:tbl>
           </a:graphicData>
@@ -18636,6 +20356,9 @@
       </p:graphicFrame>
     </p:spTree>
   </p:cSld>
+  <p:clrMapOvr>
+    <a:masterClrMapping/>
+  </p:clrMapOvr>
 </p:sld>
 </file>
 
@@ -18668,10 +20391,12 @@
         </p:nvSpPr>
         <p:spPr/>
         <p:txBody>
-          <a:bodyPr/>
+          <a:bodyPr>
+            <a:normAutofit fontScale="85000" lnSpcReduction="20000"/>
+          </a:bodyPr>
           <a:lstStyle/>
           <a:p>
-            <a:pPr lvl="0" indent="0" marL="0">
+            <a:pPr marL="0" lvl="0" indent="0">
               <a:spcBef>
                 <a:spcPts val="3000"/>
               </a:spcBef>
@@ -18683,16 +20408,15 @@
             </a:r>
           </a:p>
           <a:p>
-            <a:pPr lvl="0" indent="0" marL="0">
+            <a:pPr marL="0" lvl="0" indent="0">
               <a:buNone/>
             </a:pPr>
             <a:r>
-              <a:rPr/>
               <a:t>Before your final presentation, ask yourselves:</a:t>
             </a:r>
           </a:p>
           <a:p>
-            <a:pPr lvl="0" indent="-342900" marL="342900">
+            <a:pPr marL="342900" lvl="0" indent="-342900">
               <a:buAutoNum type="arabicPeriod"/>
             </a:pPr>
             <a:r>
@@ -18700,12 +20424,11 @@
               <a:t>If our database is breached</a:t>
             </a:r>
             <a:r>
-              <a:rPr/>
               <a:t>, are passwords safe? (hashed with bcrypt/Argon2?)</a:t>
             </a:r>
           </a:p>
           <a:p>
-            <a:pPr lvl="0" indent="-342900" marL="342900">
+            <a:pPr marL="342900" lvl="0" indent="-342900">
               <a:buAutoNum type="arabicPeriod"/>
             </a:pPr>
             <a:r>
@@ -18713,12 +20436,11 @@
               <a:t>If a JWT is stolen</a:t>
             </a:r>
             <a:r>
-              <a:rPr/>
               <a:t>, what’s the blast radius? (short TTL? ownership checks?)</a:t>
             </a:r>
           </a:p>
           <a:p>
-            <a:pPr lvl="0" indent="-342900" marL="342900">
+            <a:pPr marL="342900" lvl="0" indent="-342900">
               <a:buAutoNum type="arabicPeriod"/>
             </a:pPr>
             <a:r>
@@ -18726,12 +20448,11 @@
               <a:t>If a dependency has a CVE</a:t>
             </a:r>
             <a:r>
-              <a:rPr/>
               <a:t>, how fast can we update? (lock file? CI/CD?)</a:t>
             </a:r>
           </a:p>
           <a:p>
-            <a:pPr lvl="0" indent="-342900" marL="342900">
+            <a:pPr marL="342900" lvl="0" indent="-342900">
               <a:buAutoNum type="arabicPeriod"/>
             </a:pPr>
             <a:r>
@@ -18739,12 +20460,11 @@
               <a:t>If our API gets 10x traffic</a:t>
             </a:r>
             <a:r>
-              <a:rPr/>
               <a:t>, what breaks first? (caching? DB indexes? connection pool?)</a:t>
             </a:r>
           </a:p>
           <a:p>
-            <a:pPr lvl="0" indent="-342900" marL="342900">
+            <a:pPr marL="342900" lvl="0" indent="-342900">
               <a:buAutoNum type="arabicPeriod"/>
             </a:pPr>
             <a:r>
@@ -18752,12 +20472,11 @@
               <a:t>If our app throws an error</a:t>
             </a:r>
             <a:r>
-              <a:rPr/>
               <a:t>, does the user see a stack trace? (error handler?)</a:t>
             </a:r>
           </a:p>
           <a:p>
-            <a:pPr lvl="0" indent="-342900" marL="342900">
+            <a:pPr marL="342900" lvl="0" indent="-342900">
               <a:buAutoNum type="arabicPeriod"/>
             </a:pPr>
             <a:r>
@@ -18765,7 +20484,6 @@
               <a:t>If we need to audit user actions</a:t>
             </a:r>
             <a:r>
-              <a:rPr/>
               <a:t>, can we search logs? (structured logging?)</a:t>
             </a:r>
           </a:p>
@@ -18773,6 +20491,9 @@
       </p:sp>
     </p:spTree>
   </p:cSld>
+  <p:clrMapOvr>
+    <a:masterClrMapping/>
+  </p:clrMapOvr>
 </p:sld>
 </file>
 
@@ -18803,16 +20524,21 @@
             <p:ph type="title"/>
           </p:nvPr>
         </p:nvSpPr>
-        <p:spPr/>
+        <p:spPr>
+          <a:xfrm>
+            <a:off x="160422" y="2219263"/>
+            <a:ext cx="8229600" cy="857250"/>
+          </a:xfrm>
+        </p:spPr>
         <p:txBody>
           <a:bodyPr/>
           <a:lstStyle/>
           <a:p>
-            <a:pPr lvl="0" indent="0" marL="0">
+            <a:pPr marL="0" lvl="0" indent="0">
               <a:buNone/>
             </a:pPr>
             <a:r>
-              <a:rPr/>
+              <a:rPr dirty="0"/>
               <a:t>Summary</a:t>
             </a:r>
           </a:p>
@@ -18820,6 +20546,9 @@
       </p:sp>
     </p:spTree>
   </p:cSld>
+  <p:clrMapOvr>
+    <a:masterClrMapping/>
+  </p:clrMapOvr>
 </p:sld>
 </file>
 
@@ -18852,10 +20581,12 @@
         </p:nvSpPr>
         <p:spPr/>
         <p:txBody>
-          <a:bodyPr/>
+          <a:bodyPr>
+            <a:normAutofit fontScale="77500" lnSpcReduction="20000"/>
+          </a:bodyPr>
           <a:lstStyle/>
           <a:p>
-            <a:pPr lvl="0" indent="0" marL="0">
+            <a:pPr marL="0" lvl="0" indent="0">
               <a:spcBef>
                 <a:spcPts val="3000"/>
               </a:spcBef>
@@ -18867,7 +20598,7 @@
             </a:r>
           </a:p>
           <a:p>
-            <a:pPr lvl="0" indent="-342900" marL="342900">
+            <a:pPr marL="342900" lvl="0" indent="-342900">
               <a:buAutoNum type="arabicPeriod"/>
             </a:pPr>
             <a:r>
@@ -18875,12 +20606,11 @@
               <a:t>Hardening is defense in depth</a:t>
             </a:r>
             <a:r>
-              <a:rPr/>
               <a:t> — network, transport, application, and data layers</a:t>
             </a:r>
           </a:p>
           <a:p>
-            <a:pPr lvl="0" indent="-342900" marL="342900">
+            <a:pPr marL="342900" lvl="0" indent="-342900">
               <a:buAutoNum type="arabicPeriod"/>
             </a:pPr>
             <a:r>
@@ -18888,12 +20618,11 @@
               <a:t>OWASP Top 10</a:t>
             </a:r>
             <a:r>
-              <a:rPr/>
               <a:t> maps directly to what you’ve built — broken access control and injection are #1 and #3</a:t>
             </a:r>
           </a:p>
           <a:p>
-            <a:pPr lvl="0" indent="-342900" marL="342900">
+            <a:pPr marL="342900" lvl="0" indent="-342900">
               <a:buAutoNum type="arabicPeriod"/>
             </a:pPr>
             <a:r>
@@ -18901,12 +20630,11 @@
               <a:t>Authentication hardening</a:t>
             </a:r>
             <a:r>
-              <a:rPr/>
               <a:t> goes beyond “it works” — rate limiting, token rotation, proper hashing</a:t>
             </a:r>
           </a:p>
           <a:p>
-            <a:pPr lvl="0" indent="-342900" marL="342900">
+            <a:pPr marL="342900" lvl="0" indent="-342900">
               <a:buAutoNum type="arabicPeriod"/>
             </a:pPr>
             <a:r>
@@ -18914,7 +20642,6 @@
               <a:t>Security headers</a:t>
             </a:r>
             <a:r>
-              <a:rPr/>
               <a:t> (</a:t>
             </a:r>
             <a:r>
@@ -18924,12 +20651,11 @@
               <a:t>helmet</a:t>
             </a:r>
             <a:r>
-              <a:rPr/>
               <a:t>) are one line of code for massive protection</a:t>
             </a:r>
           </a:p>
           <a:p>
-            <a:pPr lvl="0" indent="-342900" marL="342900">
+            <a:pPr marL="342900" lvl="0" indent="-342900">
               <a:buAutoNum type="arabicPeriod"/>
             </a:pPr>
             <a:r>
@@ -18937,12 +20663,11 @@
               <a:t>Never trust client input</a:t>
             </a:r>
             <a:r>
-              <a:rPr/>
               <a:t> — validate server-side, use parameterized queries</a:t>
             </a:r>
           </a:p>
           <a:p>
-            <a:pPr lvl="0" indent="-342900" marL="342900">
+            <a:pPr marL="342900" lvl="0" indent="-342900">
               <a:buAutoNum type="arabicPeriod"/>
             </a:pPr>
             <a:r>
@@ -18950,12 +20675,11 @@
               <a:t>Dependencies are attack surface</a:t>
             </a:r>
             <a:r>
-              <a:rPr/>
               <a:t> — audit, lock, update</a:t>
             </a:r>
           </a:p>
           <a:p>
-            <a:pPr lvl="0" indent="-342900" marL="342900">
+            <a:pPr marL="342900" lvl="0" indent="-342900">
               <a:buAutoNum type="arabicPeriod"/>
             </a:pPr>
             <a:r>
@@ -18963,12 +20687,11 @@
               <a:t>Errors in production must be generic</a:t>
             </a:r>
             <a:r>
-              <a:rPr/>
               <a:t> — log details, show nothing</a:t>
             </a:r>
           </a:p>
           <a:p>
-            <a:pPr lvl="0" indent="-342900" marL="342900">
+            <a:pPr marL="342900" lvl="0" indent="-342900">
               <a:buAutoNum type="arabicPeriod"/>
             </a:pPr>
             <a:r>
@@ -18976,7 +20699,6 @@
               <a:t>If you can’t see it, you can’t fix it</a:t>
             </a:r>
             <a:r>
-              <a:rPr/>
               <a:t> — structured logging and monitoring</a:t>
             </a:r>
           </a:p>
@@ -18984,6 +20706,9 @@
       </p:sp>
     </p:spTree>
   </p:cSld>
+  <p:clrMapOvr>
+    <a:masterClrMapping/>
+  </p:clrMapOvr>
 </p:sld>
 </file>
 
@@ -19019,7 +20744,7 @@
           <a:bodyPr/>
           <a:lstStyle/>
           <a:p>
-            <a:pPr lvl="0" indent="0" marL="0">
+            <a:pPr marL="0" lvl="0" indent="0">
               <a:spcBef>
                 <a:spcPts val="3000"/>
               </a:spcBef>
@@ -19037,7 +20762,6 @@
               <a:t>Today:</a:t>
             </a:r>
             <a:r>
-              <a:rPr/>
               <a:t> Apply the hardening checklist to your capstone project</a:t>
             </a:r>
           </a:p>
@@ -19048,7 +20772,6 @@
               <a:t>April 28:</a:t>
             </a:r>
             <a:r>
-              <a:rPr/>
               <a:t> Final presentations — be ready to discuss your hardening decisions</a:t>
             </a:r>
           </a:p>
@@ -19059,12 +20782,11 @@
               <a:t>Deliverables:</a:t>
             </a:r>
             <a:r>
-              <a:rPr/>
               <a:t> Working deployed app, technical documentation, architecture decision records</a:t>
             </a:r>
           </a:p>
           <a:p>
-            <a:pPr lvl="0" indent="0" marL="0">
+            <a:pPr marL="0" lvl="0" indent="0">
               <a:buNone/>
             </a:pPr>
             <a:r>
@@ -19072,7 +20794,6 @@
               <a:t>Final tip:</a:t>
             </a:r>
             <a:r>
-              <a:rPr/>
               <a:t> Security is not a feature you add at the end. But if you haven’t added it yet, </a:t>
             </a:r>
             <a:r>
@@ -19080,7 +20801,6 @@
               <a:t>today</a:t>
             </a:r>
             <a:r>
-              <a:rPr/>
               <a:t> is the best day to start.</a:t>
             </a:r>
           </a:p>
@@ -19088,6 +20808,9 @@
       </p:sp>
     </p:spTree>
   </p:cSld>
+  <p:clrMapOvr>
+    <a:masterClrMapping/>
+  </p:clrMapOvr>
 </p:sld>
 </file>
 
@@ -19123,7 +20846,7 @@
           <a:bodyPr/>
           <a:lstStyle/>
           <a:p>
-            <a:pPr lvl="0" indent="0" marL="0">
+            <a:pPr marL="0" lvl="0" indent="0">
               <a:buNone/>
             </a:pPr>
             <a:r>
@@ -19131,7 +20854,6 @@
               <a:t>Rule of thumb:</a:t>
             </a:r>
             <a:r>
-              <a:rPr/>
               <a:t> If your app is on the public internet, it </a:t>
             </a:r>
             <a:r>
@@ -19139,7 +20861,6 @@
               <a:t>will</a:t>
             </a:r>
             <a:r>
-              <a:rPr/>
               <a:t> be scanned for vulnerabilities within hours.</a:t>
             </a:r>
           </a:p>
@@ -19147,6 +20868,9 @@
       </p:sp>
     </p:spTree>
   </p:cSld>
+  <p:clrMapOvr>
+    <a:masterClrMapping/>
+  </p:clrMapOvr>
 </p:sld>
 </file>
 
@@ -19182,7 +20906,7 @@
           <a:bodyPr/>
           <a:lstStyle/>
           <a:p>
-            <a:pPr lvl="0" indent="0" marL="0">
+            <a:pPr marL="0" lvl="0" indent="0">
               <a:spcBef>
                 <a:spcPts val="3000"/>
               </a:spcBef>
@@ -19194,7 +20918,7 @@
             </a:r>
           </a:p>
           <a:p>
-            <a:pPr lvl="0" indent="0" marL="0">
+            <a:pPr marL="0" lvl="0" indent="0">
               <a:buNone/>
             </a:pPr>
             <a:r>
@@ -19203,20 +20927,18 @@
             </a:r>
           </a:p>
           <a:p>
-            <a:pPr lvl="0" indent="0" marL="0">
+            <a:pPr marL="0" lvl="0" indent="0">
               <a:buNone/>
             </a:pPr>
             <a:r>
-              <a:rPr/>
               <a:t>Network Layer (HTTPS, Firewall, CDN) → Transport Layer (TLS, CORS, Headers) → Application Layer (Auth, Validation, CSRF) → Data Layer (Encryption, Hashing, Backups)</a:t>
             </a:r>
           </a:p>
           <a:p>
-            <a:pPr lvl="0" indent="0" marL="0">
+            <a:pPr marL="0" lvl="0" indent="0">
               <a:buNone/>
             </a:pPr>
             <a:r>
-              <a:rPr/>
               <a:t>No single layer is sufficient. Each layer catches what the others miss.</a:t>
             </a:r>
           </a:p>
@@ -19224,6 +20946,9 @@
       </p:sp>
     </p:spTree>
   </p:cSld>
+  <p:clrMapOvr>
+    <a:masterClrMapping/>
+  </p:clrMapOvr>
 </p:sld>
 </file>
 
@@ -19259,11 +20984,10 @@
           <a:bodyPr/>
           <a:lstStyle/>
           <a:p>
-            <a:pPr lvl="0" indent="0" marL="0">
+            <a:pPr marL="0" lvl="0" indent="0">
               <a:buNone/>
             </a:pPr>
             <a:r>
-              <a:rPr/>
               <a:t>Part 2: OWASP Top 10</a:t>
             </a:r>
           </a:p>
@@ -19284,11 +21008,10 @@
           <a:bodyPr/>
           <a:lstStyle/>
           <a:p>
-            <a:pPr lvl="0" indent="0" marL="0">
+            <a:pPr marL="0" lvl="0" indent="0">
               <a:buNone/>
             </a:pPr>
             <a:r>
-              <a:rPr/>
               <a:t>The most critical web application security risks</a:t>
             </a:r>
           </a:p>
@@ -19296,6 +21019,9 @@
       </p:sp>
     </p:spTree>
   </p:cSld>
+  <p:clrMapOvr>
+    <a:masterClrMapping/>
+  </p:clrMapOvr>
 </p:sld>
 </file>
 
@@ -19328,156 +21054,149 @@
         </p:nvSpPr>
         <p:spPr/>
         <p:txBody>
-          <a:bodyPr/>
+          <a:bodyPr>
+            <a:normAutofit fontScale="85000" lnSpcReduction="20000"/>
+          </a:bodyPr>
           <a:lstStyle/>
           <a:p>
-            <a:pPr lvl="0" indent="0" marL="0">
+            <a:pPr marL="0" lvl="0" indent="0">
               <a:spcBef>
                 <a:spcPts val="3000"/>
               </a:spcBef>
               <a:buNone/>
             </a:pPr>
             <a:r>
-              <a:rPr b="1"/>
-              <a:t>OWASP Top 10 (2021)</a:t>
-            </a:r>
-          </a:p>
-          <a:p>
-            <a:pPr lvl="0" indent="-342900" marL="342900">
+              <a:rPr b="1" dirty="0"/>
+              <a:t>OWASP Top 10 Broken Access Control</a:t>
+            </a:r>
+            <a:r>
+              <a:rPr dirty="0"/>
+              <a:t> – #1 risk</a:t>
+            </a:r>
+          </a:p>
+          <a:p>
+            <a:pPr marL="342900" lvl="0" indent="-342900">
               <a:buAutoNum type="arabicPeriod"/>
             </a:pPr>
             <a:r>
-              <a:rPr b="1"/>
-              <a:t>Broken Access Control</a:t>
-            </a:r>
-            <a:r>
-              <a:rPr/>
-              <a:t> – #1 risk</a:t>
-            </a:r>
-          </a:p>
-          <a:p>
-            <a:pPr lvl="0" indent="-342900" marL="342900">
+              <a:rPr b="1" dirty="0"/>
+              <a:t>Cryptographic Failures</a:t>
+            </a:r>
+            <a:r>
+              <a:rPr dirty="0"/>
+              <a:t> – weak hashing, no TLS</a:t>
+            </a:r>
+          </a:p>
+          <a:p>
+            <a:pPr marL="342900" lvl="0" indent="-342900">
               <a:buAutoNum type="arabicPeriod"/>
             </a:pPr>
             <a:r>
-              <a:rPr b="1"/>
-              <a:t>Cryptographic Failures</a:t>
-            </a:r>
-            <a:r>
-              <a:rPr/>
-              <a:t> – weak hashing, no TLS</a:t>
-            </a:r>
-          </a:p>
-          <a:p>
-            <a:pPr lvl="0" indent="-342900" marL="342900">
+              <a:rPr b="1" dirty="0"/>
+              <a:t>Injection</a:t>
+            </a:r>
+            <a:r>
+              <a:rPr dirty="0"/>
+              <a:t> – SQL, NoSQL, XSS, command</a:t>
+            </a:r>
+          </a:p>
+          <a:p>
+            <a:pPr marL="342900" lvl="0" indent="-342900">
               <a:buAutoNum type="arabicPeriod"/>
             </a:pPr>
             <a:r>
-              <a:rPr b="1"/>
-              <a:t>Injection</a:t>
-            </a:r>
-            <a:r>
-              <a:rPr/>
-              <a:t> – SQL, NoSQL, XSS, command</a:t>
-            </a:r>
-          </a:p>
-          <a:p>
-            <a:pPr lvl="0" indent="-342900" marL="342900">
+              <a:rPr b="1" dirty="0"/>
+              <a:t>Insecure Design</a:t>
+            </a:r>
+            <a:r>
+              <a:rPr dirty="0"/>
+              <a:t> – flawed architecture</a:t>
+            </a:r>
+          </a:p>
+          <a:p>
+            <a:pPr marL="342900" lvl="0" indent="-342900">
               <a:buAutoNum type="arabicPeriod"/>
             </a:pPr>
             <a:r>
-              <a:rPr b="1"/>
-              <a:t>Insecure Design</a:t>
-            </a:r>
-            <a:r>
-              <a:rPr/>
-              <a:t> – flawed architecture</a:t>
-            </a:r>
-          </a:p>
-          <a:p>
-            <a:pPr lvl="0" indent="-342900" marL="342900">
+              <a:rPr b="1" dirty="0"/>
+              <a:t>Security Misconfiguration</a:t>
+            </a:r>
+            <a:r>
+              <a:rPr dirty="0"/>
+              <a:t> – defaults, open ports</a:t>
+            </a:r>
+          </a:p>
+          <a:p>
+            <a:pPr marL="342900" lvl="0" indent="-342900">
               <a:buAutoNum type="arabicPeriod"/>
             </a:pPr>
             <a:r>
-              <a:rPr b="1"/>
-              <a:t>Security Misconfiguration</a:t>
-            </a:r>
-            <a:r>
-              <a:rPr/>
-              <a:t> – defaults, open ports</a:t>
-            </a:r>
-          </a:p>
-          <a:p>
-            <a:pPr lvl="0" indent="-342900" marL="342900">
+              <a:rPr b="1" dirty="0"/>
+              <a:t>Vulnerable Components</a:t>
+            </a:r>
+            <a:r>
+              <a:rPr dirty="0"/>
+              <a:t> – outdated deps</a:t>
+            </a:r>
+          </a:p>
+          <a:p>
+            <a:pPr marL="342900" lvl="0" indent="-342900">
               <a:buAutoNum type="arabicPeriod"/>
             </a:pPr>
             <a:r>
-              <a:rPr b="1"/>
-              <a:t>Vulnerable Components</a:t>
-            </a:r>
-            <a:r>
-              <a:rPr/>
-              <a:t> – outdated deps</a:t>
-            </a:r>
-          </a:p>
-          <a:p>
-            <a:pPr lvl="0" indent="-342900" marL="342900">
+              <a:rPr b="1" dirty="0"/>
+              <a:t>Auth Failures</a:t>
+            </a:r>
+            <a:r>
+              <a:rPr dirty="0"/>
+              <a:t> – weak passwords, no MFA</a:t>
+            </a:r>
+          </a:p>
+          <a:p>
+            <a:pPr marL="342900" lvl="0" indent="-342900">
               <a:buAutoNum type="arabicPeriod"/>
             </a:pPr>
             <a:r>
-              <a:rPr b="1"/>
-              <a:t>Auth Failures</a:t>
-            </a:r>
-            <a:r>
-              <a:rPr/>
-              <a:t> – weak passwords, no MFA</a:t>
-            </a:r>
-          </a:p>
-          <a:p>
-            <a:pPr lvl="0" indent="-342900" marL="342900">
+              <a:rPr b="1" dirty="0"/>
+              <a:t>Software/Data Integrity</a:t>
+            </a:r>
+            <a:r>
+              <a:rPr dirty="0"/>
+              <a:t> – untrusted updates</a:t>
+            </a:r>
+          </a:p>
+          <a:p>
+            <a:pPr marL="342900" lvl="0" indent="-342900">
               <a:buAutoNum type="arabicPeriod"/>
             </a:pPr>
             <a:r>
-              <a:rPr b="1"/>
-              <a:t>Software/Data Integrity</a:t>
-            </a:r>
-            <a:r>
-              <a:rPr/>
-              <a:t> – untrusted updates</a:t>
-            </a:r>
-          </a:p>
-          <a:p>
-            <a:pPr lvl="0" indent="-342900" marL="342900">
+              <a:rPr b="1" dirty="0"/>
+              <a:t>Logging Failures</a:t>
+            </a:r>
+            <a:r>
+              <a:rPr dirty="0"/>
+              <a:t> – can’t detect breaches</a:t>
+            </a:r>
+          </a:p>
+          <a:p>
+            <a:pPr marL="342900" lvl="0" indent="-342900">
               <a:buAutoNum type="arabicPeriod"/>
             </a:pPr>
             <a:r>
-              <a:rPr b="1"/>
-              <a:t>Logging Failures</a:t>
-            </a:r>
-            <a:r>
-              <a:rPr/>
-              <a:t> – can’t detect breaches</a:t>
-            </a:r>
-          </a:p>
-          <a:p>
-            <a:pPr lvl="0" indent="-342900" marL="342900">
-              <a:buAutoNum type="arabicPeriod"/>
-            </a:pPr>
-            <a:r>
-              <a:rPr b="1"/>
+              <a:rPr b="1" dirty="0"/>
               <a:t>SSRF</a:t>
             </a:r>
             <a:r>
-              <a:rPr/>
+              <a:rPr dirty="0"/>
               <a:t> – server makes unintended requests</a:t>
             </a:r>
           </a:p>
           <a:p>
-            <a:pPr lvl="0" indent="0" marL="0">
+            <a:pPr marL="0" lvl="0" indent="0">
               <a:buNone/>
             </a:pPr>
             <a:r>
-              <a:rPr/>
+              <a:rPr dirty="0"/>
               <a:t>Your capstone project likely touches #1, #2, #3, #5, #6, #7, and #9.</a:t>
             </a:r>
           </a:p>
@@ -19485,6 +21204,9 @@
       </p:sp>
     </p:spTree>
   </p:cSld>
+  <p:clrMapOvr>
+    <a:masterClrMapping/>
+  </p:clrMapOvr>
 </p:sld>
 </file>
 
@@ -19819,44 +21541,44 @@
         <a:sysClr val="window" lastClr="FFFFFF"/>
       </a:lt1>
       <a:dk2>
-        <a:srgbClr val="44546A"/>
+        <a:srgbClr val="0E2841"/>
       </a:dk2>
       <a:lt2>
-        <a:srgbClr val="E7E6E6"/>
+        <a:srgbClr val="E8E8E8"/>
       </a:lt2>
       <a:accent1>
-        <a:srgbClr val="5B9BD5"/>
+        <a:srgbClr val="156082"/>
       </a:accent1>
       <a:accent2>
-        <a:srgbClr val="ED7D31"/>
+        <a:srgbClr val="E97132"/>
       </a:accent2>
       <a:accent3>
-        <a:srgbClr val="A5A5A5"/>
+        <a:srgbClr val="196B24"/>
       </a:accent3>
       <a:accent4>
-        <a:srgbClr val="FFC000"/>
+        <a:srgbClr val="0F9ED5"/>
       </a:accent4>
       <a:accent5>
-        <a:srgbClr val="4472C4"/>
+        <a:srgbClr val="A02B93"/>
       </a:accent5>
       <a:accent6>
-        <a:srgbClr val="70AD47"/>
+        <a:srgbClr val="4EA72E"/>
       </a:accent6>
       <a:hlink>
-        <a:srgbClr val="0563C1"/>
+        <a:srgbClr val="467886"/>
       </a:hlink>
       <a:folHlink>
-        <a:srgbClr val="954F72"/>
+        <a:srgbClr val="96607D"/>
       </a:folHlink>
     </a:clrScheme>
     <a:fontScheme name="Office">
       <a:majorFont>
-        <a:latin typeface="Calibri Light" panose="020F0302020204030204"/>
+        <a:latin typeface="Aptos Display" panose="02110004020202020204"/>
         <a:ea typeface=""/>
         <a:cs typeface=""/>
-        <a:font script="Jpan" typeface="ＭＳ Ｐゴシック"/>
+        <a:font script="Jpan" typeface="游ゴシック Light"/>
         <a:font script="Hang" typeface="맑은 고딕"/>
-        <a:font script="Hans" typeface="宋体"/>
+        <a:font script="Hans" typeface="等线 Light"/>
         <a:font script="Hant" typeface="新細明體"/>
         <a:font script="Arab" typeface="Times New Roman"/>
         <a:font script="Hebr" typeface="Times New Roman"/>
@@ -19884,14 +21606,31 @@
         <a:font script="Viet" typeface="Times New Roman"/>
         <a:font script="Uigh" typeface="Microsoft Uighur"/>
         <a:font script="Geor" typeface="Sylfaen"/>
+        <a:font script="Armn" typeface="Arial"/>
+        <a:font script="Bugi" typeface="Leelawadee UI"/>
+        <a:font script="Bopo" typeface="Microsoft JhengHei"/>
+        <a:font script="Java" typeface="Javanese Text"/>
+        <a:font script="Lisu" typeface="Segoe UI"/>
+        <a:font script="Mymr" typeface="Myanmar Text"/>
+        <a:font script="Nkoo" typeface="Ebrima"/>
+        <a:font script="Olck" typeface="Nirmala UI"/>
+        <a:font script="Osma" typeface="Ebrima"/>
+        <a:font script="Phag" typeface="Phagspa"/>
+        <a:font script="Syrn" typeface="Estrangelo Edessa"/>
+        <a:font script="Syrj" typeface="Estrangelo Edessa"/>
+        <a:font script="Syre" typeface="Estrangelo Edessa"/>
+        <a:font script="Sora" typeface="Nirmala UI"/>
+        <a:font script="Tale" typeface="Microsoft Tai Le"/>
+        <a:font script="Talu" typeface="Microsoft New Tai Lue"/>
+        <a:font script="Tfng" typeface="Ebrima"/>
       </a:majorFont>
       <a:minorFont>
-        <a:latin typeface="Calibri" panose="020F0502020204030204"/>
+        <a:latin typeface="Aptos" panose="02110004020202020204"/>
         <a:ea typeface=""/>
         <a:cs typeface=""/>
-        <a:font script="Jpan" typeface="ＭＳ Ｐゴシック"/>
+        <a:font script="Jpan" typeface="游ゴシック"/>
         <a:font script="Hang" typeface="맑은 고딕"/>
-        <a:font script="Hans" typeface="宋体"/>
+        <a:font script="Hans" typeface="等线"/>
         <a:font script="Hant" typeface="新細明體"/>
         <a:font script="Arab" typeface="Arial"/>
         <a:font script="Hebr" typeface="Arial"/>
@@ -19919,6 +21658,23 @@
         <a:font script="Viet" typeface="Arial"/>
         <a:font script="Uigh" typeface="Microsoft Uighur"/>
         <a:font script="Geor" typeface="Sylfaen"/>
+        <a:font script="Armn" typeface="Arial"/>
+        <a:font script="Bugi" typeface="Leelawadee UI"/>
+        <a:font script="Bopo" typeface="Microsoft JhengHei"/>
+        <a:font script="Java" typeface="Javanese Text"/>
+        <a:font script="Lisu" typeface="Segoe UI"/>
+        <a:font script="Mymr" typeface="Myanmar Text"/>
+        <a:font script="Nkoo" typeface="Ebrima"/>
+        <a:font script="Olck" typeface="Nirmala UI"/>
+        <a:font script="Osma" typeface="Ebrima"/>
+        <a:font script="Phag" typeface="Phagspa"/>
+        <a:font script="Syrn" typeface="Estrangelo Edessa"/>
+        <a:font script="Syrj" typeface="Estrangelo Edessa"/>
+        <a:font script="Syre" typeface="Estrangelo Edessa"/>
+        <a:font script="Sora" typeface="Nirmala UI"/>
+        <a:font script="Tale" typeface="Microsoft Tai Le"/>
+        <a:font script="Talu" typeface="Microsoft New Tai Lue"/>
+        <a:font script="Tfng" typeface="Ebrima"/>
       </a:minorFont>
     </a:fontScheme>
     <a:fmtScheme name="Office">
@@ -19980,13 +21736,6 @@
         </a:gradFill>
       </a:fillStyleLst>
       <a:lnStyleLst>
-        <a:ln w="6350" cap="flat" cmpd="sng" algn="ctr">
-          <a:solidFill>
-            <a:schemeClr val="phClr"/>
-          </a:solidFill>
-          <a:prstDash val="solid"/>
-          <a:miter lim="800000"/>
-        </a:ln>
         <a:ln w="12700" cap="flat" cmpd="sng" algn="ctr">
           <a:solidFill>
             <a:schemeClr val="phClr"/>
@@ -19995,6 +21744,13 @@
           <a:miter lim="800000"/>
         </a:ln>
         <a:ln w="19050" cap="flat" cmpd="sng" algn="ctr">
+          <a:solidFill>
+            <a:schemeClr val="phClr"/>
+          </a:solidFill>
+          <a:prstDash val="solid"/>
+          <a:miter lim="800000"/>
+        </a:ln>
+        <a:ln w="25400" cap="flat" cmpd="sng" algn="ctr">
           <a:solidFill>
             <a:schemeClr val="phClr"/>
           </a:solidFill>
@@ -20059,11 +21815,31 @@
       </a:bgFillStyleLst>
     </a:fmtScheme>
   </a:themeElements>
-  <a:objectDefaults/>
+  <a:objectDefaults>
+    <a:lnDef>
+      <a:spPr/>
+      <a:bodyPr/>
+      <a:lstStyle/>
+      <a:style>
+        <a:lnRef idx="2">
+          <a:schemeClr val="accent1"/>
+        </a:lnRef>
+        <a:fillRef idx="0">
+          <a:schemeClr val="accent1"/>
+        </a:fillRef>
+        <a:effectRef idx="1">
+          <a:schemeClr val="accent1"/>
+        </a:effectRef>
+        <a:fontRef idx="minor">
+          <a:schemeClr val="tx1"/>
+        </a:fontRef>
+      </a:style>
+    </a:lnDef>
+  </a:objectDefaults>
   <a:extraClrSchemeLst/>
   <a:extLst>
     <a:ext uri="{05A4C25C-085E-4340-85A3-A5531E510DB2}">
-      <thm15:themeFamily xmlns:thm15="http://schemas.microsoft.com/office/thememl/2012/main" name="Office Theme" id="{62F939B6-93AF-4DB8-9C6B-D6C7DFDC589F}" vid="{4A3C46E8-61CC-4603-A589-7422A47A8E4A}"/>
+      <thm15:themeFamily xmlns:thm15="http://schemas.microsoft.com/office/thememl/2012/main" name="Office Theme" id="{2E142A2C-CD16-42D6-873A-C26D2A0506FA}" vid="{1BDDFF52-6CD6-40A5-AB3C-68EB2F1E4D0A}"/>
     </a:ext>
   </a:extLst>
 </a:theme>
